--- a/doc/iHealthSim.pptx
+++ b/doc/iHealthSim.pptx
@@ -5,25 +5,25 @@
     <p:sldMasterId id="2147483648" r:id="rId1"/>
   </p:sldMasterIdLst>
   <p:sldIdLst>
-    <p:sldId id="256" r:id="rId2"/>
-    <p:sldId id="257" r:id="rId3"/>
-    <p:sldId id="258" r:id="rId4"/>
-    <p:sldId id="259" r:id="rId5"/>
-    <p:sldId id="260" r:id="rId6"/>
-    <p:sldId id="261" r:id="rId7"/>
-    <p:sldId id="262" r:id="rId8"/>
-    <p:sldId id="263" r:id="rId9"/>
-    <p:sldId id="264" r:id="rId10"/>
-    <p:sldId id="265" r:id="rId11"/>
-    <p:sldId id="266" r:id="rId12"/>
-    <p:sldId id="267" r:id="rId13"/>
-    <p:sldId id="268" r:id="rId14"/>
-    <p:sldId id="269" r:id="rId15"/>
-    <p:sldId id="270" r:id="rId16"/>
-    <p:sldId id="271" r:id="rId17"/>
-    <p:sldId id="272" r:id="rId18"/>
+    <p:sldId id="256" r:id="rId7"/>
+    <p:sldId id="257" r:id="rId8"/>
+    <p:sldId id="258" r:id="rId9"/>
+    <p:sldId id="259" r:id="rId10"/>
+    <p:sldId id="260" r:id="rId11"/>
+    <p:sldId id="261" r:id="rId12"/>
+    <p:sldId id="262" r:id="rId13"/>
+    <p:sldId id="263" r:id="rId14"/>
+    <p:sldId id="264" r:id="rId15"/>
+    <p:sldId id="265" r:id="rId16"/>
+    <p:sldId id="266" r:id="rId17"/>
+    <p:sldId id="267" r:id="rId18"/>
+    <p:sldId id="268" r:id="rId19"/>
+    <p:sldId id="269" r:id="rId20"/>
+    <p:sldId id="270" r:id="rId21"/>
+    <p:sldId id="271" r:id="rId22"/>
+    <p:sldId id="272" r:id="rId23"/>
   </p:sldIdLst>
-  <p:sldSz cx="12192000" cy="6858000"/>
+  <p:sldSz cx="12191695" cy="6858000" type="screen4x3"/>
   <p:notesSz cx="6858000" cy="9144000"/>
   <p:defaultTextStyle>
     <a:defPPr>
@@ -120,31 +120,7 @@
       </a:defRPr>
     </a:lvl9pPr>
   </p:defaultTextStyle>
-  <p:extLst>
-    <p:ext uri="{EFAFB233-063F-42B5-8137-9DF3F51BA10A}">
-      <p15:sldGuideLst xmlns:p15="http://schemas.microsoft.com/office/powerpoint/2012/main">
-        <p15:guide id="1" orient="horz" pos="2160">
-          <p15:clr>
-            <a:srgbClr val="A4A3A4"/>
-          </p15:clr>
-        </p15:guide>
-        <p15:guide id="2" pos="2880">
-          <p15:clr>
-            <a:srgbClr val="A4A3A4"/>
-          </p15:clr>
-        </p15:guide>
-      </p15:sldGuideLst>
-    </p:ext>
-  </p:extLst>
 </p:presentation>
-</file>
-
-<file path=ppt/revisionInfo.xml><?xml version="1.0" encoding="utf-8"?>
-<p1510:revInfo xmlns:a="http://schemas.openxmlformats.org/drawingml/2006/main" xmlns:r="http://schemas.openxmlformats.org/officeDocument/2006/relationships" xmlns:p1510="http://schemas.microsoft.com/office/powerpoint/2015/10/main">
-  <p1510:revLst>
-    <p1510:client id="{0B6BE154-6BB9-D44C-9111-6AA3FF5780FC}" v="2" dt="2026-05-25T05:54:47.056"/>
-  </p1510:revLst>
-</p1510:revInfo>
 </file>
 
 <file path=ppt/slideLayouts/slideLayout1.xml><?xml version="1.0" encoding="utf-8"?>
@@ -185,9 +161,10 @@
           <a:lstStyle/>
           <a:p>
             <a:r>
-              <a:rPr lang="en-US"/>
+              <a:rPr lang="en-US" smtClean="0"/>
               <a:t>Click to edit Master title style</a:t>
             </a:r>
+            <a:endParaRPr lang="en-US"/>
           </a:p>
         </p:txBody>
       </p:sp>
@@ -303,9 +280,10 @@
           </a:lstStyle>
           <a:p>
             <a:r>
-              <a:rPr lang="en-US"/>
+              <a:rPr lang="en-US" smtClean="0"/>
               <a:t>Click to edit Master subtitle style</a:t>
             </a:r>
+            <a:endParaRPr lang="en-US"/>
           </a:p>
         </p:txBody>
       </p:sp>
@@ -326,7 +304,7 @@
           <a:p>
             <a:fld id="{5BCAD085-E8A6-8845-BD4E-CB4CCA059FC4}" type="datetimeFigureOut">
               <a:rPr lang="en-US" smtClean="0"/>
-              <a:t>5/25/26</a:t>
+              <a:t>1/27/13</a:t>
             </a:fld>
             <a:endParaRPr lang="en-US"/>
           </a:p>
@@ -420,9 +398,10 @@
           <a:lstStyle/>
           <a:p>
             <a:r>
-              <a:rPr lang="en-US"/>
+              <a:rPr lang="en-US" smtClean="0"/>
               <a:t>Click to edit Master title style</a:t>
             </a:r>
+            <a:endParaRPr lang="en-US"/>
           </a:p>
         </p:txBody>
       </p:sp>
@@ -443,37 +422,38 @@
           <a:p>
             <a:pPr lvl="0"/>
             <a:r>
-              <a:rPr lang="en-US"/>
+              <a:rPr lang="en-US" smtClean="0"/>
               <a:t>Click to edit Master text styles</a:t>
             </a:r>
           </a:p>
           <a:p>
             <a:pPr lvl="1"/>
             <a:r>
-              <a:rPr lang="en-US"/>
+              <a:rPr lang="en-US" smtClean="0"/>
               <a:t>Second level</a:t>
             </a:r>
           </a:p>
           <a:p>
             <a:pPr lvl="2"/>
             <a:r>
-              <a:rPr lang="en-US"/>
+              <a:rPr lang="en-US" smtClean="0"/>
               <a:t>Third level</a:t>
             </a:r>
           </a:p>
           <a:p>
             <a:pPr lvl="3"/>
             <a:r>
-              <a:rPr lang="en-US"/>
+              <a:rPr lang="en-US" smtClean="0"/>
               <a:t>Fourth level</a:t>
             </a:r>
           </a:p>
           <a:p>
             <a:pPr lvl="4"/>
             <a:r>
-              <a:rPr lang="en-US"/>
+              <a:rPr lang="en-US" smtClean="0"/>
               <a:t>Fifth level</a:t>
             </a:r>
+            <a:endParaRPr lang="en-US"/>
           </a:p>
         </p:txBody>
       </p:sp>
@@ -494,7 +474,7 @@
           <a:p>
             <a:fld id="{5BCAD085-E8A6-8845-BD4E-CB4CCA059FC4}" type="datetimeFigureOut">
               <a:rPr lang="en-US" smtClean="0"/>
-              <a:t>5/25/26</a:t>
+              <a:t>1/27/13</a:t>
             </a:fld>
             <a:endParaRPr lang="en-US"/>
           </a:p>
@@ -593,9 +573,10 @@
           <a:lstStyle/>
           <a:p>
             <a:r>
-              <a:rPr lang="en-US"/>
+              <a:rPr lang="en-US" smtClean="0"/>
               <a:t>Click to edit Master title style</a:t>
             </a:r>
+            <a:endParaRPr lang="en-US"/>
           </a:p>
         </p:txBody>
       </p:sp>
@@ -621,37 +602,38 @@
           <a:p>
             <a:pPr lvl="0"/>
             <a:r>
-              <a:rPr lang="en-US"/>
+              <a:rPr lang="en-US" smtClean="0"/>
               <a:t>Click to edit Master text styles</a:t>
             </a:r>
           </a:p>
           <a:p>
             <a:pPr lvl="1"/>
             <a:r>
-              <a:rPr lang="en-US"/>
+              <a:rPr lang="en-US" smtClean="0"/>
               <a:t>Second level</a:t>
             </a:r>
           </a:p>
           <a:p>
             <a:pPr lvl="2"/>
             <a:r>
-              <a:rPr lang="en-US"/>
+              <a:rPr lang="en-US" smtClean="0"/>
               <a:t>Third level</a:t>
             </a:r>
           </a:p>
           <a:p>
             <a:pPr lvl="3"/>
             <a:r>
-              <a:rPr lang="en-US"/>
+              <a:rPr lang="en-US" smtClean="0"/>
               <a:t>Fourth level</a:t>
             </a:r>
           </a:p>
           <a:p>
             <a:pPr lvl="4"/>
             <a:r>
-              <a:rPr lang="en-US"/>
+              <a:rPr lang="en-US" smtClean="0"/>
               <a:t>Fifth level</a:t>
             </a:r>
+            <a:endParaRPr lang="en-US"/>
           </a:p>
         </p:txBody>
       </p:sp>
@@ -672,7 +654,7 @@
           <a:p>
             <a:fld id="{5BCAD085-E8A6-8845-BD4E-CB4CCA059FC4}" type="datetimeFigureOut">
               <a:rPr lang="en-US" smtClean="0"/>
-              <a:t>5/25/26</a:t>
+              <a:t>1/27/13</a:t>
             </a:fld>
             <a:endParaRPr lang="en-US"/>
           </a:p>
@@ -766,9 +748,10 @@
           <a:lstStyle/>
           <a:p>
             <a:r>
-              <a:rPr lang="en-US"/>
+              <a:rPr lang="en-US" smtClean="0"/>
               <a:t>Click to edit Master title style</a:t>
             </a:r>
+            <a:endParaRPr lang="en-US"/>
           </a:p>
         </p:txBody>
       </p:sp>
@@ -789,37 +772,38 @@
           <a:p>
             <a:pPr lvl="0"/>
             <a:r>
-              <a:rPr lang="en-US"/>
+              <a:rPr lang="en-US" smtClean="0"/>
               <a:t>Click to edit Master text styles</a:t>
             </a:r>
           </a:p>
           <a:p>
             <a:pPr lvl="1"/>
             <a:r>
-              <a:rPr lang="en-US"/>
+              <a:rPr lang="en-US" smtClean="0"/>
               <a:t>Second level</a:t>
             </a:r>
           </a:p>
           <a:p>
             <a:pPr lvl="2"/>
             <a:r>
-              <a:rPr lang="en-US"/>
+              <a:rPr lang="en-US" smtClean="0"/>
               <a:t>Third level</a:t>
             </a:r>
           </a:p>
           <a:p>
             <a:pPr lvl="3"/>
             <a:r>
-              <a:rPr lang="en-US"/>
+              <a:rPr lang="en-US" smtClean="0"/>
               <a:t>Fourth level</a:t>
             </a:r>
           </a:p>
           <a:p>
             <a:pPr lvl="4"/>
             <a:r>
-              <a:rPr lang="en-US"/>
+              <a:rPr lang="en-US" smtClean="0"/>
               <a:t>Fifth level</a:t>
             </a:r>
+            <a:endParaRPr lang="en-US"/>
           </a:p>
         </p:txBody>
       </p:sp>
@@ -840,7 +824,7 @@
           <a:p>
             <a:fld id="{5BCAD085-E8A6-8845-BD4E-CB4CCA059FC4}" type="datetimeFigureOut">
               <a:rPr lang="en-US" smtClean="0"/>
-              <a:t>5/25/26</a:t>
+              <a:t>1/27/13</a:t>
             </a:fld>
             <a:endParaRPr lang="en-US"/>
           </a:p>
@@ -943,9 +927,10 @@
           </a:lstStyle>
           <a:p>
             <a:r>
-              <a:rPr lang="en-US"/>
+              <a:rPr lang="en-US" smtClean="0"/>
               <a:t>Click to edit Master title style</a:t>
             </a:r>
+            <a:endParaRPr lang="en-US"/>
           </a:p>
         </p:txBody>
       </p:sp>
@@ -1062,7 +1047,7 @@
           <a:p>
             <a:pPr lvl="0"/>
             <a:r>
-              <a:rPr lang="en-US"/>
+              <a:rPr lang="en-US" smtClean="0"/>
               <a:t>Click to edit Master text styles</a:t>
             </a:r>
           </a:p>
@@ -1085,7 +1070,7 @@
           <a:p>
             <a:fld id="{5BCAD085-E8A6-8845-BD4E-CB4CCA059FC4}" type="datetimeFigureOut">
               <a:rPr lang="en-US" smtClean="0"/>
-              <a:t>5/25/26</a:t>
+              <a:t>1/27/13</a:t>
             </a:fld>
             <a:endParaRPr lang="en-US"/>
           </a:p>
@@ -1179,9 +1164,10 @@
           <a:lstStyle/>
           <a:p>
             <a:r>
-              <a:rPr lang="en-US"/>
+              <a:rPr lang="en-US" smtClean="0"/>
               <a:t>Click to edit Master title style</a:t>
             </a:r>
+            <a:endParaRPr lang="en-US"/>
           </a:p>
         </p:txBody>
       </p:sp>
@@ -1235,37 +1221,38 @@
           <a:p>
             <a:pPr lvl="0"/>
             <a:r>
-              <a:rPr lang="en-US"/>
+              <a:rPr lang="en-US" smtClean="0"/>
               <a:t>Click to edit Master text styles</a:t>
             </a:r>
           </a:p>
           <a:p>
             <a:pPr lvl="1"/>
             <a:r>
-              <a:rPr lang="en-US"/>
+              <a:rPr lang="en-US" smtClean="0"/>
               <a:t>Second level</a:t>
             </a:r>
           </a:p>
           <a:p>
             <a:pPr lvl="2"/>
             <a:r>
-              <a:rPr lang="en-US"/>
+              <a:rPr lang="en-US" smtClean="0"/>
               <a:t>Third level</a:t>
             </a:r>
           </a:p>
           <a:p>
             <a:pPr lvl="3"/>
             <a:r>
-              <a:rPr lang="en-US"/>
+              <a:rPr lang="en-US" smtClean="0"/>
               <a:t>Fourth level</a:t>
             </a:r>
           </a:p>
           <a:p>
             <a:pPr lvl="4"/>
             <a:r>
-              <a:rPr lang="en-US"/>
+              <a:rPr lang="en-US" smtClean="0"/>
               <a:t>Fifth level</a:t>
             </a:r>
+            <a:endParaRPr lang="en-US"/>
           </a:p>
         </p:txBody>
       </p:sp>
@@ -1319,37 +1306,38 @@
           <a:p>
             <a:pPr lvl="0"/>
             <a:r>
-              <a:rPr lang="en-US"/>
+              <a:rPr lang="en-US" smtClean="0"/>
               <a:t>Click to edit Master text styles</a:t>
             </a:r>
           </a:p>
           <a:p>
             <a:pPr lvl="1"/>
             <a:r>
-              <a:rPr lang="en-US"/>
+              <a:rPr lang="en-US" smtClean="0"/>
               <a:t>Second level</a:t>
             </a:r>
           </a:p>
           <a:p>
             <a:pPr lvl="2"/>
             <a:r>
-              <a:rPr lang="en-US"/>
+              <a:rPr lang="en-US" smtClean="0"/>
               <a:t>Third level</a:t>
             </a:r>
           </a:p>
           <a:p>
             <a:pPr lvl="3"/>
             <a:r>
-              <a:rPr lang="en-US"/>
+              <a:rPr lang="en-US" smtClean="0"/>
               <a:t>Fourth level</a:t>
             </a:r>
           </a:p>
           <a:p>
             <a:pPr lvl="4"/>
             <a:r>
-              <a:rPr lang="en-US"/>
+              <a:rPr lang="en-US" smtClean="0"/>
               <a:t>Fifth level</a:t>
             </a:r>
+            <a:endParaRPr lang="en-US"/>
           </a:p>
         </p:txBody>
       </p:sp>
@@ -1370,7 +1358,7 @@
           <a:p>
             <a:fld id="{5BCAD085-E8A6-8845-BD4E-CB4CCA059FC4}" type="datetimeFigureOut">
               <a:rPr lang="en-US" smtClean="0"/>
-              <a:t>5/25/26</a:t>
+              <a:t>1/27/13</a:t>
             </a:fld>
             <a:endParaRPr lang="en-US"/>
           </a:p>
@@ -1468,9 +1456,10 @@
           </a:lstStyle>
           <a:p>
             <a:r>
-              <a:rPr lang="en-US"/>
+              <a:rPr lang="en-US" smtClean="0"/>
               <a:t>Click to edit Master title style</a:t>
             </a:r>
+            <a:endParaRPr lang="en-US"/>
           </a:p>
         </p:txBody>
       </p:sp>
@@ -1533,7 +1522,7 @@
           <a:p>
             <a:pPr lvl="0"/>
             <a:r>
-              <a:rPr lang="en-US"/>
+              <a:rPr lang="en-US" smtClean="0"/>
               <a:t>Click to edit Master text styles</a:t>
             </a:r>
           </a:p>
@@ -1589,37 +1578,38 @@
           <a:p>
             <a:pPr lvl="0"/>
             <a:r>
-              <a:rPr lang="en-US"/>
+              <a:rPr lang="en-US" smtClean="0"/>
               <a:t>Click to edit Master text styles</a:t>
             </a:r>
           </a:p>
           <a:p>
             <a:pPr lvl="1"/>
             <a:r>
-              <a:rPr lang="en-US"/>
+              <a:rPr lang="en-US" smtClean="0"/>
               <a:t>Second level</a:t>
             </a:r>
           </a:p>
           <a:p>
             <a:pPr lvl="2"/>
             <a:r>
-              <a:rPr lang="en-US"/>
+              <a:rPr lang="en-US" smtClean="0"/>
               <a:t>Third level</a:t>
             </a:r>
           </a:p>
           <a:p>
             <a:pPr lvl="3"/>
             <a:r>
-              <a:rPr lang="en-US"/>
+              <a:rPr lang="en-US" smtClean="0"/>
               <a:t>Fourth level</a:t>
             </a:r>
           </a:p>
           <a:p>
             <a:pPr lvl="4"/>
             <a:r>
-              <a:rPr lang="en-US"/>
+              <a:rPr lang="en-US" smtClean="0"/>
               <a:t>Fifth level</a:t>
             </a:r>
+            <a:endParaRPr lang="en-US"/>
           </a:p>
         </p:txBody>
       </p:sp>
@@ -1682,7 +1672,7 @@
           <a:p>
             <a:pPr lvl="0"/>
             <a:r>
-              <a:rPr lang="en-US"/>
+              <a:rPr lang="en-US" smtClean="0"/>
               <a:t>Click to edit Master text styles</a:t>
             </a:r>
           </a:p>
@@ -1738,37 +1728,38 @@
           <a:p>
             <a:pPr lvl="0"/>
             <a:r>
-              <a:rPr lang="en-US"/>
+              <a:rPr lang="en-US" smtClean="0"/>
               <a:t>Click to edit Master text styles</a:t>
             </a:r>
           </a:p>
           <a:p>
             <a:pPr lvl="1"/>
             <a:r>
-              <a:rPr lang="en-US"/>
+              <a:rPr lang="en-US" smtClean="0"/>
               <a:t>Second level</a:t>
             </a:r>
           </a:p>
           <a:p>
             <a:pPr lvl="2"/>
             <a:r>
-              <a:rPr lang="en-US"/>
+              <a:rPr lang="en-US" smtClean="0"/>
               <a:t>Third level</a:t>
             </a:r>
           </a:p>
           <a:p>
             <a:pPr lvl="3"/>
             <a:r>
-              <a:rPr lang="en-US"/>
+              <a:rPr lang="en-US" smtClean="0"/>
               <a:t>Fourth level</a:t>
             </a:r>
           </a:p>
           <a:p>
             <a:pPr lvl="4"/>
             <a:r>
-              <a:rPr lang="en-US"/>
+              <a:rPr lang="en-US" smtClean="0"/>
               <a:t>Fifth level</a:t>
             </a:r>
+            <a:endParaRPr lang="en-US"/>
           </a:p>
         </p:txBody>
       </p:sp>
@@ -1789,7 +1780,7 @@
           <a:p>
             <a:fld id="{5BCAD085-E8A6-8845-BD4E-CB4CCA059FC4}" type="datetimeFigureOut">
               <a:rPr lang="en-US" smtClean="0"/>
-              <a:t>5/25/26</a:t>
+              <a:t>1/27/13</a:t>
             </a:fld>
             <a:endParaRPr lang="en-US"/>
           </a:p>
@@ -1883,9 +1874,10 @@
           <a:lstStyle/>
           <a:p>
             <a:r>
-              <a:rPr lang="en-US"/>
+              <a:rPr lang="en-US" smtClean="0"/>
               <a:t>Click to edit Master title style</a:t>
             </a:r>
+            <a:endParaRPr lang="en-US"/>
           </a:p>
         </p:txBody>
       </p:sp>
@@ -1906,7 +1898,7 @@
           <a:p>
             <a:fld id="{5BCAD085-E8A6-8845-BD4E-CB4CCA059FC4}" type="datetimeFigureOut">
               <a:rPr lang="en-US" smtClean="0"/>
-              <a:t>5/25/26</a:t>
+              <a:t>1/27/13</a:t>
             </a:fld>
             <a:endParaRPr lang="en-US"/>
           </a:p>
@@ -2001,7 +1993,7 @@
           <a:p>
             <a:fld id="{5BCAD085-E8A6-8845-BD4E-CB4CCA059FC4}" type="datetimeFigureOut">
               <a:rPr lang="en-US" smtClean="0"/>
-              <a:t>5/25/26</a:t>
+              <a:t>1/27/13</a:t>
             </a:fld>
             <a:endParaRPr lang="en-US"/>
           </a:p>
@@ -2104,9 +2096,10 @@
           </a:lstStyle>
           <a:p>
             <a:r>
-              <a:rPr lang="en-US"/>
+              <a:rPr lang="en-US" smtClean="0"/>
               <a:t>Click to edit Master title style</a:t>
             </a:r>
+            <a:endParaRPr lang="en-US"/>
           </a:p>
         </p:txBody>
       </p:sp>
@@ -2160,37 +2153,38 @@
           <a:p>
             <a:pPr lvl="0"/>
             <a:r>
-              <a:rPr lang="en-US"/>
+              <a:rPr lang="en-US" smtClean="0"/>
               <a:t>Click to edit Master text styles</a:t>
             </a:r>
           </a:p>
           <a:p>
             <a:pPr lvl="1"/>
             <a:r>
-              <a:rPr lang="en-US"/>
+              <a:rPr lang="en-US" smtClean="0"/>
               <a:t>Second level</a:t>
             </a:r>
           </a:p>
           <a:p>
             <a:pPr lvl="2"/>
             <a:r>
-              <a:rPr lang="en-US"/>
+              <a:rPr lang="en-US" smtClean="0"/>
               <a:t>Third level</a:t>
             </a:r>
           </a:p>
           <a:p>
             <a:pPr lvl="3"/>
             <a:r>
-              <a:rPr lang="en-US"/>
+              <a:rPr lang="en-US" smtClean="0"/>
               <a:t>Fourth level</a:t>
             </a:r>
           </a:p>
           <a:p>
             <a:pPr lvl="4"/>
             <a:r>
-              <a:rPr lang="en-US"/>
+              <a:rPr lang="en-US" smtClean="0"/>
               <a:t>Fifth level</a:t>
             </a:r>
+            <a:endParaRPr lang="en-US"/>
           </a:p>
         </p:txBody>
       </p:sp>
@@ -2253,7 +2247,7 @@
           <a:p>
             <a:pPr lvl="0"/>
             <a:r>
-              <a:rPr lang="en-US"/>
+              <a:rPr lang="en-US" smtClean="0"/>
               <a:t>Click to edit Master text styles</a:t>
             </a:r>
           </a:p>
@@ -2276,7 +2270,7 @@
           <a:p>
             <a:fld id="{5BCAD085-E8A6-8845-BD4E-CB4CCA059FC4}" type="datetimeFigureOut">
               <a:rPr lang="en-US" smtClean="0"/>
-              <a:t>5/25/26</a:t>
+              <a:t>1/27/13</a:t>
             </a:fld>
             <a:endParaRPr lang="en-US"/>
           </a:p>
@@ -2379,9 +2373,10 @@
           </a:lstStyle>
           <a:p>
             <a:r>
-              <a:rPr lang="en-US"/>
+              <a:rPr lang="en-US" smtClean="0"/>
               <a:t>Click to edit Master title style</a:t>
             </a:r>
+            <a:endParaRPr lang="en-US"/>
           </a:p>
         </p:txBody>
       </p:sp>
@@ -2505,7 +2500,7 @@
           <a:p>
             <a:pPr lvl="0"/>
             <a:r>
-              <a:rPr lang="en-US"/>
+              <a:rPr lang="en-US" smtClean="0"/>
               <a:t>Click to edit Master text styles</a:t>
             </a:r>
           </a:p>
@@ -2528,7 +2523,7 @@
           <a:p>
             <a:fld id="{5BCAD085-E8A6-8845-BD4E-CB4CCA059FC4}" type="datetimeFigureOut">
               <a:rPr lang="en-US" smtClean="0"/>
-              <a:t>5/25/26</a:t>
+              <a:t>1/27/13</a:t>
             </a:fld>
             <a:endParaRPr lang="en-US"/>
           </a:p>
@@ -2637,9 +2632,10 @@
           <a:lstStyle/>
           <a:p>
             <a:r>
-              <a:rPr lang="en-US"/>
+              <a:rPr lang="en-US" smtClean="0"/>
               <a:t>Click to edit Master title style</a:t>
             </a:r>
+            <a:endParaRPr lang="en-US"/>
           </a:p>
         </p:txBody>
       </p:sp>
@@ -2670,37 +2666,38 @@
           <a:p>
             <a:pPr lvl="0"/>
             <a:r>
-              <a:rPr lang="en-US"/>
+              <a:rPr lang="en-US" smtClean="0"/>
               <a:t>Click to edit Master text styles</a:t>
             </a:r>
           </a:p>
           <a:p>
             <a:pPr lvl="1"/>
             <a:r>
-              <a:rPr lang="en-US"/>
+              <a:rPr lang="en-US" smtClean="0"/>
               <a:t>Second level</a:t>
             </a:r>
           </a:p>
           <a:p>
             <a:pPr lvl="2"/>
             <a:r>
-              <a:rPr lang="en-US"/>
+              <a:rPr lang="en-US" smtClean="0"/>
               <a:t>Third level</a:t>
             </a:r>
           </a:p>
           <a:p>
             <a:pPr lvl="3"/>
             <a:r>
-              <a:rPr lang="en-US"/>
+              <a:rPr lang="en-US" smtClean="0"/>
               <a:t>Fourth level</a:t>
             </a:r>
           </a:p>
           <a:p>
             <a:pPr lvl="4"/>
             <a:r>
-              <a:rPr lang="en-US"/>
+              <a:rPr lang="en-US" smtClean="0"/>
               <a:t>Fifth level</a:t>
             </a:r>
+            <a:endParaRPr lang="en-US"/>
           </a:p>
         </p:txBody>
       </p:sp>
@@ -2739,7 +2736,7 @@
           <a:p>
             <a:fld id="{5BCAD085-E8A6-8845-BD4E-CB4CCA059FC4}" type="datetimeFigureOut">
               <a:rPr lang="en-US" smtClean="0"/>
-              <a:t>5/25/26</a:t>
+              <a:t>1/27/13</a:t>
             </a:fld>
             <a:endParaRPr lang="en-US"/>
           </a:p>
@@ -3098,7 +3095,7 @@
 </file>
 
 <file path=ppt/slides/slide1.xml><?xml version="1.0" encoding="utf-8"?>
-<p:sld xmlns:a="http://schemas.openxmlformats.org/drawingml/2006/main" xmlns:r="http://schemas.openxmlformats.org/officeDocument/2006/relationships" xmlns:p="http://schemas.openxmlformats.org/presentationml/2006/main">
+<p:sld xmlns:a="http://schemas.openxmlformats.org/drawingml/2006/main" xmlns:p="http://schemas.openxmlformats.org/presentationml/2006/main" xmlns:r="http://schemas.openxmlformats.org/officeDocument/2006/relationships">
   <p:cSld>
     <p:bg>
       <p:bgPr>
@@ -3114,26 +3111,19 @@
         <p:cNvGrpSpPr/>
         <p:nvPr/>
       </p:nvGrpSpPr>
-      <p:grpSpPr>
-        <a:xfrm>
-          <a:off x="0" y="0"/>
-          <a:ext cx="0" cy="0"/>
-          <a:chOff x="0" y="0"/>
-          <a:chExt cx="0" cy="0"/>
-        </a:xfrm>
-      </p:grpSpPr>
-      <p:sp>
-        <p:nvSpPr>
-          <p:cNvPr id="3" name="Oval 2"/>
+      <p:grpSpPr/>
+      <p:sp>
+        <p:nvSpPr>
+          <p:cNvPr id="2" name="Rounded Rectangle 1"/>
           <p:cNvSpPr/>
           <p:nvPr/>
         </p:nvSpPr>
         <p:spPr>
           <a:xfrm>
-            <a:off x="5577840" y="1463040"/>
-            <a:ext cx="1097280" cy="1097280"/>
-          </a:xfrm>
-          <a:prstGeom prst="ellipse">
+            <a:off x="0" y="0"/>
+            <a:ext cx="12191695" cy="73152"/>
+          </a:xfrm>
+          <a:prstGeom prst="roundRect">
             <a:avLst/>
           </a:prstGeom>
           <a:solidFill>
@@ -3158,7 +3148,50 @@
           </a:fontRef>
         </p:style>
         <p:txBody>
-          <a:bodyPr wrap="none" rtlCol="0" anchor="ctr"/>
+          <a:bodyPr rtlCol="0" anchor="ctr"/>
+          <a:lstStyle/>
+          <a:p>
+            <a:pPr algn="ctr"/>
+          </a:p>
+        </p:txBody>
+      </p:sp>
+      <p:sp>
+        <p:nvSpPr>
+          <p:cNvPr id="3" name="Oval 2"/>
+          <p:cNvSpPr/>
+          <p:nvPr/>
+        </p:nvSpPr>
+        <p:spPr>
+          <a:xfrm>
+            <a:off x="5577840" y="1463040"/>
+            <a:ext cx="1097280" cy="1097280"/>
+          </a:xfrm>
+          <a:prstGeom prst="ellipse">
+            <a:avLst/>
+          </a:prstGeom>
+          <a:solidFill>
+            <a:srgbClr val="1A73E8"/>
+          </a:solidFill>
+          <a:ln>
+            <a:noFill/>
+          </a:ln>
+        </p:spPr>
+        <p:style>
+          <a:lnRef idx="1">
+            <a:schemeClr val="accent1"/>
+          </a:lnRef>
+          <a:fillRef idx="3">
+            <a:schemeClr val="accent1"/>
+          </a:fillRef>
+          <a:effectRef idx="2">
+            <a:schemeClr val="accent1"/>
+          </a:effectRef>
+          <a:fontRef idx="minor">
+            <a:schemeClr val="lt1"/>
+          </a:fontRef>
+        </p:style>
+        <p:txBody>
+          <a:bodyPr rtlCol="0" anchor="ctr" wrap="none"/>
           <a:lstStyle/>
           <a:p>
             <a:pPr algn="ctr">
@@ -3218,7 +3251,7 @@
         <p:spPr>
           <a:xfrm>
             <a:off x="457200" y="3931920"/>
-            <a:ext cx="11247120" cy="1015663"/>
+            <a:ext cx="11247120" cy="731520"/>
           </a:xfrm>
           <a:prstGeom prst="rect">
             <a:avLst/>
@@ -3245,33 +3278,6 @@
             <a:r>
               <a:t>全仿真 · 完整链路 · 实时看板</a:t>
             </a:r>
-            <a:endParaRPr lang="en-US"/>
-          </a:p>
-          <a:p>
-            <a:pPr algn="ctr">
-              <a:defRPr sz="2000" b="0">
-                <a:solidFill>
-                  <a:srgbClr val="64748B"/>
-                </a:solidFill>
-              </a:defRPr>
-            </a:pPr>
-            <a:r>
-              <a:rPr lang="zh-CN" altLang="en-US"/>
-              <a:t>互联</a:t>
-            </a:r>
-            <a:r>
-              <a:rPr lang="en-US" altLang="zh-CN"/>
-              <a:t>2313</a:t>
-            </a:r>
-            <a:r>
-              <a:rPr lang="zh-CN" altLang="en-US"/>
-              <a:t> 组别</a:t>
-            </a:r>
-            <a:r>
-              <a:rPr lang="en-US" altLang="zh-CN"/>
-              <a:t>2</a:t>
-            </a:r>
-            <a:endParaRPr/>
           </a:p>
         </p:txBody>
       </p:sp>
@@ -3354,7 +3360,7 @@
 </file>
 
 <file path=ppt/slides/slide10.xml><?xml version="1.0" encoding="utf-8"?>
-<p:sld xmlns:a="http://schemas.openxmlformats.org/drawingml/2006/main" xmlns:r="http://schemas.openxmlformats.org/officeDocument/2006/relationships" xmlns:p="http://schemas.openxmlformats.org/presentationml/2006/main">
+<p:sld xmlns:a="http://schemas.openxmlformats.org/drawingml/2006/main" xmlns:p="http://schemas.openxmlformats.org/presentationml/2006/main" xmlns:r="http://schemas.openxmlformats.org/officeDocument/2006/relationships">
   <p:cSld>
     <p:bg>
       <p:bgPr>
@@ -3370,14 +3376,7 @@
         <p:cNvGrpSpPr/>
         <p:nvPr/>
       </p:nvGrpSpPr>
-      <p:grpSpPr>
-        <a:xfrm>
-          <a:off x="0" y="0"/>
-          <a:ext cx="0" cy="0"/>
-          <a:chOff x="0" y="0"/>
-          <a:chExt cx="0" cy="0"/>
-        </a:xfrm>
-      </p:grpSpPr>
+      <p:grpSpPr/>
       <p:sp>
         <p:nvSpPr>
           <p:cNvPr id="2" name="TextBox 1"/>
@@ -3492,7 +3491,7 @@
 </file>
 
 <file path=ppt/slides/slide11.xml><?xml version="1.0" encoding="utf-8"?>
-<p:sld xmlns:a="http://schemas.openxmlformats.org/drawingml/2006/main" xmlns:r="http://schemas.openxmlformats.org/officeDocument/2006/relationships" xmlns:p="http://schemas.openxmlformats.org/presentationml/2006/main">
+<p:sld xmlns:a="http://schemas.openxmlformats.org/drawingml/2006/main" xmlns:p="http://schemas.openxmlformats.org/presentationml/2006/main" xmlns:r="http://schemas.openxmlformats.org/officeDocument/2006/relationships">
   <p:cSld>
     <p:bg>
       <p:bgPr>
@@ -3508,14 +3507,7 @@
         <p:cNvGrpSpPr/>
         <p:nvPr/>
       </p:nvGrpSpPr>
-      <p:grpSpPr>
-        <a:xfrm>
-          <a:off x="0" y="0"/>
-          <a:ext cx="0" cy="0"/>
-          <a:chOff x="0" y="0"/>
-          <a:chExt cx="0" cy="0"/>
-        </a:xfrm>
-      </p:grpSpPr>
+      <p:grpSpPr/>
       <p:sp>
         <p:nvSpPr>
           <p:cNvPr id="2" name="TextBox 1"/>
@@ -3624,7 +3616,7 @@
           </a:fontRef>
         </p:style>
         <p:txBody>
-          <a:bodyPr wrap="square" lIns="182880" tIns="137160" rIns="137160" bIns="91440" rtlCol="0" anchor="ctr"/>
+          <a:bodyPr rtlCol="0" anchor="ctr" wrap="square" lIns="182880" rIns="137160" tIns="137160" bIns="91440"/>
           <a:lstStyle/>
           <a:p>
             <a:pPr algn="ctr">
@@ -3696,7 +3688,7 @@
           </a:fontRef>
         </p:style>
         <p:txBody>
-          <a:bodyPr wrap="square" lIns="182880" tIns="137160" rIns="137160" bIns="91440" rtlCol="0" anchor="ctr"/>
+          <a:bodyPr rtlCol="0" anchor="ctr" wrap="square" lIns="182880" rIns="137160" tIns="137160" bIns="91440"/>
           <a:lstStyle/>
           <a:p>
             <a:pPr algn="ctr">
@@ -3768,7 +3760,7 @@
           </a:fontRef>
         </p:style>
         <p:txBody>
-          <a:bodyPr wrap="square" lIns="182880" tIns="137160" rIns="137160" bIns="91440" rtlCol="0" anchor="ctr"/>
+          <a:bodyPr rtlCol="0" anchor="ctr" wrap="square" lIns="182880" rIns="137160" tIns="137160" bIns="91440"/>
           <a:lstStyle/>
           <a:p>
             <a:pPr algn="ctr">
@@ -3840,7 +3832,7 @@
           </a:fontRef>
         </p:style>
         <p:txBody>
-          <a:bodyPr wrap="square" lIns="182880" tIns="137160" rIns="137160" bIns="91440" rtlCol="0" anchor="ctr"/>
+          <a:bodyPr rtlCol="0" anchor="ctr" wrap="square" lIns="182880" rIns="137160" tIns="137160" bIns="91440"/>
           <a:lstStyle/>
           <a:p>
             <a:pPr algn="ctr">
@@ -3928,27 +3920,9 @@
                 <a:tableStyleId>{5C22544A-7EE6-4342-B048-85BDC9FD1C3A}</a:tableStyleId>
               </a:tblPr>
               <a:tblGrid>
-                <a:gridCol w="1097280">
-                  <a:extLst>
-                    <a:ext uri="{9D8B030D-6E8A-4147-A177-3AD203B41FA5}">
-                      <a16:colId xmlns:a16="http://schemas.microsoft.com/office/drawing/2014/main" val="20000"/>
-                    </a:ext>
-                  </a:extLst>
-                </a:gridCol>
-                <a:gridCol w="1645920">
-                  <a:extLst>
-                    <a:ext uri="{9D8B030D-6E8A-4147-A177-3AD203B41FA5}">
-                      <a16:colId xmlns:a16="http://schemas.microsoft.com/office/drawing/2014/main" val="20001"/>
-                    </a:ext>
-                  </a:extLst>
-                </a:gridCol>
-                <a:gridCol w="1097280">
-                  <a:extLst>
-                    <a:ext uri="{9D8B030D-6E8A-4147-A177-3AD203B41FA5}">
-                      <a16:colId xmlns:a16="http://schemas.microsoft.com/office/drawing/2014/main" val="20002"/>
-                    </a:ext>
-                  </a:extLst>
-                </a:gridCol>
+                <a:gridCol w="1097280"/>
+                <a:gridCol w="1645920"/>
+                <a:gridCol w="1097280"/>
               </a:tblGrid>
               <a:tr h="320040">
                 <a:tc>
@@ -4020,11 +3994,6 @@
                     </a:solidFill>
                   </a:tcPr>
                 </a:tc>
-                <a:extLst>
-                  <a:ext uri="{0D108BD9-81ED-4DB2-BD59-A6C34878D82A}">
-                    <a16:rowId xmlns:a16="http://schemas.microsoft.com/office/drawing/2014/main" val="10000"/>
-                  </a:ext>
-                </a:extLst>
               </a:tr>
               <a:tr h="320040">
                 <a:tc>
@@ -4084,11 +4053,6 @@
                   </a:txBody>
                   <a:tcPr/>
                 </a:tc>
-                <a:extLst>
-                  <a:ext uri="{0D108BD9-81ED-4DB2-BD59-A6C34878D82A}">
-                    <a16:rowId xmlns:a16="http://schemas.microsoft.com/office/drawing/2014/main" val="10001"/>
-                  </a:ext>
-                </a:extLst>
               </a:tr>
               <a:tr h="320040">
                 <a:tc>
@@ -4148,11 +4112,6 @@
                   </a:txBody>
                   <a:tcPr/>
                 </a:tc>
-                <a:extLst>
-                  <a:ext uri="{0D108BD9-81ED-4DB2-BD59-A6C34878D82A}">
-                    <a16:rowId xmlns:a16="http://schemas.microsoft.com/office/drawing/2014/main" val="10002"/>
-                  </a:ext>
-                </a:extLst>
               </a:tr>
               <a:tr h="320040">
                 <a:tc>
@@ -4212,11 +4171,6 @@
                   </a:txBody>
                   <a:tcPr/>
                 </a:tc>
-                <a:extLst>
-                  <a:ext uri="{0D108BD9-81ED-4DB2-BD59-A6C34878D82A}">
-                    <a16:rowId xmlns:a16="http://schemas.microsoft.com/office/drawing/2014/main" val="10003"/>
-                  </a:ext>
-                </a:extLst>
               </a:tr>
               <a:tr h="320040">
                 <a:tc>
@@ -4276,11 +4230,6 @@
                   </a:txBody>
                   <a:tcPr/>
                 </a:tc>
-                <a:extLst>
-                  <a:ext uri="{0D108BD9-81ED-4DB2-BD59-A6C34878D82A}">
-                    <a16:rowId xmlns:a16="http://schemas.microsoft.com/office/drawing/2014/main" val="10004"/>
-                  </a:ext>
-                </a:extLst>
               </a:tr>
             </a:tbl>
           </a:graphicData>
@@ -4324,7 +4273,7 @@
           </a:fontRef>
         </p:style>
         <p:txBody>
-          <a:bodyPr wrap="square" lIns="182880" tIns="137160" rIns="137160" bIns="91440" rtlCol="0" anchor="ctr"/>
+          <a:bodyPr rtlCol="0" anchor="ctr" wrap="square" lIns="182880" rIns="137160" tIns="137160" bIns="91440"/>
           <a:lstStyle/>
           <a:p>
             <a:pPr algn="ctr">
@@ -4492,7 +4441,7 @@
 </file>
 
 <file path=ppt/slides/slide12.xml><?xml version="1.0" encoding="utf-8"?>
-<p:sld xmlns:a="http://schemas.openxmlformats.org/drawingml/2006/main" xmlns:r="http://schemas.openxmlformats.org/officeDocument/2006/relationships" xmlns:p="http://schemas.openxmlformats.org/presentationml/2006/main">
+<p:sld xmlns:a="http://schemas.openxmlformats.org/drawingml/2006/main" xmlns:p="http://schemas.openxmlformats.org/presentationml/2006/main" xmlns:r="http://schemas.openxmlformats.org/officeDocument/2006/relationships">
   <p:cSld>
     <p:bg>
       <p:bgPr>
@@ -4508,14 +4457,7 @@
         <p:cNvGrpSpPr/>
         <p:nvPr/>
       </p:nvGrpSpPr>
-      <p:grpSpPr>
-        <a:xfrm>
-          <a:off x="0" y="0"/>
-          <a:ext cx="0" cy="0"/>
-          <a:chOff x="0" y="0"/>
-          <a:chExt cx="0" cy="0"/>
-        </a:xfrm>
-      </p:grpSpPr>
+      <p:grpSpPr/>
       <p:sp>
         <p:nvSpPr>
           <p:cNvPr id="2" name="TextBox 1"/>
@@ -4630,7 +4572,7 @@
 </file>
 
 <file path=ppt/slides/slide13.xml><?xml version="1.0" encoding="utf-8"?>
-<p:sld xmlns:a="http://schemas.openxmlformats.org/drawingml/2006/main" xmlns:r="http://schemas.openxmlformats.org/officeDocument/2006/relationships" xmlns:p="http://schemas.openxmlformats.org/presentationml/2006/main">
+<p:sld xmlns:a="http://schemas.openxmlformats.org/drawingml/2006/main" xmlns:p="http://schemas.openxmlformats.org/presentationml/2006/main" xmlns:r="http://schemas.openxmlformats.org/officeDocument/2006/relationships">
   <p:cSld>
     <p:bg>
       <p:bgPr>
@@ -4646,14 +4588,7 @@
         <p:cNvGrpSpPr/>
         <p:nvPr/>
       </p:nvGrpSpPr>
-      <p:grpSpPr>
-        <a:xfrm>
-          <a:off x="0" y="0"/>
-          <a:ext cx="0" cy="0"/>
-          <a:chOff x="0" y="0"/>
-          <a:chExt cx="0" cy="0"/>
-        </a:xfrm>
-      </p:grpSpPr>
+      <p:grpSpPr/>
       <p:sp>
         <p:nvSpPr>
           <p:cNvPr id="2" name="TextBox 1"/>
@@ -4766,7 +4701,6 @@
           <a:lstStyle/>
           <a:p>
             <a:pPr algn="ctr"/>
-            <a:endParaRPr/>
           </a:p>
         </p:txBody>
       </p:sp>
@@ -4810,7 +4744,6 @@
           <a:lstStyle/>
           <a:p>
             <a:pPr algn="ctr"/>
-            <a:endParaRPr/>
           </a:p>
         </p:txBody>
       </p:sp>
@@ -4926,7 +4859,6 @@
           <a:lstStyle/>
           <a:p>
             <a:pPr algn="ctr"/>
-            <a:endParaRPr/>
           </a:p>
         </p:txBody>
       </p:sp>
@@ -4970,7 +4902,6 @@
           <a:lstStyle/>
           <a:p>
             <a:pPr algn="ctr"/>
-            <a:endParaRPr/>
           </a:p>
         </p:txBody>
       </p:sp>
@@ -5086,7 +5017,6 @@
           <a:lstStyle/>
           <a:p>
             <a:pPr algn="ctr"/>
-            <a:endParaRPr/>
           </a:p>
         </p:txBody>
       </p:sp>
@@ -5130,7 +5060,6 @@
           <a:lstStyle/>
           <a:p>
             <a:pPr algn="ctr"/>
-            <a:endParaRPr/>
           </a:p>
         </p:txBody>
       </p:sp>
@@ -5246,7 +5175,6 @@
           <a:lstStyle/>
           <a:p>
             <a:pPr algn="ctr"/>
-            <a:endParaRPr/>
           </a:p>
         </p:txBody>
       </p:sp>
@@ -5290,7 +5218,6 @@
           <a:lstStyle/>
           <a:p>
             <a:pPr algn="ctr"/>
-            <a:endParaRPr/>
           </a:p>
         </p:txBody>
       </p:sp>
@@ -5406,7 +5333,6 @@
           <a:lstStyle/>
           <a:p>
             <a:pPr algn="ctr"/>
-            <a:endParaRPr/>
           </a:p>
         </p:txBody>
       </p:sp>
@@ -5450,7 +5376,6 @@
           <a:lstStyle/>
           <a:p>
             <a:pPr algn="ctr"/>
-            <a:endParaRPr/>
           </a:p>
         </p:txBody>
       </p:sp>
@@ -5566,7 +5491,6 @@
           <a:lstStyle/>
           <a:p>
             <a:pPr algn="ctr"/>
-            <a:endParaRPr/>
           </a:p>
         </p:txBody>
       </p:sp>
@@ -5610,7 +5534,6 @@
           <a:lstStyle/>
           <a:p>
             <a:pPr algn="ctr"/>
-            <a:endParaRPr/>
           </a:p>
         </p:txBody>
       </p:sp>
@@ -5724,7 +5647,6 @@
           <a:lstStyle/>
           <a:p>
             <a:pPr algn="ctr"/>
-            <a:endParaRPr/>
           </a:p>
         </p:txBody>
       </p:sp>
@@ -5772,7 +5694,7 @@
 </file>
 
 <file path=ppt/slides/slide14.xml><?xml version="1.0" encoding="utf-8"?>
-<p:sld xmlns:a="http://schemas.openxmlformats.org/drawingml/2006/main" xmlns:r="http://schemas.openxmlformats.org/officeDocument/2006/relationships" xmlns:p="http://schemas.openxmlformats.org/presentationml/2006/main">
+<p:sld xmlns:a="http://schemas.openxmlformats.org/drawingml/2006/main" xmlns:p="http://schemas.openxmlformats.org/presentationml/2006/main" xmlns:r="http://schemas.openxmlformats.org/officeDocument/2006/relationships">
   <p:cSld>
     <p:bg>
       <p:bgPr>
@@ -5788,14 +5710,7 @@
         <p:cNvGrpSpPr/>
         <p:nvPr/>
       </p:nvGrpSpPr>
-      <p:grpSpPr>
-        <a:xfrm>
-          <a:off x="0" y="0"/>
-          <a:ext cx="0" cy="0"/>
-          <a:chOff x="0" y="0"/>
-          <a:chExt cx="0" cy="0"/>
-        </a:xfrm>
-      </p:grpSpPr>
+      <p:grpSpPr/>
       <p:sp>
         <p:nvSpPr>
           <p:cNvPr id="2" name="TextBox 1"/>
@@ -5910,7 +5825,7 @@
 </file>
 
 <file path=ppt/slides/slide15.xml><?xml version="1.0" encoding="utf-8"?>
-<p:sld xmlns:a="http://schemas.openxmlformats.org/drawingml/2006/main" xmlns:r="http://schemas.openxmlformats.org/officeDocument/2006/relationships" xmlns:p="http://schemas.openxmlformats.org/presentationml/2006/main">
+<p:sld xmlns:a="http://schemas.openxmlformats.org/drawingml/2006/main" xmlns:p="http://schemas.openxmlformats.org/presentationml/2006/main" xmlns:r="http://schemas.openxmlformats.org/officeDocument/2006/relationships">
   <p:cSld>
     <p:bg>
       <p:bgPr>
@@ -5926,14 +5841,7 @@
         <p:cNvGrpSpPr/>
         <p:nvPr/>
       </p:nvGrpSpPr>
-      <p:grpSpPr>
-        <a:xfrm>
-          <a:off x="0" y="0"/>
-          <a:ext cx="0" cy="0"/>
-          <a:chOff x="0" y="0"/>
-          <a:chExt cx="0" cy="0"/>
-        </a:xfrm>
-      </p:grpSpPr>
+      <p:grpSpPr/>
       <p:sp>
         <p:nvSpPr>
           <p:cNvPr id="2" name="TextBox 1"/>
@@ -6013,7 +5921,7 @@
         <p:spPr>
           <a:xfrm>
             <a:off x="731520" y="1280160"/>
-            <a:ext cx="5303520" cy="1327116"/>
+            <a:ext cx="5303520" cy="640080"/>
           </a:xfrm>
           <a:prstGeom prst="roundRect">
             <a:avLst/>
@@ -6040,7 +5948,7 @@
           </a:fontRef>
         </p:style>
         <p:txBody>
-          <a:bodyPr wrap="square" lIns="182880" tIns="109728" bIns="109728" rtlCol="0" anchor="ctr"/>
+          <a:bodyPr rtlCol="0" anchor="ctr" wrap="square" lIns="182880" tIns="109728" bIns="109728"/>
           <a:lstStyle/>
           <a:p>
             <a:pPr algn="ctr">
@@ -6112,7 +6020,7 @@
           </a:fontRef>
         </p:style>
         <p:txBody>
-          <a:bodyPr wrap="square" lIns="182880" tIns="109728" bIns="109728" rtlCol="0" anchor="ctr"/>
+          <a:bodyPr rtlCol="0" anchor="ctr" wrap="square" lIns="182880" tIns="109728" bIns="109728"/>
           <a:lstStyle/>
           <a:p>
             <a:pPr algn="ctr">
@@ -6202,7 +6110,7 @@
           </a:fontRef>
         </p:style>
         <p:txBody>
-          <a:bodyPr wrap="square" lIns="182880" tIns="137160" rIns="137160" bIns="91440" rtlCol="0" anchor="ctr"/>
+          <a:bodyPr rtlCol="0" anchor="ctr" wrap="square" lIns="182880" rIns="137160" tIns="137160" bIns="91440"/>
           <a:lstStyle/>
           <a:p>
             <a:pPr algn="ctr">
@@ -6350,7 +6258,7 @@
         <p:spPr>
           <a:xfrm>
             <a:off x="6400800" y="3474720"/>
-            <a:ext cx="5303520" cy="2011680"/>
+            <a:ext cx="5303520" cy="1645920"/>
           </a:xfrm>
           <a:prstGeom prst="roundRect">
             <a:avLst/>
@@ -6379,7 +6287,7 @@
           </a:fontRef>
         </p:style>
         <p:txBody>
-          <a:bodyPr wrap="square" lIns="182880" tIns="137160" rIns="137160" bIns="91440" rtlCol="0" anchor="ctr"/>
+          <a:bodyPr rtlCol="0" anchor="ctr" wrap="square" lIns="182880" rIns="137160" tIns="137160" bIns="91440"/>
           <a:lstStyle/>
           <a:p>
             <a:pPr algn="ctr">
@@ -6437,7 +6345,6 @@
                 </a:solidFill>
               </a:defRPr>
             </a:pPr>
-            <a:endParaRPr/>
           </a:p>
           <a:p>
             <a:pPr>
@@ -6480,7 +6387,6 @@
                 </a:solidFill>
               </a:defRPr>
             </a:pPr>
-            <a:endParaRPr/>
           </a:p>
           <a:p>
             <a:pPr>
@@ -6573,7 +6479,7 @@
 </file>
 
 <file path=ppt/slides/slide16.xml><?xml version="1.0" encoding="utf-8"?>
-<p:sld xmlns:a="http://schemas.openxmlformats.org/drawingml/2006/main" xmlns:r="http://schemas.openxmlformats.org/officeDocument/2006/relationships" xmlns:p="http://schemas.openxmlformats.org/presentationml/2006/main">
+<p:sld xmlns:a="http://schemas.openxmlformats.org/drawingml/2006/main" xmlns:p="http://schemas.openxmlformats.org/presentationml/2006/main" xmlns:r="http://schemas.openxmlformats.org/officeDocument/2006/relationships">
   <p:cSld>
     <p:bg>
       <p:bgPr>
@@ -6589,14 +6495,7 @@
         <p:cNvGrpSpPr/>
         <p:nvPr/>
       </p:nvGrpSpPr>
-      <p:grpSpPr>
-        <a:xfrm>
-          <a:off x="0" y="0"/>
-          <a:ext cx="0" cy="0"/>
-          <a:chOff x="0" y="0"/>
-          <a:chExt cx="0" cy="0"/>
-        </a:xfrm>
-      </p:grpSpPr>
+      <p:grpSpPr/>
       <p:sp>
         <p:nvSpPr>
           <p:cNvPr id="2" name="TextBox 1"/>
@@ -6676,7 +6575,7 @@
         <p:spPr>
           <a:xfrm>
             <a:off x="731520" y="1280160"/>
-            <a:ext cx="2980450" cy="1691641"/>
+            <a:ext cx="3566160" cy="2011680"/>
           </a:xfrm>
           <a:prstGeom prst="roundRect">
             <a:avLst/>
@@ -6705,7 +6604,7 @@
           </a:fontRef>
         </p:style>
         <p:txBody>
-          <a:bodyPr wrap="square" lIns="182880" tIns="137160" rIns="137160" bIns="91440" rtlCol="0" anchor="ctr"/>
+          <a:bodyPr rtlCol="0" anchor="ctr" wrap="square" lIns="182880" rIns="137160" tIns="137160" bIns="91440"/>
           <a:lstStyle/>
           <a:p>
             <a:pPr algn="ctr">
@@ -6793,7 +6692,7 @@
         <p:spPr>
           <a:xfrm>
             <a:off x="4572000" y="1280160"/>
-            <a:ext cx="2980450" cy="1691641"/>
+            <a:ext cx="3566160" cy="2011680"/>
           </a:xfrm>
           <a:prstGeom prst="roundRect">
             <a:avLst/>
@@ -6822,7 +6721,7 @@
           </a:fontRef>
         </p:style>
         <p:txBody>
-          <a:bodyPr wrap="square" lIns="182880" tIns="137160" rIns="137160" bIns="91440" rtlCol="0" anchor="ctr"/>
+          <a:bodyPr rtlCol="0" anchor="ctr" wrap="square" lIns="182880" rIns="137160" tIns="137160" bIns="91440"/>
           <a:lstStyle/>
           <a:p>
             <a:pPr algn="ctr">
@@ -6910,7 +6809,7 @@
         <p:spPr>
           <a:xfrm>
             <a:off x="8412480" y="1280160"/>
-            <a:ext cx="2980450" cy="1691641"/>
+            <a:ext cx="3566160" cy="2011680"/>
           </a:xfrm>
           <a:prstGeom prst="roundRect">
             <a:avLst/>
@@ -6939,7 +6838,7 @@
           </a:fontRef>
         </p:style>
         <p:txBody>
-          <a:bodyPr wrap="square" lIns="182880" tIns="137160" rIns="137160" bIns="91440" rtlCol="0" anchor="ctr"/>
+          <a:bodyPr rtlCol="0" anchor="ctr" wrap="square" lIns="182880" rIns="137160" tIns="137160" bIns="91440"/>
           <a:lstStyle/>
           <a:p>
             <a:pPr algn="ctr">
@@ -7026,8 +6925,8 @@
         </p:nvSpPr>
         <p:spPr>
           <a:xfrm>
-            <a:off x="795775" y="2971801"/>
-            <a:ext cx="3477545" cy="307777"/>
+            <a:off x="731520" y="3566160"/>
+            <a:ext cx="4572000" cy="274320"/>
           </a:xfrm>
           <a:prstGeom prst="rect">
             <a:avLst/>
@@ -7061,8 +6960,8 @@
         </p:nvSpPr>
         <p:spPr>
           <a:xfrm>
-            <a:off x="795775" y="3337561"/>
-            <a:ext cx="1947425" cy="714221"/>
+            <a:off x="731520" y="3931920"/>
+            <a:ext cx="2560320" cy="1097280"/>
           </a:xfrm>
           <a:prstGeom prst="roundRect">
             <a:avLst/>
@@ -7091,7 +6990,7 @@
           </a:fontRef>
         </p:style>
         <p:txBody>
-          <a:bodyPr wrap="square" rtlCol="0" anchor="ctr"/>
+          <a:bodyPr rtlCol="0" anchor="ctr" wrap="square"/>
           <a:lstStyle/>
           <a:p>
             <a:pPr algn="ctr">
@@ -7127,8 +7026,8 @@
         </p:nvSpPr>
         <p:spPr>
           <a:xfrm>
-            <a:off x="3630415" y="3337561"/>
-            <a:ext cx="1947425" cy="714221"/>
+            <a:off x="3566160" y="3931920"/>
+            <a:ext cx="2560320" cy="1097280"/>
           </a:xfrm>
           <a:prstGeom prst="roundRect">
             <a:avLst/>
@@ -7157,7 +7056,7 @@
           </a:fontRef>
         </p:style>
         <p:txBody>
-          <a:bodyPr wrap="square" rtlCol="0" anchor="ctr"/>
+          <a:bodyPr rtlCol="0" anchor="ctr" wrap="square"/>
           <a:lstStyle/>
           <a:p>
             <a:pPr algn="ctr">
@@ -7193,8 +7092,8 @@
         </p:nvSpPr>
         <p:spPr>
           <a:xfrm>
-            <a:off x="6465055" y="3337561"/>
-            <a:ext cx="1947425" cy="714221"/>
+            <a:off x="6400800" y="3931920"/>
+            <a:ext cx="2560320" cy="1097280"/>
           </a:xfrm>
           <a:prstGeom prst="roundRect">
             <a:avLst/>
@@ -7223,7 +7122,7 @@
           </a:fontRef>
         </p:style>
         <p:txBody>
-          <a:bodyPr wrap="square" rtlCol="0" anchor="ctr"/>
+          <a:bodyPr rtlCol="0" anchor="ctr" wrap="square"/>
           <a:lstStyle/>
           <a:p>
             <a:pPr algn="ctr">
@@ -7259,8 +7158,8 @@
         </p:nvSpPr>
         <p:spPr>
           <a:xfrm>
-            <a:off x="9299695" y="3337561"/>
-            <a:ext cx="1947425" cy="714221"/>
+            <a:off x="9235440" y="3931920"/>
+            <a:ext cx="2560320" cy="1097280"/>
           </a:xfrm>
           <a:prstGeom prst="roundRect">
             <a:avLst/>
@@ -7289,7 +7188,7 @@
           </a:fontRef>
         </p:style>
         <p:txBody>
-          <a:bodyPr wrap="square" rtlCol="0" anchor="ctr"/>
+          <a:bodyPr rtlCol="0" anchor="ctr" wrap="square"/>
           <a:lstStyle/>
           <a:p>
             <a:pPr algn="ctr">
@@ -7325,7 +7224,7 @@
         </p:nvSpPr>
         <p:spPr>
           <a:xfrm>
-            <a:off x="763648" y="4165557"/>
+            <a:off x="731520" y="5303520"/>
             <a:ext cx="4572000" cy="274320"/>
           </a:xfrm>
           <a:prstGeom prst="rect">
@@ -7358,16 +7257,10 @@
           <p:cNvGraphicFramePr>
             <a:graphicFrameLocks noGrp="1"/>
           </p:cNvGraphicFramePr>
-          <p:nvPr>
-            <p:extLst>
-              <p:ext uri="{D42A27DB-BD31-4B8C-83A1-F6EECF244321}">
-                <p14:modId xmlns:p14="http://schemas.microsoft.com/office/powerpoint/2010/main" val="3533528023"/>
-              </p:ext>
-            </p:extLst>
-          </p:nvPr>
+          <p:nvPr/>
         </p:nvGraphicFramePr>
         <p:xfrm>
-          <a:off x="641728" y="4463262"/>
+          <a:off x="731520" y="5577840"/>
           <a:ext cx="10972800" cy="1920239"/>
         </p:xfrm>
         <a:graphic>
@@ -7377,34 +7270,10 @@
                 <a:tableStyleId>{5C22544A-7EE6-4342-B048-85BDC9FD1C3A}</a:tableStyleId>
               </a:tblPr>
               <a:tblGrid>
-                <a:gridCol w="2743200">
-                  <a:extLst>
-                    <a:ext uri="{9D8B030D-6E8A-4147-A177-3AD203B41FA5}">
-                      <a16:colId xmlns:a16="http://schemas.microsoft.com/office/drawing/2014/main" val="20000"/>
-                    </a:ext>
-                  </a:extLst>
-                </a:gridCol>
-                <a:gridCol w="2743200">
-                  <a:extLst>
-                    <a:ext uri="{9D8B030D-6E8A-4147-A177-3AD203B41FA5}">
-                      <a16:colId xmlns:a16="http://schemas.microsoft.com/office/drawing/2014/main" val="20001"/>
-                    </a:ext>
-                  </a:extLst>
-                </a:gridCol>
-                <a:gridCol w="2743200">
-                  <a:extLst>
-                    <a:ext uri="{9D8B030D-6E8A-4147-A177-3AD203B41FA5}">
-                      <a16:colId xmlns:a16="http://schemas.microsoft.com/office/drawing/2014/main" val="20002"/>
-                    </a:ext>
-                  </a:extLst>
-                </a:gridCol>
-                <a:gridCol w="2743200">
-                  <a:extLst>
-                    <a:ext uri="{9D8B030D-6E8A-4147-A177-3AD203B41FA5}">
-                      <a16:colId xmlns:a16="http://schemas.microsoft.com/office/drawing/2014/main" val="20003"/>
-                    </a:ext>
-                  </a:extLst>
-                </a:gridCol>
+                <a:gridCol w="2743200"/>
+                <a:gridCol w="2743200"/>
+                <a:gridCol w="2743200"/>
+                <a:gridCol w="2743200"/>
               </a:tblGrid>
               <a:tr h="320039">
                 <a:tc>
@@ -7499,11 +7368,6 @@
                     </a:solidFill>
                   </a:tcPr>
                 </a:tc>
-                <a:extLst>
-                  <a:ext uri="{0D108BD9-81ED-4DB2-BD59-A6C34878D82A}">
-                    <a16:rowId xmlns:a16="http://schemas.microsoft.com/office/drawing/2014/main" val="10000"/>
-                  </a:ext>
-                </a:extLst>
               </a:tr>
               <a:tr h="320039">
                 <a:tc>
@@ -7582,11 +7446,6 @@
                   </a:txBody>
                   <a:tcPr/>
                 </a:tc>
-                <a:extLst>
-                  <a:ext uri="{0D108BD9-81ED-4DB2-BD59-A6C34878D82A}">
-                    <a16:rowId xmlns:a16="http://schemas.microsoft.com/office/drawing/2014/main" val="10001"/>
-                  </a:ext>
-                </a:extLst>
               </a:tr>
               <a:tr h="320039">
                 <a:tc>
@@ -7665,11 +7524,6 @@
                   </a:txBody>
                   <a:tcPr/>
                 </a:tc>
-                <a:extLst>
-                  <a:ext uri="{0D108BD9-81ED-4DB2-BD59-A6C34878D82A}">
-                    <a16:rowId xmlns:a16="http://schemas.microsoft.com/office/drawing/2014/main" val="10002"/>
-                  </a:ext>
-                </a:extLst>
               </a:tr>
               <a:tr h="320039">
                 <a:tc>
@@ -7748,11 +7602,6 @@
                   </a:txBody>
                   <a:tcPr/>
                 </a:tc>
-                <a:extLst>
-                  <a:ext uri="{0D108BD9-81ED-4DB2-BD59-A6C34878D82A}">
-                    <a16:rowId xmlns:a16="http://schemas.microsoft.com/office/drawing/2014/main" val="10003"/>
-                  </a:ext>
-                </a:extLst>
               </a:tr>
               <a:tr h="320039">
                 <a:tc>
@@ -7805,7 +7654,6 @@
                           </a:solidFill>
                         </a:defRPr>
                       </a:pPr>
-                      <a:endParaRPr/>
                     </a:p>
                   </a:txBody>
                   <a:tcPr/>
@@ -7822,16 +7670,10 @@
                           </a:solidFill>
                         </a:defRPr>
                       </a:pPr>
-                      <a:endParaRPr/>
                     </a:p>
                   </a:txBody>
                   <a:tcPr/>
                 </a:tc>
-                <a:extLst>
-                  <a:ext uri="{0D108BD9-81ED-4DB2-BD59-A6C34878D82A}">
-                    <a16:rowId xmlns:a16="http://schemas.microsoft.com/office/drawing/2014/main" val="10004"/>
-                  </a:ext>
-                </a:extLst>
               </a:tr>
               <a:tr h="320044">
                 <a:tc>
@@ -7884,7 +7726,6 @@
                           </a:solidFill>
                         </a:defRPr>
                       </a:pPr>
-                      <a:endParaRPr/>
                     </a:p>
                   </a:txBody>
                   <a:tcPr/>
@@ -7901,16 +7742,10 @@
                           </a:solidFill>
                         </a:defRPr>
                       </a:pPr>
-                      <a:endParaRPr/>
                     </a:p>
                   </a:txBody>
                   <a:tcPr/>
                 </a:tc>
-                <a:extLst>
-                  <a:ext uri="{0D108BD9-81ED-4DB2-BD59-A6C34878D82A}">
-                    <a16:rowId xmlns:a16="http://schemas.microsoft.com/office/drawing/2014/main" val="10005"/>
-                  </a:ext>
-                </a:extLst>
               </a:tr>
             </a:tbl>
           </a:graphicData>
@@ -7924,7 +7759,7 @@
         </p:nvSpPr>
         <p:spPr>
           <a:xfrm>
-            <a:off x="10561320" y="6492240"/>
+            <a:off x="10515600" y="6492240"/>
             <a:ext cx="1371600" cy="274320"/>
           </a:xfrm>
           <a:prstGeom prst="rect">
@@ -7960,7 +7795,7 @@
 </file>
 
 <file path=ppt/slides/slide17.xml><?xml version="1.0" encoding="utf-8"?>
-<p:sld xmlns:a="http://schemas.openxmlformats.org/drawingml/2006/main" xmlns:r="http://schemas.openxmlformats.org/officeDocument/2006/relationships" xmlns:p="http://schemas.openxmlformats.org/presentationml/2006/main">
+<p:sld xmlns:a="http://schemas.openxmlformats.org/drawingml/2006/main" xmlns:p="http://schemas.openxmlformats.org/presentationml/2006/main" xmlns:r="http://schemas.openxmlformats.org/officeDocument/2006/relationships">
   <p:cSld>
     <p:bg>
       <p:bgPr>
@@ -7976,14 +7811,50 @@
         <p:cNvGrpSpPr/>
         <p:nvPr/>
       </p:nvGrpSpPr>
-      <p:grpSpPr>
-        <a:xfrm>
-          <a:off x="0" y="0"/>
-          <a:ext cx="0" cy="0"/>
-          <a:chOff x="0" y="0"/>
-          <a:chExt cx="0" cy="0"/>
-        </a:xfrm>
-      </p:grpSpPr>
+      <p:grpSpPr/>
+      <p:sp>
+        <p:nvSpPr>
+          <p:cNvPr id="2" name="Rounded Rectangle 1"/>
+          <p:cNvSpPr/>
+          <p:nvPr/>
+        </p:nvSpPr>
+        <p:spPr>
+          <a:xfrm>
+            <a:off x="0" y="0"/>
+            <a:ext cx="12191695" cy="73152"/>
+          </a:xfrm>
+          <a:prstGeom prst="roundRect">
+            <a:avLst/>
+          </a:prstGeom>
+          <a:solidFill>
+            <a:srgbClr val="1A73E8"/>
+          </a:solidFill>
+          <a:ln>
+            <a:noFill/>
+          </a:ln>
+        </p:spPr>
+        <p:style>
+          <a:lnRef idx="1">
+            <a:schemeClr val="accent1"/>
+          </a:lnRef>
+          <a:fillRef idx="3">
+            <a:schemeClr val="accent1"/>
+          </a:fillRef>
+          <a:effectRef idx="2">
+            <a:schemeClr val="accent1"/>
+          </a:effectRef>
+          <a:fontRef idx="minor">
+            <a:schemeClr val="lt1"/>
+          </a:fontRef>
+        </p:style>
+        <p:txBody>
+          <a:bodyPr rtlCol="0" anchor="ctr"/>
+          <a:lstStyle/>
+          <a:p>
+            <a:pPr algn="ctr"/>
+          </a:p>
+        </p:txBody>
+      </p:sp>
       <p:sp>
         <p:nvSpPr>
           <p:cNvPr id="3" name="Oval 2"/>
@@ -8108,6 +7979,41 @@
             <a:br/>
             <a:r>
               <a:t>从仿真到实时看板的完整链路</a:t>
+            </a:r>
+          </a:p>
+        </p:txBody>
+      </p:sp>
+      <p:sp>
+        <p:nvSpPr>
+          <p:cNvPr id="6" name="TextBox 5"/>
+          <p:cNvSpPr txBox="1"/>
+          <p:nvPr/>
+        </p:nvSpPr>
+        <p:spPr>
+          <a:xfrm>
+            <a:off x="457200" y="5303520"/>
+            <a:ext cx="11247120" cy="457200"/>
+          </a:xfrm>
+          <a:prstGeom prst="rect">
+            <a:avLst/>
+          </a:prstGeom>
+          <a:noFill/>
+        </p:spPr>
+        <p:txBody>
+          <a:bodyPr wrap="square">
+            <a:spAutoFit/>
+          </a:bodyPr>
+          <a:lstStyle/>
+          <a:p>
+            <a:pPr algn="ctr">
+              <a:defRPr sz="1300" b="0">
+                <a:solidFill>
+                  <a:srgbClr val="64748B"/>
+                </a:solidFill>
+              </a:defRPr>
+            </a:pPr>
+            <a:r>
+              <a:t>详细文档: doc/ARCHITECTURE.md  |  一键启动: bash start.sh</a:t>
             </a:r>
           </a:p>
         </p:txBody>
@@ -8156,7 +8062,7 @@
 </file>
 
 <file path=ppt/slides/slide2.xml><?xml version="1.0" encoding="utf-8"?>
-<p:sld xmlns:a="http://schemas.openxmlformats.org/drawingml/2006/main" xmlns:r="http://schemas.openxmlformats.org/officeDocument/2006/relationships" xmlns:p="http://schemas.openxmlformats.org/presentationml/2006/main">
+<p:sld xmlns:a="http://schemas.openxmlformats.org/drawingml/2006/main" xmlns:p="http://schemas.openxmlformats.org/presentationml/2006/main" xmlns:r="http://schemas.openxmlformats.org/officeDocument/2006/relationships">
   <p:cSld>
     <p:bg>
       <p:bgPr>
@@ -8172,14 +8078,7 @@
         <p:cNvGrpSpPr/>
         <p:nvPr/>
       </p:nvGrpSpPr>
-      <p:grpSpPr>
-        <a:xfrm>
-          <a:off x="0" y="0"/>
-          <a:ext cx="0" cy="0"/>
-          <a:chOff x="0" y="0"/>
-          <a:chExt cx="0" cy="0"/>
-        </a:xfrm>
-      </p:grpSpPr>
+      <p:grpSpPr/>
       <p:sp>
         <p:nvSpPr>
           <p:cNvPr id="2" name="TextBox 1"/>
@@ -8298,7 +8197,7 @@
 </file>
 
 <file path=ppt/slides/slide3.xml><?xml version="1.0" encoding="utf-8"?>
-<p:sld xmlns:a="http://schemas.openxmlformats.org/drawingml/2006/main" xmlns:r="http://schemas.openxmlformats.org/officeDocument/2006/relationships" xmlns:p="http://schemas.openxmlformats.org/presentationml/2006/main">
+<p:sld xmlns:a="http://schemas.openxmlformats.org/drawingml/2006/main" xmlns:p="http://schemas.openxmlformats.org/presentationml/2006/main" xmlns:r="http://schemas.openxmlformats.org/officeDocument/2006/relationships">
   <p:cSld>
     <p:bg>
       <p:bgPr>
@@ -8314,14 +8213,7 @@
         <p:cNvGrpSpPr/>
         <p:nvPr/>
       </p:nvGrpSpPr>
-      <p:grpSpPr>
-        <a:xfrm>
-          <a:off x="0" y="0"/>
-          <a:ext cx="0" cy="0"/>
-          <a:chOff x="0" y="0"/>
-          <a:chExt cx="0" cy="0"/>
-        </a:xfrm>
-      </p:grpSpPr>
+      <p:grpSpPr/>
       <p:sp>
         <p:nvSpPr>
           <p:cNvPr id="2" name="TextBox 1"/>
@@ -8430,7 +8322,7 @@
           </a:fontRef>
         </p:style>
         <p:txBody>
-          <a:bodyPr wrap="square" lIns="182880" tIns="137160" rIns="137160" bIns="91440" rtlCol="0" anchor="ctr"/>
+          <a:bodyPr rtlCol="0" anchor="ctr" wrap="square" lIns="182880" rIns="137160" tIns="137160" bIns="91440"/>
           <a:lstStyle/>
           <a:p>
             <a:pPr algn="ctr">
@@ -8547,7 +8439,7 @@
           </a:fontRef>
         </p:style>
         <p:txBody>
-          <a:bodyPr wrap="square" lIns="182880" tIns="137160" rIns="137160" bIns="91440" rtlCol="0" anchor="ctr"/>
+          <a:bodyPr rtlCol="0" anchor="ctr" wrap="square" lIns="182880" rIns="137160" tIns="137160" bIns="91440"/>
           <a:lstStyle/>
           <a:p>
             <a:pPr algn="ctr">
@@ -8664,7 +8556,7 @@
           </a:fontRef>
         </p:style>
         <p:txBody>
-          <a:bodyPr wrap="square" lIns="182880" tIns="137160" rIns="137160" bIns="91440" rtlCol="0" anchor="ctr"/>
+          <a:bodyPr rtlCol="0" anchor="ctr" wrap="square" lIns="182880" rIns="137160" tIns="137160" bIns="91440"/>
           <a:lstStyle/>
           <a:p>
             <a:pPr algn="ctr">
@@ -8781,7 +8673,7 @@
           </a:fontRef>
         </p:style>
         <p:txBody>
-          <a:bodyPr wrap="square" lIns="182880" tIns="137160" rIns="137160" bIns="91440" rtlCol="0" anchor="ctr"/>
+          <a:bodyPr rtlCol="0" anchor="ctr" wrap="square" lIns="182880" rIns="137160" tIns="137160" bIns="91440"/>
           <a:lstStyle/>
           <a:p>
             <a:pPr algn="ctr">
@@ -8898,7 +8790,7 @@
           </a:fontRef>
         </p:style>
         <p:txBody>
-          <a:bodyPr wrap="square" rtlCol="0" anchor="ctr"/>
+          <a:bodyPr rtlCol="0" anchor="ctr" wrap="square"/>
           <a:lstStyle/>
           <a:p>
             <a:pPr algn="ctr">
@@ -8958,7 +8850,7 @@
           </a:fontRef>
         </p:style>
         <p:txBody>
-          <a:bodyPr wrap="square" rtlCol="0" anchor="ctr"/>
+          <a:bodyPr rtlCol="0" anchor="ctr" wrap="square"/>
           <a:lstStyle/>
           <a:p>
             <a:pPr algn="ctr">
@@ -9018,7 +8910,7 @@
           </a:fontRef>
         </p:style>
         <p:txBody>
-          <a:bodyPr wrap="square" rtlCol="0" anchor="ctr"/>
+          <a:bodyPr rtlCol="0" anchor="ctr" wrap="square"/>
           <a:lstStyle/>
           <a:p>
             <a:pPr algn="ctr">
@@ -9084,7 +8976,7 @@
 </file>
 
 <file path=ppt/slides/slide4.xml><?xml version="1.0" encoding="utf-8"?>
-<p:sld xmlns:a="http://schemas.openxmlformats.org/drawingml/2006/main" xmlns:r="http://schemas.openxmlformats.org/officeDocument/2006/relationships" xmlns:p="http://schemas.openxmlformats.org/presentationml/2006/main">
+<p:sld xmlns:a="http://schemas.openxmlformats.org/drawingml/2006/main" xmlns:p="http://schemas.openxmlformats.org/presentationml/2006/main" xmlns:r="http://schemas.openxmlformats.org/officeDocument/2006/relationships">
   <p:cSld>
     <p:bg>
       <p:bgPr>
@@ -9100,14 +8992,7 @@
         <p:cNvGrpSpPr/>
         <p:nvPr/>
       </p:nvGrpSpPr>
-      <p:grpSpPr>
-        <a:xfrm>
-          <a:off x="0" y="0"/>
-          <a:ext cx="0" cy="0"/>
-          <a:chOff x="0" y="0"/>
-          <a:chExt cx="0" cy="0"/>
-        </a:xfrm>
-      </p:grpSpPr>
+      <p:grpSpPr/>
       <p:sp>
         <p:nvSpPr>
           <p:cNvPr id="2" name="TextBox 1"/>
@@ -9222,7 +9107,7 @@
 </file>
 
 <file path=ppt/slides/slide5.xml><?xml version="1.0" encoding="utf-8"?>
-<p:sld xmlns:a="http://schemas.openxmlformats.org/drawingml/2006/main" xmlns:r="http://schemas.openxmlformats.org/officeDocument/2006/relationships" xmlns:p="http://schemas.openxmlformats.org/presentationml/2006/main">
+<p:sld xmlns:a="http://schemas.openxmlformats.org/drawingml/2006/main" xmlns:p="http://schemas.openxmlformats.org/presentationml/2006/main" xmlns:r="http://schemas.openxmlformats.org/officeDocument/2006/relationships">
   <p:cSld>
     <p:bg>
       <p:bgPr>
@@ -9238,14 +9123,7 @@
         <p:cNvGrpSpPr/>
         <p:nvPr/>
       </p:nvGrpSpPr>
-      <p:grpSpPr>
-        <a:xfrm>
-          <a:off x="0" y="0"/>
-          <a:ext cx="0" cy="0"/>
-          <a:chOff x="0" y="0"/>
-          <a:chExt cx="0" cy="0"/>
-        </a:xfrm>
-      </p:grpSpPr>
+      <p:grpSpPr/>
       <p:sp>
         <p:nvSpPr>
           <p:cNvPr id="2" name="TextBox 1"/>
@@ -9354,7 +9232,7 @@
           </a:fontRef>
         </p:style>
         <p:txBody>
-          <a:bodyPr wrap="square" rtlCol="0" anchor="ctr"/>
+          <a:bodyPr rtlCol="0" anchor="ctr" wrap="square"/>
           <a:lstStyle/>
           <a:p>
             <a:pPr algn="ctr">
@@ -9453,7 +9331,6 @@
           <a:lstStyle/>
           <a:p>
             <a:pPr algn="ctr"/>
-            <a:endParaRPr/>
           </a:p>
         </p:txBody>
       </p:sp>
@@ -9530,7 +9407,7 @@
           </a:fontRef>
         </p:style>
         <p:txBody>
-          <a:bodyPr wrap="square" rtlCol="0" anchor="ctr"/>
+          <a:bodyPr rtlCol="0" anchor="ctr" wrap="square"/>
           <a:lstStyle/>
           <a:p>
             <a:pPr algn="ctr">
@@ -9590,7 +9467,7 @@
           </a:fontRef>
         </p:style>
         <p:txBody>
-          <a:bodyPr wrap="square" rtlCol="0" anchor="ctr"/>
+          <a:bodyPr rtlCol="0" anchor="ctr" wrap="square"/>
           <a:lstStyle/>
           <a:p>
             <a:pPr algn="ctr">
@@ -9650,7 +9527,7 @@
           </a:fontRef>
         </p:style>
         <p:txBody>
-          <a:bodyPr wrap="square" rtlCol="0" anchor="ctr"/>
+          <a:bodyPr rtlCol="0" anchor="ctr" wrap="square"/>
           <a:lstStyle/>
           <a:p>
             <a:pPr algn="ctr">
@@ -9710,7 +9587,7 @@
           </a:fontRef>
         </p:style>
         <p:txBody>
-          <a:bodyPr wrap="square" rtlCol="0" anchor="ctr"/>
+          <a:bodyPr rtlCol="0" anchor="ctr" wrap="square"/>
           <a:lstStyle/>
           <a:p>
             <a:pPr algn="ctr">
@@ -9770,7 +9647,7 @@
           </a:fontRef>
         </p:style>
         <p:txBody>
-          <a:bodyPr wrap="square" rtlCol="0" anchor="ctr"/>
+          <a:bodyPr rtlCol="0" anchor="ctr" wrap="square"/>
           <a:lstStyle/>
           <a:p>
             <a:pPr algn="ctr">
@@ -9830,7 +9707,7 @@
           </a:fontRef>
         </p:style>
         <p:txBody>
-          <a:bodyPr wrap="square" rtlCol="0" anchor="ctr"/>
+          <a:bodyPr rtlCol="0" anchor="ctr" wrap="square"/>
           <a:lstStyle/>
           <a:p>
             <a:pPr algn="ctr">
@@ -9960,7 +9837,7 @@
           </a:fontRef>
         </p:style>
         <p:txBody>
-          <a:bodyPr wrap="square" rtlCol="0" anchor="ctr"/>
+          <a:bodyPr rtlCol="0" anchor="ctr" wrap="square"/>
           <a:lstStyle/>
           <a:p>
             <a:pPr algn="ctr">
@@ -10090,7 +9967,7 @@
           </a:fontRef>
         </p:style>
         <p:txBody>
-          <a:bodyPr wrap="square" rtlCol="0" anchor="ctr"/>
+          <a:bodyPr rtlCol="0" anchor="ctr" wrap="square"/>
           <a:lstStyle/>
           <a:p>
             <a:pPr algn="ctr">
@@ -10154,7 +10031,6 @@
           <a:lstStyle/>
           <a:p>
             <a:pPr algn="ctr"/>
-            <a:endParaRPr/>
           </a:p>
         </p:txBody>
       </p:sp>
@@ -10198,7 +10074,6 @@
           <a:lstStyle/>
           <a:p>
             <a:pPr algn="ctr"/>
-            <a:endParaRPr/>
           </a:p>
         </p:txBody>
       </p:sp>
@@ -10285,7 +10160,7 @@
 </file>
 
 <file path=ppt/slides/slide6.xml><?xml version="1.0" encoding="utf-8"?>
-<p:sld xmlns:a="http://schemas.openxmlformats.org/drawingml/2006/main" xmlns:r="http://schemas.openxmlformats.org/officeDocument/2006/relationships" xmlns:p="http://schemas.openxmlformats.org/presentationml/2006/main">
+<p:sld xmlns:a="http://schemas.openxmlformats.org/drawingml/2006/main" xmlns:p="http://schemas.openxmlformats.org/presentationml/2006/main" xmlns:r="http://schemas.openxmlformats.org/officeDocument/2006/relationships">
   <p:cSld>
     <p:bg>
       <p:bgPr>
@@ -10301,14 +10176,7 @@
         <p:cNvGrpSpPr/>
         <p:nvPr/>
       </p:nvGrpSpPr>
-      <p:grpSpPr>
-        <a:xfrm>
-          <a:off x="0" y="0"/>
-          <a:ext cx="0" cy="0"/>
-          <a:chOff x="0" y="0"/>
-          <a:chExt cx="0" cy="0"/>
-        </a:xfrm>
-      </p:grpSpPr>
+      <p:grpSpPr/>
       <p:sp>
         <p:nvSpPr>
           <p:cNvPr id="2" name="TextBox 1"/>
@@ -10662,7 +10530,7 @@
           </a:fontRef>
         </p:style>
         <p:txBody>
-          <a:bodyPr wrap="square" lIns="182880" tIns="137160" rIns="137160" bIns="91440" rtlCol="0" anchor="ctr"/>
+          <a:bodyPr rtlCol="0" anchor="ctr" wrap="square" lIns="182880" rIns="137160" tIns="137160" bIns="91440"/>
           <a:lstStyle/>
           <a:p>
             <a:pPr algn="ctr">
@@ -10777,7 +10645,7 @@
           </a:fontRef>
         </p:style>
         <p:txBody>
-          <a:bodyPr wrap="square" lIns="182880" tIns="109728" bIns="109728" rtlCol="0" anchor="ctr"/>
+          <a:bodyPr rtlCol="0" anchor="ctr" wrap="square" lIns="182880" tIns="109728" bIns="109728"/>
           <a:lstStyle/>
           <a:p>
             <a:pPr algn="ctr">
@@ -10869,7 +10737,7 @@
 </file>
 
 <file path=ppt/slides/slide7.xml><?xml version="1.0" encoding="utf-8"?>
-<p:sld xmlns:a="http://schemas.openxmlformats.org/drawingml/2006/main" xmlns:r="http://schemas.openxmlformats.org/officeDocument/2006/relationships" xmlns:p="http://schemas.openxmlformats.org/presentationml/2006/main">
+<p:sld xmlns:a="http://schemas.openxmlformats.org/drawingml/2006/main" xmlns:p="http://schemas.openxmlformats.org/presentationml/2006/main" xmlns:r="http://schemas.openxmlformats.org/officeDocument/2006/relationships">
   <p:cSld>
     <p:bg>
       <p:bgPr>
@@ -10885,14 +10753,7 @@
         <p:cNvGrpSpPr/>
         <p:nvPr/>
       </p:nvGrpSpPr>
-      <p:grpSpPr>
-        <a:xfrm>
-          <a:off x="0" y="0"/>
-          <a:ext cx="0" cy="0"/>
-          <a:chOff x="0" y="0"/>
-          <a:chExt cx="0" cy="0"/>
-        </a:xfrm>
-      </p:grpSpPr>
+      <p:grpSpPr/>
       <p:sp>
         <p:nvSpPr>
           <p:cNvPr id="2" name="TextBox 1"/>
@@ -11007,7 +10868,7 @@
 </file>
 
 <file path=ppt/slides/slide8.xml><?xml version="1.0" encoding="utf-8"?>
-<p:sld xmlns:a="http://schemas.openxmlformats.org/drawingml/2006/main" xmlns:r="http://schemas.openxmlformats.org/officeDocument/2006/relationships" xmlns:p="http://schemas.openxmlformats.org/presentationml/2006/main">
+<p:sld xmlns:a="http://schemas.openxmlformats.org/drawingml/2006/main" xmlns:p="http://schemas.openxmlformats.org/presentationml/2006/main" xmlns:r="http://schemas.openxmlformats.org/officeDocument/2006/relationships">
   <p:cSld>
     <p:bg>
       <p:bgPr>
@@ -11023,14 +10884,7 @@
         <p:cNvGrpSpPr/>
         <p:nvPr/>
       </p:nvGrpSpPr>
-      <p:grpSpPr>
-        <a:xfrm>
-          <a:off x="0" y="0"/>
-          <a:ext cx="0" cy="0"/>
-          <a:chOff x="0" y="0"/>
-          <a:chExt cx="0" cy="0"/>
-        </a:xfrm>
-      </p:grpSpPr>
+      <p:grpSpPr/>
       <p:sp>
         <p:nvSpPr>
           <p:cNvPr id="2" name="TextBox 1"/>
@@ -11139,7 +10993,7 @@
           </a:fontRef>
         </p:style>
         <p:txBody>
-          <a:bodyPr wrap="square" lIns="182880" tIns="137160" rIns="137160" bIns="91440" rtlCol="0" anchor="ctr"/>
+          <a:bodyPr rtlCol="0" anchor="ctr" wrap="square" lIns="182880" rIns="137160" tIns="137160" bIns="91440"/>
           <a:lstStyle/>
           <a:p>
             <a:pPr algn="ctr">
@@ -11316,7 +11170,7 @@
           </a:fontRef>
         </p:style>
         <p:txBody>
-          <a:bodyPr wrap="square" lIns="182880" tIns="137160" rIns="137160" bIns="91440" rtlCol="0" anchor="ctr"/>
+          <a:bodyPr rtlCol="0" anchor="ctr" wrap="square" lIns="182880" rIns="137160" tIns="137160" bIns="91440"/>
           <a:lstStyle/>
           <a:p>
             <a:pPr algn="ctr">
@@ -11496,17 +11350,11 @@
           <p:cNvGraphicFramePr>
             <a:graphicFrameLocks noGrp="1"/>
           </p:cNvGraphicFramePr>
-          <p:nvPr>
-            <p:extLst>
-              <p:ext uri="{D42A27DB-BD31-4B8C-83A1-F6EECF244321}">
-                <p14:modId xmlns:p14="http://schemas.microsoft.com/office/powerpoint/2010/main" val="4134147219"/>
-              </p:ext>
-            </p:extLst>
-          </p:nvPr>
+          <p:nvPr/>
         </p:nvGraphicFramePr>
         <p:xfrm>
-          <a:off x="731520" y="3840481"/>
-          <a:ext cx="6373614" cy="2194562"/>
+          <a:off x="731520" y="3840480"/>
+          <a:ext cx="6949440" cy="2240279"/>
         </p:xfrm>
         <a:graphic>
           <a:graphicData uri="http://schemas.openxmlformats.org/drawingml/2006/table">
@@ -11515,36 +11363,12 @@
                 <a:tableStyleId>{5C22544A-7EE6-4342-B048-85BDC9FD1C3A}</a:tableStyleId>
               </a:tblPr>
               <a:tblGrid>
-                <a:gridCol w="1677267">
-                  <a:extLst>
-                    <a:ext uri="{9D8B030D-6E8A-4147-A177-3AD203B41FA5}">
-                      <a16:colId xmlns:a16="http://schemas.microsoft.com/office/drawing/2014/main" val="20000"/>
-                    </a:ext>
-                  </a:extLst>
-                </a:gridCol>
-                <a:gridCol w="1677267">
-                  <a:extLst>
-                    <a:ext uri="{9D8B030D-6E8A-4147-A177-3AD203B41FA5}">
-                      <a16:colId xmlns:a16="http://schemas.microsoft.com/office/drawing/2014/main" val="20001"/>
-                    </a:ext>
-                  </a:extLst>
-                </a:gridCol>
-                <a:gridCol w="1509540">
-                  <a:extLst>
-                    <a:ext uri="{9D8B030D-6E8A-4147-A177-3AD203B41FA5}">
-                      <a16:colId xmlns:a16="http://schemas.microsoft.com/office/drawing/2014/main" val="20002"/>
-                    </a:ext>
-                  </a:extLst>
-                </a:gridCol>
-                <a:gridCol w="1509540">
-                  <a:extLst>
-                    <a:ext uri="{9D8B030D-6E8A-4147-A177-3AD203B41FA5}">
-                      <a16:colId xmlns:a16="http://schemas.microsoft.com/office/drawing/2014/main" val="20003"/>
-                    </a:ext>
-                  </a:extLst>
-                </a:gridCol>
+                <a:gridCol w="1828800"/>
+                <a:gridCol w="1828800"/>
+                <a:gridCol w="1645920"/>
+                <a:gridCol w="1645920"/>
               </a:tblGrid>
-              <a:tr h="313508">
+              <a:tr h="320039">
                 <a:tc>
                   <a:txBody>
                     <a:bodyPr/>
@@ -11637,13 +11461,8 @@
                     </a:solidFill>
                   </a:tcPr>
                 </a:tc>
-                <a:extLst>
-                  <a:ext uri="{0D108BD9-81ED-4DB2-BD59-A6C34878D82A}">
-                    <a16:rowId xmlns:a16="http://schemas.microsoft.com/office/drawing/2014/main" val="10000"/>
-                  </a:ext>
-                </a:extLst>
               </a:tr>
-              <a:tr h="313508">
+              <a:tr h="320039">
                 <a:tc>
                   <a:txBody>
                     <a:bodyPr/>
@@ -11720,13 +11539,8 @@
                   </a:txBody>
                   <a:tcPr/>
                 </a:tc>
-                <a:extLst>
-                  <a:ext uri="{0D108BD9-81ED-4DB2-BD59-A6C34878D82A}">
-                    <a16:rowId xmlns:a16="http://schemas.microsoft.com/office/drawing/2014/main" val="10001"/>
-                  </a:ext>
-                </a:extLst>
               </a:tr>
-              <a:tr h="313508">
+              <a:tr h="320039">
                 <a:tc>
                   <a:txBody>
                     <a:bodyPr/>
@@ -11803,13 +11617,8 @@
                   </a:txBody>
                   <a:tcPr/>
                 </a:tc>
-                <a:extLst>
-                  <a:ext uri="{0D108BD9-81ED-4DB2-BD59-A6C34878D82A}">
-                    <a16:rowId xmlns:a16="http://schemas.microsoft.com/office/drawing/2014/main" val="10002"/>
-                  </a:ext>
-                </a:extLst>
               </a:tr>
-              <a:tr h="313508">
+              <a:tr h="320039">
                 <a:tc>
                   <a:txBody>
                     <a:bodyPr/>
@@ -11886,13 +11695,8 @@
                   </a:txBody>
                   <a:tcPr/>
                 </a:tc>
-                <a:extLst>
-                  <a:ext uri="{0D108BD9-81ED-4DB2-BD59-A6C34878D82A}">
-                    <a16:rowId xmlns:a16="http://schemas.microsoft.com/office/drawing/2014/main" val="10003"/>
-                  </a:ext>
-                </a:extLst>
               </a:tr>
-              <a:tr h="313508">
+              <a:tr h="320039">
                 <a:tc>
                   <a:txBody>
                     <a:bodyPr/>
@@ -11969,13 +11773,8 @@
                   </a:txBody>
                   <a:tcPr/>
                 </a:tc>
-                <a:extLst>
-                  <a:ext uri="{0D108BD9-81ED-4DB2-BD59-A6C34878D82A}">
-                    <a16:rowId xmlns:a16="http://schemas.microsoft.com/office/drawing/2014/main" val="10004"/>
-                  </a:ext>
-                </a:extLst>
               </a:tr>
-              <a:tr h="313508">
+              <a:tr h="320039">
                 <a:tc>
                   <a:txBody>
                     <a:bodyPr/>
@@ -12052,13 +11851,8 @@
                   </a:txBody>
                   <a:tcPr/>
                 </a:tc>
-                <a:extLst>
-                  <a:ext uri="{0D108BD9-81ED-4DB2-BD59-A6C34878D82A}">
-                    <a16:rowId xmlns:a16="http://schemas.microsoft.com/office/drawing/2014/main" val="10005"/>
-                  </a:ext>
-                </a:extLst>
               </a:tr>
-              <a:tr h="313514">
+              <a:tr h="320045">
                 <a:tc>
                   <a:txBody>
                     <a:bodyPr/>
@@ -12135,11 +11929,6 @@
                   </a:txBody>
                   <a:tcPr/>
                 </a:tc>
-                <a:extLst>
-                  <a:ext uri="{0D108BD9-81ED-4DB2-BD59-A6C34878D82A}">
-                    <a16:rowId xmlns:a16="http://schemas.microsoft.com/office/drawing/2014/main" val="10006"/>
-                  </a:ext>
-                </a:extLst>
               </a:tr>
             </a:tbl>
           </a:graphicData>
@@ -12153,7 +11942,7 @@
         </p:nvSpPr>
         <p:spPr>
           <a:xfrm>
-            <a:off x="7327555" y="3665014"/>
+            <a:off x="6400800" y="3566160"/>
             <a:ext cx="4572000" cy="274320"/>
           </a:xfrm>
           <a:prstGeom prst="rect">
@@ -12186,17 +11975,11 @@
           <p:cNvGraphicFramePr>
             <a:graphicFrameLocks noGrp="1"/>
           </p:cNvGraphicFramePr>
-          <p:nvPr>
-            <p:extLst>
-              <p:ext uri="{D42A27DB-BD31-4B8C-83A1-F6EECF244321}">
-                <p14:modId xmlns:p14="http://schemas.microsoft.com/office/powerpoint/2010/main" val="1599341932"/>
-              </p:ext>
-            </p:extLst>
-          </p:nvPr>
+          <p:nvPr/>
         </p:nvGraphicFramePr>
         <p:xfrm>
-          <a:off x="7401697" y="4206240"/>
-          <a:ext cx="4572000" cy="1763310"/>
+          <a:off x="6400800" y="3840480"/>
+          <a:ext cx="4572000" cy="1600200"/>
         </p:xfrm>
         <a:graphic>
           <a:graphicData uri="http://schemas.openxmlformats.org/drawingml/2006/table">
@@ -12205,29 +11988,11 @@
                 <a:tableStyleId>{5C22544A-7EE6-4342-B048-85BDC9FD1C3A}</a:tableStyleId>
               </a:tblPr>
               <a:tblGrid>
-                <a:gridCol w="1280160">
-                  <a:extLst>
-                    <a:ext uri="{9D8B030D-6E8A-4147-A177-3AD203B41FA5}">
-                      <a16:colId xmlns:a16="http://schemas.microsoft.com/office/drawing/2014/main" val="20000"/>
-                    </a:ext>
-                  </a:extLst>
-                </a:gridCol>
-                <a:gridCol w="1645920">
-                  <a:extLst>
-                    <a:ext uri="{9D8B030D-6E8A-4147-A177-3AD203B41FA5}">
-                      <a16:colId xmlns:a16="http://schemas.microsoft.com/office/drawing/2014/main" val="20001"/>
-                    </a:ext>
-                  </a:extLst>
-                </a:gridCol>
-                <a:gridCol w="1645920">
-                  <a:extLst>
-                    <a:ext uri="{9D8B030D-6E8A-4147-A177-3AD203B41FA5}">
-                      <a16:colId xmlns:a16="http://schemas.microsoft.com/office/drawing/2014/main" val="20002"/>
-                    </a:ext>
-                  </a:extLst>
-                </a:gridCol>
+                <a:gridCol w="1280160"/>
+                <a:gridCol w="1645920"/>
+                <a:gridCol w="1645920"/>
               </a:tblGrid>
-              <a:tr h="352662">
+              <a:tr h="320040">
                 <a:tc>
                   <a:txBody>
                     <a:bodyPr/>
@@ -12297,13 +12062,8 @@
                     </a:solidFill>
                   </a:tcPr>
                 </a:tc>
-                <a:extLst>
-                  <a:ext uri="{0D108BD9-81ED-4DB2-BD59-A6C34878D82A}">
-                    <a16:rowId xmlns:a16="http://schemas.microsoft.com/office/drawing/2014/main" val="10000"/>
-                  </a:ext>
-                </a:extLst>
               </a:tr>
-              <a:tr h="352662">
+              <a:tr h="320040">
                 <a:tc>
                   <a:txBody>
                     <a:bodyPr/>
@@ -12361,13 +12121,8 @@
                   </a:txBody>
                   <a:tcPr/>
                 </a:tc>
-                <a:extLst>
-                  <a:ext uri="{0D108BD9-81ED-4DB2-BD59-A6C34878D82A}">
-                    <a16:rowId xmlns:a16="http://schemas.microsoft.com/office/drawing/2014/main" val="10001"/>
-                  </a:ext>
-                </a:extLst>
               </a:tr>
-              <a:tr h="352662">
+              <a:tr h="320040">
                 <a:tc>
                   <a:txBody>
                     <a:bodyPr/>
@@ -12425,13 +12180,8 @@
                   </a:txBody>
                   <a:tcPr/>
                 </a:tc>
-                <a:extLst>
-                  <a:ext uri="{0D108BD9-81ED-4DB2-BD59-A6C34878D82A}">
-                    <a16:rowId xmlns:a16="http://schemas.microsoft.com/office/drawing/2014/main" val="10002"/>
-                  </a:ext>
-                </a:extLst>
               </a:tr>
-              <a:tr h="352662">
+              <a:tr h="320040">
                 <a:tc>
                   <a:txBody>
                     <a:bodyPr/>
@@ -12489,13 +12239,8 @@
                   </a:txBody>
                   <a:tcPr/>
                 </a:tc>
-                <a:extLst>
-                  <a:ext uri="{0D108BD9-81ED-4DB2-BD59-A6C34878D82A}">
-                    <a16:rowId xmlns:a16="http://schemas.microsoft.com/office/drawing/2014/main" val="10003"/>
-                  </a:ext>
-                </a:extLst>
               </a:tr>
-              <a:tr h="352662">
+              <a:tr h="320040">
                 <a:tc>
                   <a:txBody>
                     <a:bodyPr/>
@@ -12553,11 +12298,6 @@
                   </a:txBody>
                   <a:tcPr/>
                 </a:tc>
-                <a:extLst>
-                  <a:ext uri="{0D108BD9-81ED-4DB2-BD59-A6C34878D82A}">
-                    <a16:rowId xmlns:a16="http://schemas.microsoft.com/office/drawing/2014/main" val="10004"/>
-                  </a:ext>
-                </a:extLst>
               </a:tr>
             </a:tbl>
           </a:graphicData>
@@ -12607,7 +12347,7 @@
 </file>
 
 <file path=ppt/slides/slide9.xml><?xml version="1.0" encoding="utf-8"?>
-<p:sld xmlns:a="http://schemas.openxmlformats.org/drawingml/2006/main" xmlns:r="http://schemas.openxmlformats.org/officeDocument/2006/relationships" xmlns:p="http://schemas.openxmlformats.org/presentationml/2006/main">
+<p:sld xmlns:a="http://schemas.openxmlformats.org/drawingml/2006/main" xmlns:p="http://schemas.openxmlformats.org/presentationml/2006/main" xmlns:r="http://schemas.openxmlformats.org/officeDocument/2006/relationships">
   <p:cSld>
     <p:bg>
       <p:bgPr>
@@ -12623,14 +12363,7 @@
         <p:cNvGrpSpPr/>
         <p:nvPr/>
       </p:nvGrpSpPr>
-      <p:grpSpPr>
-        <a:xfrm>
-          <a:off x="0" y="0"/>
-          <a:ext cx="0" cy="0"/>
-          <a:chOff x="0" y="0"/>
-          <a:chExt cx="0" cy="0"/>
-        </a:xfrm>
-      </p:grpSpPr>
+      <p:grpSpPr/>
       <p:sp>
         <p:nvSpPr>
           <p:cNvPr id="2" name="TextBox 1"/>
@@ -12709,7 +12442,7 @@
         </p:nvSpPr>
         <p:spPr>
           <a:xfrm>
-            <a:off x="731520" y="1920239"/>
+            <a:off x="731520" y="1280160"/>
             <a:ext cx="5303520" cy="1371600"/>
           </a:xfrm>
           <a:prstGeom prst="roundRect">
@@ -12739,7 +12472,7 @@
           </a:fontRef>
         </p:style>
         <p:txBody>
-          <a:bodyPr wrap="square" lIns="182880" tIns="137160" rIns="137160" bIns="91440" rtlCol="0" anchor="ctr"/>
+          <a:bodyPr rtlCol="0" anchor="ctr" wrap="square" lIns="182880" rIns="137160" tIns="137160" bIns="91440"/>
           <a:lstStyle/>
           <a:p>
             <a:pPr algn="ctr">
@@ -12841,7 +12574,7 @@
         </p:nvSpPr>
         <p:spPr>
           <a:xfrm>
-            <a:off x="716280" y="4013473"/>
+            <a:off x="731520" y="2834640"/>
             <a:ext cx="5303520" cy="1097280"/>
           </a:xfrm>
           <a:prstGeom prst="roundRect">
@@ -12871,7 +12604,7 @@
           </a:fontRef>
         </p:style>
         <p:txBody>
-          <a:bodyPr wrap="square" lIns="182880" tIns="137160" rIns="137160" bIns="91440" rtlCol="0" anchor="ctr"/>
+          <a:bodyPr rtlCol="0" anchor="ctr" wrap="square" lIns="182880" rIns="137160" tIns="137160" bIns="91440"/>
           <a:lstStyle/>
           <a:p>
             <a:pPr algn="ctr">
@@ -12973,7 +12706,7 @@
           </a:fontRef>
         </p:style>
         <p:txBody>
-          <a:bodyPr wrap="square" lIns="182880" tIns="137160" rIns="137160" bIns="91440" rtlCol="0" anchor="ctr"/>
+          <a:bodyPr rtlCol="0" anchor="ctr" wrap="square" lIns="182880" rIns="137160" tIns="137160" bIns="91440"/>
           <a:lstStyle/>
           <a:p>
             <a:pPr algn="ctr">
@@ -13090,8 +12823,8 @@
         </p:nvSpPr>
         <p:spPr>
           <a:xfrm>
-            <a:off x="6400800" y="3291839"/>
-            <a:ext cx="5303520" cy="2540549"/>
+            <a:off x="6400800" y="3291840"/>
+            <a:ext cx="5303520" cy="2286000"/>
           </a:xfrm>
           <a:prstGeom prst="roundRect">
             <a:avLst/>
@@ -13124,7 +12857,6 @@
           <a:lstStyle/>
           <a:p>
             <a:pPr algn="ctr"/>
-            <a:endParaRPr/>
           </a:p>
         </p:txBody>
       </p:sp>
@@ -13182,27 +12914,9 @@
                 <a:tableStyleId>{5C22544A-7EE6-4342-B048-85BDC9FD1C3A}</a:tableStyleId>
               </a:tblPr>
               <a:tblGrid>
-                <a:gridCol w="1371600">
-                  <a:extLst>
-                    <a:ext uri="{9D8B030D-6E8A-4147-A177-3AD203B41FA5}">
-                      <a16:colId xmlns:a16="http://schemas.microsoft.com/office/drawing/2014/main" val="20000"/>
-                    </a:ext>
-                  </a:extLst>
-                </a:gridCol>
-                <a:gridCol w="731520">
-                  <a:extLst>
-                    <a:ext uri="{9D8B030D-6E8A-4147-A177-3AD203B41FA5}">
-                      <a16:colId xmlns:a16="http://schemas.microsoft.com/office/drawing/2014/main" val="20001"/>
-                    </a:ext>
-                  </a:extLst>
-                </a:gridCol>
-                <a:gridCol w="2743200">
-                  <a:extLst>
-                    <a:ext uri="{9D8B030D-6E8A-4147-A177-3AD203B41FA5}">
-                      <a16:colId xmlns:a16="http://schemas.microsoft.com/office/drawing/2014/main" val="20002"/>
-                    </a:ext>
-                  </a:extLst>
-                </a:gridCol>
+                <a:gridCol w="1371600"/>
+                <a:gridCol w="731520"/>
+                <a:gridCol w="2743200"/>
               </a:tblGrid>
               <a:tr h="320040">
                 <a:tc>
@@ -13274,11 +12988,6 @@
                     </a:solidFill>
                   </a:tcPr>
                 </a:tc>
-                <a:extLst>
-                  <a:ext uri="{0D108BD9-81ED-4DB2-BD59-A6C34878D82A}">
-                    <a16:rowId xmlns:a16="http://schemas.microsoft.com/office/drawing/2014/main" val="10000"/>
-                  </a:ext>
-                </a:extLst>
               </a:tr>
               <a:tr h="320040">
                 <a:tc>
@@ -13338,11 +13047,6 @@
                   </a:txBody>
                   <a:tcPr/>
                 </a:tc>
-                <a:extLst>
-                  <a:ext uri="{0D108BD9-81ED-4DB2-BD59-A6C34878D82A}">
-                    <a16:rowId xmlns:a16="http://schemas.microsoft.com/office/drawing/2014/main" val="10001"/>
-                  </a:ext>
-                </a:extLst>
               </a:tr>
               <a:tr h="320040">
                 <a:tc>
@@ -13402,11 +13106,6 @@
                   </a:txBody>
                   <a:tcPr/>
                 </a:tc>
-                <a:extLst>
-                  <a:ext uri="{0D108BD9-81ED-4DB2-BD59-A6C34878D82A}">
-                    <a16:rowId xmlns:a16="http://schemas.microsoft.com/office/drawing/2014/main" val="10002"/>
-                  </a:ext>
-                </a:extLst>
               </a:tr>
               <a:tr h="320040">
                 <a:tc>
@@ -13466,11 +13165,6 @@
                   </a:txBody>
                   <a:tcPr/>
                 </a:tc>
-                <a:extLst>
-                  <a:ext uri="{0D108BD9-81ED-4DB2-BD59-A6C34878D82A}">
-                    <a16:rowId xmlns:a16="http://schemas.microsoft.com/office/drawing/2014/main" val="10003"/>
-                  </a:ext>
-                </a:extLst>
               </a:tr>
             </a:tbl>
           </a:graphicData>
@@ -13484,7 +13178,7 @@
         </p:nvSpPr>
         <p:spPr>
           <a:xfrm>
-            <a:off x="6537960" y="4983480"/>
+            <a:off x="6583680" y="4754880"/>
             <a:ext cx="4937760" cy="640080"/>
           </a:xfrm>
           <a:prstGeom prst="roundRect">
@@ -13516,7 +13210,6 @@
           <a:lstStyle/>
           <a:p>
             <a:pPr algn="ctr"/>
-            <a:endParaRPr/>
           </a:p>
         </p:txBody>
       </p:sp>
@@ -13528,7 +13221,7 @@
         </p:nvSpPr>
         <p:spPr>
           <a:xfrm>
-            <a:off x="6720840" y="5212080"/>
+            <a:off x="6766560" y="4846320"/>
             <a:ext cx="4572000" cy="457200"/>
           </a:xfrm>
           <a:prstGeom prst="rect">

--- a/doc/iHealthSim.pptx
+++ b/doc/iHealthSim.pptx
@@ -22,6 +22,8 @@
     <p:sldId id="270" r:id="rId21"/>
     <p:sldId id="271" r:id="rId22"/>
     <p:sldId id="272" r:id="rId23"/>
+    <p:sldId id="273" r:id="rId24"/>
+    <p:sldId id="274" r:id="rId25"/>
   </p:sldIdLst>
   <p:sldSz cx="12191695" cy="6858000" type="screen4x3"/>
   <p:notesSz cx="6858000" cy="9144000"/>
@@ -3311,7 +3313,7 @@
               </a:defRPr>
             </a:pPr>
             <a:r>
-              <a:t>版本 0.1.0  ·  2025-05</a:t>
+              <a:t>版本 0.2.0  ·  2026-05</a:t>
             </a:r>
           </a:p>
         </p:txBody>
@@ -3346,7 +3348,7 @@
               </a:defRPr>
             </a:pPr>
             <a:r>
-              <a:t>1 / 17</a:t>
+              <a:t>1 / 19</a:t>
             </a:r>
           </a:p>
         </p:txBody>
@@ -3365,7 +3367,7 @@
     <p:bg>
       <p:bgPr>
         <a:solidFill>
-          <a:srgbClr val="0F172A"/>
+          <a:srgbClr val="F8FAFC"/>
         </a:solidFill>
         <a:effectLst/>
       </p:bgPr>
@@ -3385,8 +3387,8 @@
         </p:nvSpPr>
         <p:spPr>
           <a:xfrm>
-            <a:off x="914400" y="2377440"/>
-            <a:ext cx="10332720" cy="1097280"/>
+            <a:off x="731520" y="365760"/>
+            <a:ext cx="10058400" cy="548640"/>
           </a:xfrm>
           <a:prstGeom prst="rect">
             <a:avLst/>
@@ -3399,15 +3401,15 @@
           </a:bodyPr>
           <a:lstStyle/>
           <a:p>
-            <a:pPr algn="ctr">
-              <a:defRPr sz="4200" b="1">
-                <a:solidFill>
-                  <a:srgbClr val="FFFFFF"/>
-                </a:solidFill>
-              </a:defRPr>
-            </a:pPr>
-            <a:r>
-              <a:t>后端与前端的协作</a:t>
+            <a:pPr algn="l">
+              <a:defRPr sz="2800" b="1">
+                <a:solidFill>
+                  <a:srgbClr val="0F172A"/>
+                </a:solidFill>
+              </a:defRPr>
+            </a:pPr>
+            <a:r>
+              <a:t>多模型解释对比</a:t>
             </a:r>
           </a:p>
         </p:txBody>
@@ -3420,8 +3422,8 @@
         </p:nvSpPr>
         <p:spPr>
           <a:xfrm>
-            <a:off x="914400" y="3566160"/>
-            <a:ext cx="10332720" cy="731520"/>
+            <a:off x="731520" y="822960"/>
+            <a:ext cx="10058400" cy="274320"/>
           </a:xfrm>
           <a:prstGeom prst="rect">
             <a:avLst/>
@@ -3434,29 +3436,117 @@
           </a:bodyPr>
           <a:lstStyle/>
           <a:p>
-            <a:pPr algn="ctr">
-              <a:defRPr sz="1800" b="0">
-                <a:solidFill>
-                  <a:srgbClr val="64748B"/>
-                </a:solidFill>
-              </a:defRPr>
-            </a:pPr>
-            <a:r>
-              <a:t>Flask + SSE + Vue 3 实时看板</a:t>
-            </a:r>
-          </a:p>
-        </p:txBody>
-      </p:sp>
-      <p:sp>
-        <p:nvSpPr>
-          <p:cNvPr id="4" name="TextBox 3"/>
+            <a:pPr algn="l">
+              <a:defRPr sz="1200" b="0">
+                <a:solidFill>
+                  <a:srgbClr val="64748B"/>
+                </a:solidFill>
+              </a:defRPr>
+            </a:pPr>
+            <a:r>
+              <a:t>同一预测结果，三种模型提供不同深度的诊断依据</a:t>
+            </a:r>
+          </a:p>
+        </p:txBody>
+      </p:sp>
+      <p:sp>
+        <p:nvSpPr>
+          <p:cNvPr id="4" name="Rounded Rectangle 3"/>
+          <p:cNvSpPr/>
+          <p:nvPr/>
+        </p:nvSpPr>
+        <p:spPr>
+          <a:xfrm>
+            <a:off x="731520" y="1280160"/>
+            <a:ext cx="5303520" cy="2011680"/>
+          </a:xfrm>
+          <a:prstGeom prst="roundRect">
+            <a:avLst/>
+          </a:prstGeom>
+          <a:solidFill>
+            <a:srgbClr val="FFFFFF"/>
+          </a:solidFill>
+          <a:ln w="12700">
+            <a:solidFill>
+              <a:srgbClr val="E2E8F0"/>
+            </a:solidFill>
+          </a:ln>
+        </p:spPr>
+        <p:style>
+          <a:lnRef idx="1">
+            <a:schemeClr val="accent1"/>
+          </a:lnRef>
+          <a:fillRef idx="3">
+            <a:schemeClr val="accent1"/>
+          </a:fillRef>
+          <a:effectRef idx="2">
+            <a:schemeClr val="accent1"/>
+          </a:effectRef>
+          <a:fontRef idx="minor">
+            <a:schemeClr val="lt1"/>
+          </a:fontRef>
+        </p:style>
+        <p:txBody>
+          <a:bodyPr rtlCol="0" anchor="ctr"/>
+          <a:lstStyle/>
+          <a:p>
+            <a:pPr algn="ctr"/>
+          </a:p>
+        </p:txBody>
+      </p:sp>
+      <p:sp>
+        <p:nvSpPr>
+          <p:cNvPr id="5" name="Rounded Rectangle 4"/>
+          <p:cNvSpPr/>
+          <p:nvPr/>
+        </p:nvSpPr>
+        <p:spPr>
+          <a:xfrm>
+            <a:off x="731520" y="1280160"/>
+            <a:ext cx="5303520" cy="45720"/>
+          </a:xfrm>
+          <a:prstGeom prst="roundRect">
+            <a:avLst/>
+          </a:prstGeom>
+          <a:solidFill>
+            <a:srgbClr val="10B981"/>
+          </a:solidFill>
+          <a:ln>
+            <a:noFill/>
+          </a:ln>
+        </p:spPr>
+        <p:style>
+          <a:lnRef idx="1">
+            <a:schemeClr val="accent1"/>
+          </a:lnRef>
+          <a:fillRef idx="3">
+            <a:schemeClr val="accent1"/>
+          </a:fillRef>
+          <a:effectRef idx="2">
+            <a:schemeClr val="accent1"/>
+          </a:effectRef>
+          <a:fontRef idx="minor">
+            <a:schemeClr val="lt1"/>
+          </a:fontRef>
+        </p:style>
+        <p:txBody>
+          <a:bodyPr rtlCol="0" anchor="ctr"/>
+          <a:lstStyle/>
+          <a:p>
+            <a:pPr algn="ctr"/>
+          </a:p>
+        </p:txBody>
+      </p:sp>
+      <p:sp>
+        <p:nvSpPr>
+          <p:cNvPr id="6" name="TextBox 5"/>
           <p:cNvSpPr txBox="1"/>
           <p:nvPr/>
         </p:nvSpPr>
         <p:spPr>
           <a:xfrm>
-            <a:off x="10515600" y="6492240"/>
-            <a:ext cx="1371600" cy="274320"/>
+            <a:off x="914400" y="1371600"/>
+            <a:ext cx="4937760" cy="274320"/>
           </a:xfrm>
           <a:prstGeom prst="rect">
             <a:avLst/>
@@ -3469,6 +3559,792 @@
           </a:bodyPr>
           <a:lstStyle/>
           <a:p>
+            <a:pPr algn="l">
+              <a:defRPr sz="1400" b="1">
+                <a:solidFill>
+                  <a:srgbClr val="065F46"/>
+                </a:solidFill>
+              </a:defRPr>
+            </a:pPr>
+            <a:r>
+              <a:t>决策树 — 完整决策路径</a:t>
+            </a:r>
+          </a:p>
+        </p:txBody>
+      </p:sp>
+      <p:sp>
+        <p:nvSpPr>
+          <p:cNvPr id="7" name="Rounded Rectangle 6"/>
+          <p:cNvSpPr/>
+          <p:nvPr/>
+        </p:nvSpPr>
+        <p:spPr>
+          <a:xfrm>
+            <a:off x="914400" y="1737360"/>
+            <a:ext cx="4937760" cy="1188720"/>
+          </a:xfrm>
+          <a:prstGeom prst="roundRect">
+            <a:avLst/>
+          </a:prstGeom>
+          <a:solidFill>
+            <a:srgbClr val="1E293B"/>
+          </a:solidFill>
+          <a:ln>
+            <a:noFill/>
+          </a:ln>
+        </p:spPr>
+        <p:style>
+          <a:lnRef idx="1">
+            <a:schemeClr val="accent1"/>
+          </a:lnRef>
+          <a:fillRef idx="3">
+            <a:schemeClr val="accent1"/>
+          </a:fillRef>
+          <a:effectRef idx="2">
+            <a:schemeClr val="accent1"/>
+          </a:effectRef>
+          <a:fontRef idx="minor">
+            <a:schemeClr val="lt1"/>
+          </a:fontRef>
+        </p:style>
+        <p:txBody>
+          <a:bodyPr rtlCol="0" anchor="ctr" wrap="square" lIns="182880" tIns="109728" bIns="109728"/>
+          <a:lstStyle/>
+          <a:p>
+            <a:pPr algn="ctr">
+              <a:spcAft>
+                <a:spcPts val="100"/>
+              </a:spcAft>
+              <a:defRPr sz="1000">
+                <a:solidFill>
+                  <a:srgbClr val="E2E8F0"/>
+                </a:solidFill>
+                <a:latin typeface="Courier New"/>
+              </a:defRPr>
+            </a:pPr>
+            <a:r>
+              <a:t>vib_rms_mean &gt; 2.351 (val=3.142) →</a:t>
+            </a:r>
+            <a:br/>
+            <a:r>
+              <a:t>temp_c_mean &lt;= 55.200 (val=52.100) →</a:t>
+            </a:r>
+            <a:br/>
+            <a:r>
+              <a:t>vib_rms_norm &gt; 1.890 (val=2.410) →</a:t>
+            </a:r>
+            <a:br/>
+            <a:r>
+              <a:t>→ Lv2 (警告)</a:t>
+            </a:r>
+          </a:p>
+        </p:txBody>
+      </p:sp>
+      <p:sp>
+        <p:nvSpPr>
+          <p:cNvPr id="8" name="TextBox 7"/>
+          <p:cNvSpPr txBox="1"/>
+          <p:nvPr/>
+        </p:nvSpPr>
+        <p:spPr>
+          <a:xfrm>
+            <a:off x="914400" y="3063240"/>
+            <a:ext cx="4937760" cy="274320"/>
+          </a:xfrm>
+          <a:prstGeom prst="rect">
+            <a:avLst/>
+          </a:prstGeom>
+          <a:noFill/>
+        </p:spPr>
+        <p:txBody>
+          <a:bodyPr wrap="square">
+            <a:spAutoFit/>
+          </a:bodyPr>
+          <a:lstStyle/>
+          <a:p>
+            <a:pPr algn="l">
+              <a:defRPr sz="1100" b="0">
+                <a:solidFill>
+                  <a:srgbClr val="64748B"/>
+                </a:solidFill>
+              </a:defRPr>
+            </a:pPr>
+            <a:r>
+              <a:t>每步可审计，从根节点到叶节点逐步判定</a:t>
+            </a:r>
+          </a:p>
+        </p:txBody>
+      </p:sp>
+      <p:sp>
+        <p:nvSpPr>
+          <p:cNvPr id="9" name="Rounded Rectangle 8"/>
+          <p:cNvSpPr/>
+          <p:nvPr/>
+        </p:nvSpPr>
+        <p:spPr>
+          <a:xfrm>
+            <a:off x="6400800" y="1280160"/>
+            <a:ext cx="5303520" cy="2011680"/>
+          </a:xfrm>
+          <a:prstGeom prst="roundRect">
+            <a:avLst/>
+          </a:prstGeom>
+          <a:solidFill>
+            <a:srgbClr val="FFFFFF"/>
+          </a:solidFill>
+          <a:ln w="12700">
+            <a:solidFill>
+              <a:srgbClr val="E2E8F0"/>
+            </a:solidFill>
+          </a:ln>
+        </p:spPr>
+        <p:style>
+          <a:lnRef idx="1">
+            <a:schemeClr val="accent1"/>
+          </a:lnRef>
+          <a:fillRef idx="3">
+            <a:schemeClr val="accent1"/>
+          </a:fillRef>
+          <a:effectRef idx="2">
+            <a:schemeClr val="accent1"/>
+          </a:effectRef>
+          <a:fontRef idx="minor">
+            <a:schemeClr val="lt1"/>
+          </a:fontRef>
+        </p:style>
+        <p:txBody>
+          <a:bodyPr rtlCol="0" anchor="ctr"/>
+          <a:lstStyle/>
+          <a:p>
+            <a:pPr algn="ctr"/>
+          </a:p>
+        </p:txBody>
+      </p:sp>
+      <p:sp>
+        <p:nvSpPr>
+          <p:cNvPr id="10" name="Rounded Rectangle 9"/>
+          <p:cNvSpPr/>
+          <p:nvPr/>
+        </p:nvSpPr>
+        <p:spPr>
+          <a:xfrm>
+            <a:off x="6400800" y="1280160"/>
+            <a:ext cx="5303520" cy="45720"/>
+          </a:xfrm>
+          <a:prstGeom prst="roundRect">
+            <a:avLst/>
+          </a:prstGeom>
+          <a:solidFill>
+            <a:srgbClr val="1A73E8"/>
+          </a:solidFill>
+          <a:ln>
+            <a:noFill/>
+          </a:ln>
+        </p:spPr>
+        <p:style>
+          <a:lnRef idx="1">
+            <a:schemeClr val="accent1"/>
+          </a:lnRef>
+          <a:fillRef idx="3">
+            <a:schemeClr val="accent1"/>
+          </a:fillRef>
+          <a:effectRef idx="2">
+            <a:schemeClr val="accent1"/>
+          </a:effectRef>
+          <a:fontRef idx="minor">
+            <a:schemeClr val="lt1"/>
+          </a:fontRef>
+        </p:style>
+        <p:txBody>
+          <a:bodyPr rtlCol="0" anchor="ctr"/>
+          <a:lstStyle/>
+          <a:p>
+            <a:pPr algn="ctr"/>
+          </a:p>
+        </p:txBody>
+      </p:sp>
+      <p:sp>
+        <p:nvSpPr>
+          <p:cNvPr id="11" name="TextBox 10"/>
+          <p:cNvSpPr txBox="1"/>
+          <p:nvPr/>
+        </p:nvSpPr>
+        <p:spPr>
+          <a:xfrm>
+            <a:off x="6583680" y="1371600"/>
+            <a:ext cx="4937760" cy="274320"/>
+          </a:xfrm>
+          <a:prstGeom prst="rect">
+            <a:avLst/>
+          </a:prstGeom>
+          <a:noFill/>
+        </p:spPr>
+        <p:txBody>
+          <a:bodyPr wrap="square">
+            <a:spAutoFit/>
+          </a:bodyPr>
+          <a:lstStyle/>
+          <a:p>
+            <a:pPr algn="l">
+              <a:defRPr sz="1400" b="1">
+                <a:solidFill>
+                  <a:srgbClr val="1E40AF"/>
+                </a:solidFill>
+              </a:defRPr>
+            </a:pPr>
+            <a:r>
+              <a:t>XGBoost/LightGBM — 基线偏差诊断</a:t>
+            </a:r>
+          </a:p>
+        </p:txBody>
+      </p:sp>
+      <p:sp>
+        <p:nvSpPr>
+          <p:cNvPr id="12" name="Rounded Rectangle 11"/>
+          <p:cNvSpPr/>
+          <p:nvPr/>
+        </p:nvSpPr>
+        <p:spPr>
+          <a:xfrm>
+            <a:off x="6583680" y="1737360"/>
+            <a:ext cx="4937760" cy="1188720"/>
+          </a:xfrm>
+          <a:prstGeom prst="roundRect">
+            <a:avLst/>
+          </a:prstGeom>
+          <a:solidFill>
+            <a:srgbClr val="1E293B"/>
+          </a:solidFill>
+          <a:ln>
+            <a:noFill/>
+          </a:ln>
+        </p:spPr>
+        <p:style>
+          <a:lnRef idx="1">
+            <a:schemeClr val="accent1"/>
+          </a:lnRef>
+          <a:fillRef idx="3">
+            <a:schemeClr val="accent1"/>
+          </a:fillRef>
+          <a:effectRef idx="2">
+            <a:schemeClr val="accent1"/>
+          </a:effectRef>
+          <a:fontRef idx="minor">
+            <a:schemeClr val="lt1"/>
+          </a:fontRef>
+        </p:style>
+        <p:txBody>
+          <a:bodyPr rtlCol="0" anchor="ctr" wrap="square" lIns="182880" tIns="109728" bIns="109728"/>
+          <a:lstStyle/>
+          <a:p>
+            <a:pPr algn="ctr">
+              <a:spcAft>
+                <a:spcPts val="100"/>
+              </a:spcAft>
+              <a:defRPr sz="1000">
+                <a:solidFill>
+                  <a:srgbClr val="E2E8F0"/>
+                </a:solidFill>
+                <a:latin typeface="Courier New"/>
+              </a:defRPr>
+            </a:pPr>
+            <a:r>
+              <a:t>vib_rms_mean&gt;偏高↑(val=4.52, z=+3.1, imp=0.28) →</a:t>
+            </a:r>
+            <a:br/>
+            <a:r>
+              <a:t>temp_c_mean&gt;略高(val=72.3, z=+1.5, imp=0.19) →</a:t>
+            </a:r>
+            <a:br/>
+            <a:r>
+              <a:t>→ Lv2 (警告)</a:t>
+            </a:r>
+          </a:p>
+        </p:txBody>
+      </p:sp>
+      <p:sp>
+        <p:nvSpPr>
+          <p:cNvPr id="13" name="TextBox 12"/>
+          <p:cNvSpPr txBox="1"/>
+          <p:nvPr/>
+        </p:nvSpPr>
+        <p:spPr>
+          <a:xfrm>
+            <a:off x="6583680" y="3063240"/>
+            <a:ext cx="4937760" cy="274320"/>
+          </a:xfrm>
+          <a:prstGeom prst="rect">
+            <a:avLst/>
+          </a:prstGeom>
+          <a:noFill/>
+        </p:spPr>
+        <p:txBody>
+          <a:bodyPr wrap="square">
+            <a:spAutoFit/>
+          </a:bodyPr>
+          <a:lstStyle/>
+          <a:p>
+            <a:pPr algn="l">
+              <a:defRPr sz="1100" b="0">
+                <a:solidFill>
+                  <a:srgbClr val="64748B"/>
+                </a:solidFill>
+              </a:defRPr>
+            </a:pPr>
+            <a:r>
+              <a:t>与 Lv0 健康基线对比，z-score 判定偏离程度</a:t>
+            </a:r>
+          </a:p>
+        </p:txBody>
+      </p:sp>
+      <p:sp>
+        <p:nvSpPr>
+          <p:cNvPr id="14" name="TextBox 13"/>
+          <p:cNvSpPr txBox="1"/>
+          <p:nvPr/>
+        </p:nvSpPr>
+        <p:spPr>
+          <a:xfrm>
+            <a:off x="731520" y="3566160"/>
+            <a:ext cx="4572000" cy="274320"/>
+          </a:xfrm>
+          <a:prstGeom prst="rect">
+            <a:avLst/>
+          </a:prstGeom>
+          <a:noFill/>
+        </p:spPr>
+        <p:txBody>
+          <a:bodyPr wrap="square">
+            <a:spAutoFit/>
+          </a:bodyPr>
+          <a:lstStyle/>
+          <a:p>
+            <a:pPr algn="l">
+              <a:defRPr sz="1400" b="1">
+                <a:solidFill>
+                  <a:srgbClr val="0F172A"/>
+                </a:solidFill>
+              </a:defRPr>
+            </a:pPr>
+            <a:r>
+              <a:t>z-score 偏离判定标准</a:t>
+            </a:r>
+          </a:p>
+        </p:txBody>
+      </p:sp>
+      <p:sp>
+        <p:nvSpPr>
+          <p:cNvPr id="15" name="Rounded Rectangle 14"/>
+          <p:cNvSpPr/>
+          <p:nvPr/>
+        </p:nvSpPr>
+        <p:spPr>
+          <a:xfrm>
+            <a:off x="731520" y="3931920"/>
+            <a:ext cx="2560320" cy="1188720"/>
+          </a:xfrm>
+          <a:prstGeom prst="roundRect">
+            <a:avLst/>
+          </a:prstGeom>
+          <a:solidFill>
+            <a:srgbClr val="D1FAE5"/>
+          </a:solidFill>
+          <a:ln w="12700">
+            <a:solidFill>
+              <a:srgbClr val="E2E8F0"/>
+            </a:solidFill>
+          </a:ln>
+        </p:spPr>
+        <p:style>
+          <a:lnRef idx="1">
+            <a:schemeClr val="accent1"/>
+          </a:lnRef>
+          <a:fillRef idx="3">
+            <a:schemeClr val="accent1"/>
+          </a:fillRef>
+          <a:effectRef idx="2">
+            <a:schemeClr val="accent1"/>
+          </a:effectRef>
+          <a:fontRef idx="minor">
+            <a:schemeClr val="lt1"/>
+          </a:fontRef>
+        </p:style>
+        <p:txBody>
+          <a:bodyPr rtlCol="0" anchor="ctr" wrap="square"/>
+          <a:lstStyle/>
+          <a:p>
+            <a:pPr algn="ctr">
+              <a:defRPr sz="1500" b="1">
+                <a:solidFill>
+                  <a:srgbClr val="065F46"/>
+                </a:solidFill>
+              </a:defRPr>
+            </a:pPr>
+            <a:r>
+              <a:t>|z| ≤ 1.0</a:t>
+            </a:r>
+          </a:p>
+          <a:p>
+            <a:pPr algn="ctr">
+              <a:defRPr sz="1100">
+                <a:solidFill>
+                  <a:srgbClr val="065F46"/>
+                </a:solidFill>
+              </a:defRPr>
+            </a:pPr>
+            <a:r>
+              <a:t>正常</a:t>
+            </a:r>
+          </a:p>
+        </p:txBody>
+      </p:sp>
+      <p:sp>
+        <p:nvSpPr>
+          <p:cNvPr id="16" name="Rounded Rectangle 15"/>
+          <p:cNvSpPr/>
+          <p:nvPr/>
+        </p:nvSpPr>
+        <p:spPr>
+          <a:xfrm>
+            <a:off x="3566160" y="3931920"/>
+            <a:ext cx="2560320" cy="1188720"/>
+          </a:xfrm>
+          <a:prstGeom prst="roundRect">
+            <a:avLst/>
+          </a:prstGeom>
+          <a:solidFill>
+            <a:srgbClr val="FEF3C7"/>
+          </a:solidFill>
+          <a:ln w="12700">
+            <a:solidFill>
+              <a:srgbClr val="E2E8F0"/>
+            </a:solidFill>
+          </a:ln>
+        </p:spPr>
+        <p:style>
+          <a:lnRef idx="1">
+            <a:schemeClr val="accent1"/>
+          </a:lnRef>
+          <a:fillRef idx="3">
+            <a:schemeClr val="accent1"/>
+          </a:fillRef>
+          <a:effectRef idx="2">
+            <a:schemeClr val="accent1"/>
+          </a:effectRef>
+          <a:fontRef idx="minor">
+            <a:schemeClr val="lt1"/>
+          </a:fontRef>
+        </p:style>
+        <p:txBody>
+          <a:bodyPr rtlCol="0" anchor="ctr" wrap="square"/>
+          <a:lstStyle/>
+          <a:p>
+            <a:pPr algn="ctr">
+              <a:defRPr sz="1500" b="1">
+                <a:solidFill>
+                  <a:srgbClr val="92400E"/>
+                </a:solidFill>
+              </a:defRPr>
+            </a:pPr>
+            <a:r>
+              <a:t>1.0 &lt; |z| ≤ 2.0</a:t>
+            </a:r>
+          </a:p>
+          <a:p>
+            <a:pPr algn="ctr">
+              <a:defRPr sz="1100">
+                <a:solidFill>
+                  <a:srgbClr val="92400E"/>
+                </a:solidFill>
+              </a:defRPr>
+            </a:pPr>
+            <a:r>
+              <a:t>略高/略低</a:t>
+            </a:r>
+          </a:p>
+        </p:txBody>
+      </p:sp>
+      <p:sp>
+        <p:nvSpPr>
+          <p:cNvPr id="17" name="Rounded Rectangle 16"/>
+          <p:cNvSpPr/>
+          <p:nvPr/>
+        </p:nvSpPr>
+        <p:spPr>
+          <a:xfrm>
+            <a:off x="6400800" y="3931920"/>
+            <a:ext cx="2560320" cy="1188720"/>
+          </a:xfrm>
+          <a:prstGeom prst="roundRect">
+            <a:avLst/>
+          </a:prstGeom>
+          <a:solidFill>
+            <a:srgbClr val="FEE2E2"/>
+          </a:solidFill>
+          <a:ln w="12700">
+            <a:solidFill>
+              <a:srgbClr val="E2E8F0"/>
+            </a:solidFill>
+          </a:ln>
+        </p:spPr>
+        <p:style>
+          <a:lnRef idx="1">
+            <a:schemeClr val="accent1"/>
+          </a:lnRef>
+          <a:fillRef idx="3">
+            <a:schemeClr val="accent1"/>
+          </a:fillRef>
+          <a:effectRef idx="2">
+            <a:schemeClr val="accent1"/>
+          </a:effectRef>
+          <a:fontRef idx="minor">
+            <a:schemeClr val="lt1"/>
+          </a:fontRef>
+        </p:style>
+        <p:txBody>
+          <a:bodyPr rtlCol="0" anchor="ctr" wrap="square"/>
+          <a:lstStyle/>
+          <a:p>
+            <a:pPr algn="ctr">
+              <a:defRPr sz="1500" b="1">
+                <a:solidFill>
+                  <a:srgbClr val="991B1B"/>
+                </a:solidFill>
+              </a:defRPr>
+            </a:pPr>
+            <a:r>
+              <a:t>|z| &gt; 2.0</a:t>
+            </a:r>
+          </a:p>
+          <a:p>
+            <a:pPr algn="ctr">
+              <a:defRPr sz="1100">
+                <a:solidFill>
+                  <a:srgbClr val="991B1B"/>
+                </a:solidFill>
+              </a:defRPr>
+            </a:pPr>
+            <a:r>
+              <a:t>偏高↑/偏低↓</a:t>
+            </a:r>
+          </a:p>
+        </p:txBody>
+      </p:sp>
+      <p:sp>
+        <p:nvSpPr>
+          <p:cNvPr id="18" name="Rounded Rectangle 17"/>
+          <p:cNvSpPr/>
+          <p:nvPr/>
+        </p:nvSpPr>
+        <p:spPr>
+          <a:xfrm>
+            <a:off x="9235440" y="3931920"/>
+            <a:ext cx="2560320" cy="1188720"/>
+          </a:xfrm>
+          <a:prstGeom prst="roundRect">
+            <a:avLst/>
+          </a:prstGeom>
+          <a:solidFill>
+            <a:srgbClr val="F1F5F9"/>
+          </a:solidFill>
+          <a:ln w="12700">
+            <a:solidFill>
+              <a:srgbClr val="E2E8F0"/>
+            </a:solidFill>
+          </a:ln>
+        </p:spPr>
+        <p:style>
+          <a:lnRef idx="1">
+            <a:schemeClr val="accent1"/>
+          </a:lnRef>
+          <a:fillRef idx="3">
+            <a:schemeClr val="accent1"/>
+          </a:fillRef>
+          <a:effectRef idx="2">
+            <a:schemeClr val="accent1"/>
+          </a:effectRef>
+          <a:fontRef idx="minor">
+            <a:schemeClr val="lt1"/>
+          </a:fontRef>
+        </p:style>
+        <p:txBody>
+          <a:bodyPr rtlCol="0" anchor="ctr" wrap="square"/>
+          <a:lstStyle/>
+          <a:p>
+            <a:pPr algn="ctr">
+              <a:defRPr sz="1500" b="1">
+                <a:solidFill>
+                  <a:srgbClr val="64748B"/>
+                </a:solidFill>
+              </a:defRPr>
+            </a:pPr>
+            <a:r>
+              <a:t>Lv0~3 均值/std 存入模型</a:t>
+            </a:r>
+          </a:p>
+          <a:p>
+            <a:pPr algn="ctr">
+              <a:defRPr sz="1100">
+                <a:solidFill>
+                  <a:srgbClr val="64748B"/>
+                </a:solidFill>
+              </a:defRPr>
+            </a:pPr>
+            <a:r>
+              <a:t>训练时自动计算</a:t>
+            </a:r>
+          </a:p>
+        </p:txBody>
+      </p:sp>
+      <p:sp>
+        <p:nvSpPr>
+          <p:cNvPr id="19" name="Rounded Rectangle 18"/>
+          <p:cNvSpPr/>
+          <p:nvPr/>
+        </p:nvSpPr>
+        <p:spPr>
+          <a:xfrm>
+            <a:off x="731520" y="5394960"/>
+            <a:ext cx="10698480" cy="731520"/>
+          </a:xfrm>
+          <a:prstGeom prst="roundRect">
+            <a:avLst/>
+          </a:prstGeom>
+          <a:solidFill>
+            <a:srgbClr val="FFFBEB"/>
+          </a:solidFill>
+          <a:ln w="12700">
+            <a:solidFill>
+              <a:srgbClr val="FDE68A"/>
+            </a:solidFill>
+          </a:ln>
+        </p:spPr>
+        <p:style>
+          <a:lnRef idx="1">
+            <a:schemeClr val="accent1"/>
+          </a:lnRef>
+          <a:fillRef idx="3">
+            <a:schemeClr val="accent1"/>
+          </a:fillRef>
+          <a:effectRef idx="2">
+            <a:schemeClr val="accent1"/>
+          </a:effectRef>
+          <a:fontRef idx="minor">
+            <a:schemeClr val="lt1"/>
+          </a:fontRef>
+        </p:style>
+        <p:txBody>
+          <a:bodyPr rtlCol="0" anchor="ctr"/>
+          <a:lstStyle/>
+          <a:p>
+            <a:pPr algn="ctr"/>
+          </a:p>
+        </p:txBody>
+      </p:sp>
+      <p:sp>
+        <p:nvSpPr>
+          <p:cNvPr id="20" name="Rounded Rectangle 19"/>
+          <p:cNvSpPr/>
+          <p:nvPr/>
+        </p:nvSpPr>
+        <p:spPr>
+          <a:xfrm>
+            <a:off x="731520" y="5394960"/>
+            <a:ext cx="54864" cy="731520"/>
+          </a:xfrm>
+          <a:prstGeom prst="roundRect">
+            <a:avLst/>
+          </a:prstGeom>
+          <a:solidFill>
+            <a:srgbClr val="F59E0B"/>
+          </a:solidFill>
+          <a:ln>
+            <a:noFill/>
+          </a:ln>
+        </p:spPr>
+        <p:style>
+          <a:lnRef idx="1">
+            <a:schemeClr val="accent1"/>
+          </a:lnRef>
+          <a:fillRef idx="3">
+            <a:schemeClr val="accent1"/>
+          </a:fillRef>
+          <a:effectRef idx="2">
+            <a:schemeClr val="accent1"/>
+          </a:effectRef>
+          <a:fontRef idx="minor">
+            <a:schemeClr val="lt1"/>
+          </a:fontRef>
+        </p:style>
+        <p:txBody>
+          <a:bodyPr rtlCol="0" anchor="ctr"/>
+          <a:lstStyle/>
+          <a:p>
+            <a:pPr algn="ctr"/>
+          </a:p>
+        </p:txBody>
+      </p:sp>
+      <p:sp>
+        <p:nvSpPr>
+          <p:cNvPr id="21" name="TextBox 20"/>
+          <p:cNvSpPr txBox="1"/>
+          <p:nvPr/>
+        </p:nvSpPr>
+        <p:spPr>
+          <a:xfrm>
+            <a:off x="914400" y="5440680"/>
+            <a:ext cx="10378440" cy="640080"/>
+          </a:xfrm>
+          <a:prstGeom prst="rect">
+            <a:avLst/>
+          </a:prstGeom>
+          <a:noFill/>
+        </p:spPr>
+        <p:txBody>
+          <a:bodyPr wrap="square">
+            <a:spAutoFit/>
+          </a:bodyPr>
+          <a:lstStyle/>
+          <a:p>
+            <a:pPr algn="l">
+              <a:defRPr sz="1100" b="0">
+                <a:solidFill>
+                  <a:srgbClr val="92400E"/>
+                </a:solidFill>
+              </a:defRPr>
+            </a:pPr>
+            <a:r>
+              <a:t>模型无关的通用诊断接口</a:t>
+            </a:r>
+            <a:br/>
+            <a:r>
+              <a:t>不同模型类型通过统一 API 输出解释结果，前端 DiagnosticsTimeline 组件自适应渲染不同格式。</a:t>
+            </a:r>
+          </a:p>
+        </p:txBody>
+      </p:sp>
+      <p:sp>
+        <p:nvSpPr>
+          <p:cNvPr id="22" name="TextBox 21"/>
+          <p:cNvSpPr txBox="1"/>
+          <p:nvPr/>
+        </p:nvSpPr>
+        <p:spPr>
+          <a:xfrm>
+            <a:off x="10515600" y="6492240"/>
+            <a:ext cx="1371600" cy="274320"/>
+          </a:xfrm>
+          <a:prstGeom prst="rect">
+            <a:avLst/>
+          </a:prstGeom>
+          <a:noFill/>
+        </p:spPr>
+        <p:txBody>
+          <a:bodyPr wrap="square">
+            <a:spAutoFit/>
+          </a:bodyPr>
+          <a:lstStyle/>
+          <a:p>
             <a:pPr algn="r">
               <a:defRPr sz="1000" b="0">
                 <a:solidFill>
@@ -3477,7 +4353,7 @@
               </a:defRPr>
             </a:pPr>
             <a:r>
-              <a:t>10 / 17</a:t>
+              <a:t>10 / 19</a:t>
             </a:r>
           </a:p>
         </p:txBody>
@@ -3538,7 +4414,7 @@
               </a:defRPr>
             </a:pPr>
             <a:r>
-              <a:t>后端模块 + 前端看板</a:t>
+              <a:t>报警规则引擎</a:t>
             </a:r>
           </a:p>
         </p:txBody>
@@ -3573,7 +4449,7 @@
               </a:defRPr>
             </a:pPr>
             <a:r>
-              <a:t>7 个后端模块 · 4 个前端页面 · 实时事件驱动</a:t>
+              <a:t>阈值 + 趋势 + 组合 — 11 条默认规则，基于 ISO 10816 振动标准</a:t>
             </a:r>
           </a:p>
         </p:txBody>
@@ -3587,7 +4463,7 @@
         <p:spPr>
           <a:xfrm>
             <a:off x="731520" y="1280160"/>
-            <a:ext cx="5303520" cy="1005840"/>
+            <a:ext cx="3383280" cy="2743200"/>
           </a:xfrm>
           <a:prstGeom prst="roundRect">
             <a:avLst/>
@@ -3616,37 +4492,10 @@
           </a:fontRef>
         </p:style>
         <p:txBody>
-          <a:bodyPr rtlCol="0" anchor="ctr" wrap="square" lIns="182880" rIns="137160" tIns="137160" bIns="91440"/>
-          <a:lstStyle/>
-          <a:p>
-            <a:pPr algn="ctr">
-              <a:spcAft>
-                <a:spcPts val="600"/>
-              </a:spcAft>
-              <a:defRPr sz="1300" b="1">
-                <a:solidFill>
-                  <a:srgbClr val="0F172A"/>
-                </a:solidFill>
-              </a:defRPr>
-            </a:pPr>
-            <a:r>
-              <a:t>Flask 主应用 (app.py)</a:t>
-            </a:r>
-          </a:p>
-          <a:p>
-            <a:pPr>
-              <a:spcAft>
-                <a:spcPts val="200"/>
-              </a:spcAft>
-              <a:defRPr sz="1000">
-                <a:solidFill>
-                  <a:srgbClr val="64748B"/>
-                </a:solidFill>
-              </a:defRPr>
-            </a:pPr>
-            <a:r>
-              <a:t>启动时自动初始化 MQTT 订阅器、状态管理、SSE 中心、打分器；并拉起 3 台仿真设备后台进程</a:t>
-            </a:r>
+          <a:bodyPr rtlCol="0" anchor="ctr"/>
+          <a:lstStyle/>
+          <a:p>
+            <a:pPr algn="ctr"/>
           </a:p>
         </p:txBody>
       </p:sp>
@@ -3658,8 +4507,632 @@
         </p:nvSpPr>
         <p:spPr>
           <a:xfrm>
-            <a:off x="6400800" y="1280160"/>
-            <a:ext cx="5303520" cy="1005840"/>
+            <a:off x="731520" y="1280160"/>
+            <a:ext cx="3383280" cy="45720"/>
+          </a:xfrm>
+          <a:prstGeom prst="roundRect">
+            <a:avLst/>
+          </a:prstGeom>
+          <a:solidFill>
+            <a:srgbClr val="F59E0B"/>
+          </a:solidFill>
+          <a:ln>
+            <a:noFill/>
+          </a:ln>
+        </p:spPr>
+        <p:style>
+          <a:lnRef idx="1">
+            <a:schemeClr val="accent1"/>
+          </a:lnRef>
+          <a:fillRef idx="3">
+            <a:schemeClr val="accent1"/>
+          </a:fillRef>
+          <a:effectRef idx="2">
+            <a:schemeClr val="accent1"/>
+          </a:effectRef>
+          <a:fontRef idx="minor">
+            <a:schemeClr val="lt1"/>
+          </a:fontRef>
+        </p:style>
+        <p:txBody>
+          <a:bodyPr rtlCol="0" anchor="ctr"/>
+          <a:lstStyle/>
+          <a:p>
+            <a:pPr algn="ctr"/>
+          </a:p>
+        </p:txBody>
+      </p:sp>
+      <p:sp>
+        <p:nvSpPr>
+          <p:cNvPr id="6" name="TextBox 5"/>
+          <p:cNvSpPr txBox="1"/>
+          <p:nvPr/>
+        </p:nvSpPr>
+        <p:spPr>
+          <a:xfrm>
+            <a:off x="914400" y="1371600"/>
+            <a:ext cx="3017520" cy="274320"/>
+          </a:xfrm>
+          <a:prstGeom prst="rect">
+            <a:avLst/>
+          </a:prstGeom>
+          <a:noFill/>
+        </p:spPr>
+        <p:txBody>
+          <a:bodyPr wrap="square">
+            <a:spAutoFit/>
+          </a:bodyPr>
+          <a:lstStyle/>
+          <a:p>
+            <a:pPr algn="l">
+              <a:defRPr sz="1300" b="1">
+                <a:solidFill>
+                  <a:srgbClr val="92400E"/>
+                </a:solidFill>
+              </a:defRPr>
+            </a:pPr>
+            <a:r>
+              <a:t>阈值规则 (7 条)</a:t>
+            </a:r>
+          </a:p>
+        </p:txBody>
+      </p:sp>
+      <p:sp>
+        <p:nvSpPr>
+          <p:cNvPr id="7" name="TextBox 6"/>
+          <p:cNvSpPr txBox="1"/>
+          <p:nvPr/>
+        </p:nvSpPr>
+        <p:spPr>
+          <a:xfrm>
+            <a:off x="914400" y="1627632"/>
+            <a:ext cx="3017520" cy="182880"/>
+          </a:xfrm>
+          <a:prstGeom prst="rect">
+            <a:avLst/>
+          </a:prstGeom>
+          <a:noFill/>
+        </p:spPr>
+        <p:txBody>
+          <a:bodyPr wrap="square">
+            <a:spAutoFit/>
+          </a:bodyPr>
+          <a:lstStyle/>
+          <a:p>
+            <a:pPr algn="l">
+              <a:defRPr sz="900" b="0">
+                <a:solidFill>
+                  <a:srgbClr val="64748B"/>
+                </a:solidFill>
+              </a:defRPr>
+            </a:pPr>
+            <a:r>
+              <a:t>vib_rms · temp_c · motor_current · rpm</a:t>
+            </a:r>
+          </a:p>
+        </p:txBody>
+      </p:sp>
+      <p:graphicFrame>
+        <p:nvGraphicFramePr>
+          <p:cNvPr id="8" name="Table 7"/>
+          <p:cNvGraphicFramePr>
+            <a:graphicFrameLocks noGrp="1"/>
+          </p:cNvGraphicFramePr>
+          <p:nvPr/>
+        </p:nvGraphicFramePr>
+        <p:xfrm>
+          <a:off x="914400" y="1874519"/>
+          <a:ext cx="2926080" cy="2560320"/>
+        </p:xfrm>
+        <a:graphic>
+          <a:graphicData uri="http://schemas.openxmlformats.org/drawingml/2006/table">
+            <a:tbl>
+              <a:tblPr firstRow="1" bandRow="1">
+                <a:tableStyleId>{5C22544A-7EE6-4342-B048-85BDC9FD1C3A}</a:tableStyleId>
+              </a:tblPr>
+              <a:tblGrid>
+                <a:gridCol w="1005840"/>
+                <a:gridCol w="1097280"/>
+                <a:gridCol w="822960"/>
+              </a:tblGrid>
+              <a:tr h="320040">
+                <a:tc>
+                  <a:txBody>
+                    <a:bodyPr/>
+                    <a:lstStyle/>
+                    <a:p>
+                      <a:pPr>
+                        <a:defRPr sz="1100" b="1">
+                          <a:solidFill>
+                            <a:srgbClr val="0F172A"/>
+                          </a:solidFill>
+                        </a:defRPr>
+                      </a:pPr>
+                      <a:r>
+                        <a:t>点位</a:t>
+                      </a:r>
+                    </a:p>
+                  </a:txBody>
+                  <a:tcPr>
+                    <a:solidFill>
+                      <a:srgbClr val="F8FAFC"/>
+                    </a:solidFill>
+                  </a:tcPr>
+                </a:tc>
+                <a:tc>
+                  <a:txBody>
+                    <a:bodyPr/>
+                    <a:lstStyle/>
+                    <a:p>
+                      <a:pPr>
+                        <a:defRPr sz="1100" b="1">
+                          <a:solidFill>
+                            <a:srgbClr val="0F172A"/>
+                          </a:solidFill>
+                        </a:defRPr>
+                      </a:pPr>
+                      <a:r>
+                        <a:t>条件</a:t>
+                      </a:r>
+                    </a:p>
+                  </a:txBody>
+                  <a:tcPr>
+                    <a:solidFill>
+                      <a:srgbClr val="F8FAFC"/>
+                    </a:solidFill>
+                  </a:tcPr>
+                </a:tc>
+                <a:tc>
+                  <a:txBody>
+                    <a:bodyPr/>
+                    <a:lstStyle/>
+                    <a:p>
+                      <a:pPr>
+                        <a:defRPr sz="1100" b="1">
+                          <a:solidFill>
+                            <a:srgbClr val="0F172A"/>
+                          </a:solidFill>
+                        </a:defRPr>
+                      </a:pPr>
+                      <a:r>
+                        <a:t>级别</a:t>
+                      </a:r>
+                    </a:p>
+                  </a:txBody>
+                  <a:tcPr>
+                    <a:solidFill>
+                      <a:srgbClr val="F8FAFC"/>
+                    </a:solidFill>
+                  </a:tcPr>
+                </a:tc>
+              </a:tr>
+              <a:tr h="320040">
+                <a:tc>
+                  <a:txBody>
+                    <a:bodyPr/>
+                    <a:lstStyle/>
+                    <a:p>
+                      <a:pPr>
+                        <a:defRPr sz="1100">
+                          <a:solidFill>
+                            <a:srgbClr val="334155"/>
+                          </a:solidFill>
+                        </a:defRPr>
+                      </a:pPr>
+                      <a:r>
+                        <a:t>vib_rms</a:t>
+                      </a:r>
+                    </a:p>
+                  </a:txBody>
+                  <a:tcPr/>
+                </a:tc>
+                <a:tc>
+                  <a:txBody>
+                    <a:bodyPr/>
+                    <a:lstStyle/>
+                    <a:p>
+                      <a:pPr>
+                        <a:defRPr sz="1100">
+                          <a:solidFill>
+                            <a:srgbClr val="334155"/>
+                          </a:solidFill>
+                        </a:defRPr>
+                      </a:pPr>
+                      <a:r>
+                        <a:t>&gt; 4.5 mm/s</a:t>
+                      </a:r>
+                    </a:p>
+                  </a:txBody>
+                  <a:tcPr/>
+                </a:tc>
+                <a:tc>
+                  <a:txBody>
+                    <a:bodyPr/>
+                    <a:lstStyle/>
+                    <a:p>
+                      <a:pPr>
+                        <a:defRPr sz="1100">
+                          <a:solidFill>
+                            <a:srgbClr val="334155"/>
+                          </a:solidFill>
+                        </a:defRPr>
+                      </a:pPr>
+                      <a:r>
+                        <a:t>warning</a:t>
+                      </a:r>
+                    </a:p>
+                  </a:txBody>
+                  <a:tcPr/>
+                </a:tc>
+              </a:tr>
+              <a:tr h="320040">
+                <a:tc>
+                  <a:txBody>
+                    <a:bodyPr/>
+                    <a:lstStyle/>
+                    <a:p>
+                      <a:pPr>
+                        <a:defRPr sz="1100">
+                          <a:solidFill>
+                            <a:srgbClr val="334155"/>
+                          </a:solidFill>
+                        </a:defRPr>
+                      </a:pPr>
+                      <a:r>
+                        <a:t>vib_rms</a:t>
+                      </a:r>
+                    </a:p>
+                  </a:txBody>
+                  <a:tcPr/>
+                </a:tc>
+                <a:tc>
+                  <a:txBody>
+                    <a:bodyPr/>
+                    <a:lstStyle/>
+                    <a:p>
+                      <a:pPr>
+                        <a:defRPr sz="1100">
+                          <a:solidFill>
+                            <a:srgbClr val="334155"/>
+                          </a:solidFill>
+                        </a:defRPr>
+                      </a:pPr>
+                      <a:r>
+                        <a:t>&gt; 7.1 mm/s</a:t>
+                      </a:r>
+                    </a:p>
+                  </a:txBody>
+                  <a:tcPr/>
+                </a:tc>
+                <a:tc>
+                  <a:txBody>
+                    <a:bodyPr/>
+                    <a:lstStyle/>
+                    <a:p>
+                      <a:pPr>
+                        <a:defRPr sz="1100">
+                          <a:solidFill>
+                            <a:srgbClr val="334155"/>
+                          </a:solidFill>
+                        </a:defRPr>
+                      </a:pPr>
+                      <a:r>
+                        <a:t>critical</a:t>
+                      </a:r>
+                    </a:p>
+                  </a:txBody>
+                  <a:tcPr/>
+                </a:tc>
+              </a:tr>
+              <a:tr h="320040">
+                <a:tc>
+                  <a:txBody>
+                    <a:bodyPr/>
+                    <a:lstStyle/>
+                    <a:p>
+                      <a:pPr>
+                        <a:defRPr sz="1100">
+                          <a:solidFill>
+                            <a:srgbClr val="334155"/>
+                          </a:solidFill>
+                        </a:defRPr>
+                      </a:pPr>
+                      <a:r>
+                        <a:t>temp_c</a:t>
+                      </a:r>
+                    </a:p>
+                  </a:txBody>
+                  <a:tcPr/>
+                </a:tc>
+                <a:tc>
+                  <a:txBody>
+                    <a:bodyPr/>
+                    <a:lstStyle/>
+                    <a:p>
+                      <a:pPr>
+                        <a:defRPr sz="1100">
+                          <a:solidFill>
+                            <a:srgbClr val="334155"/>
+                          </a:solidFill>
+                        </a:defRPr>
+                      </a:pPr>
+                      <a:r>
+                        <a:t>&gt; 85°C</a:t>
+                      </a:r>
+                    </a:p>
+                  </a:txBody>
+                  <a:tcPr/>
+                </a:tc>
+                <a:tc>
+                  <a:txBody>
+                    <a:bodyPr/>
+                    <a:lstStyle/>
+                    <a:p>
+                      <a:pPr>
+                        <a:defRPr sz="1100">
+                          <a:solidFill>
+                            <a:srgbClr val="334155"/>
+                          </a:solidFill>
+                        </a:defRPr>
+                      </a:pPr>
+                      <a:r>
+                        <a:t>warning</a:t>
+                      </a:r>
+                    </a:p>
+                  </a:txBody>
+                  <a:tcPr/>
+                </a:tc>
+              </a:tr>
+              <a:tr h="320040">
+                <a:tc>
+                  <a:txBody>
+                    <a:bodyPr/>
+                    <a:lstStyle/>
+                    <a:p>
+                      <a:pPr>
+                        <a:defRPr sz="1100">
+                          <a:solidFill>
+                            <a:srgbClr val="334155"/>
+                          </a:solidFill>
+                        </a:defRPr>
+                      </a:pPr>
+                      <a:r>
+                        <a:t>temp_c</a:t>
+                      </a:r>
+                    </a:p>
+                  </a:txBody>
+                  <a:tcPr/>
+                </a:tc>
+                <a:tc>
+                  <a:txBody>
+                    <a:bodyPr/>
+                    <a:lstStyle/>
+                    <a:p>
+                      <a:pPr>
+                        <a:defRPr sz="1100">
+                          <a:solidFill>
+                            <a:srgbClr val="334155"/>
+                          </a:solidFill>
+                        </a:defRPr>
+                      </a:pPr>
+                      <a:r>
+                        <a:t>&gt; 105°C</a:t>
+                      </a:r>
+                    </a:p>
+                  </a:txBody>
+                  <a:tcPr/>
+                </a:tc>
+                <a:tc>
+                  <a:txBody>
+                    <a:bodyPr/>
+                    <a:lstStyle/>
+                    <a:p>
+                      <a:pPr>
+                        <a:defRPr sz="1100">
+                          <a:solidFill>
+                            <a:srgbClr val="334155"/>
+                          </a:solidFill>
+                        </a:defRPr>
+                      </a:pPr>
+                      <a:r>
+                        <a:t>critical</a:t>
+                      </a:r>
+                    </a:p>
+                  </a:txBody>
+                  <a:tcPr/>
+                </a:tc>
+              </a:tr>
+              <a:tr h="320040">
+                <a:tc>
+                  <a:txBody>
+                    <a:bodyPr/>
+                    <a:lstStyle/>
+                    <a:p>
+                      <a:pPr>
+                        <a:defRPr sz="1100">
+                          <a:solidFill>
+                            <a:srgbClr val="334155"/>
+                          </a:solidFill>
+                        </a:defRPr>
+                      </a:pPr>
+                      <a:r>
+                        <a:t>motor_current</a:t>
+                      </a:r>
+                    </a:p>
+                  </a:txBody>
+                  <a:tcPr/>
+                </a:tc>
+                <a:tc>
+                  <a:txBody>
+                    <a:bodyPr/>
+                    <a:lstStyle/>
+                    <a:p>
+                      <a:pPr>
+                        <a:defRPr sz="1100">
+                          <a:solidFill>
+                            <a:srgbClr val="334155"/>
+                          </a:solidFill>
+                        </a:defRPr>
+                      </a:pPr>
+                      <a:r>
+                        <a:t>&gt; 12 A</a:t>
+                      </a:r>
+                    </a:p>
+                  </a:txBody>
+                  <a:tcPr/>
+                </a:tc>
+                <a:tc>
+                  <a:txBody>
+                    <a:bodyPr/>
+                    <a:lstStyle/>
+                    <a:p>
+                      <a:pPr>
+                        <a:defRPr sz="1100">
+                          <a:solidFill>
+                            <a:srgbClr val="334155"/>
+                          </a:solidFill>
+                        </a:defRPr>
+                      </a:pPr>
+                      <a:r>
+                        <a:t>warning</a:t>
+                      </a:r>
+                    </a:p>
+                  </a:txBody>
+                  <a:tcPr/>
+                </a:tc>
+              </a:tr>
+              <a:tr h="320040">
+                <a:tc>
+                  <a:txBody>
+                    <a:bodyPr/>
+                    <a:lstStyle/>
+                    <a:p>
+                      <a:pPr>
+                        <a:defRPr sz="1100">
+                          <a:solidFill>
+                            <a:srgbClr val="334155"/>
+                          </a:solidFill>
+                        </a:defRPr>
+                      </a:pPr>
+                      <a:r>
+                        <a:t>motor_current</a:t>
+                      </a:r>
+                    </a:p>
+                  </a:txBody>
+                  <a:tcPr/>
+                </a:tc>
+                <a:tc>
+                  <a:txBody>
+                    <a:bodyPr/>
+                    <a:lstStyle/>
+                    <a:p>
+                      <a:pPr>
+                        <a:defRPr sz="1100">
+                          <a:solidFill>
+                            <a:srgbClr val="334155"/>
+                          </a:solidFill>
+                        </a:defRPr>
+                      </a:pPr>
+                      <a:r>
+                        <a:t>&gt; 15 A</a:t>
+                      </a:r>
+                    </a:p>
+                  </a:txBody>
+                  <a:tcPr/>
+                </a:tc>
+                <a:tc>
+                  <a:txBody>
+                    <a:bodyPr/>
+                    <a:lstStyle/>
+                    <a:p>
+                      <a:pPr>
+                        <a:defRPr sz="1100">
+                          <a:solidFill>
+                            <a:srgbClr val="334155"/>
+                          </a:solidFill>
+                        </a:defRPr>
+                      </a:pPr>
+                      <a:r>
+                        <a:t>critical</a:t>
+                      </a:r>
+                    </a:p>
+                  </a:txBody>
+                  <a:tcPr/>
+                </a:tc>
+              </a:tr>
+              <a:tr h="320040">
+                <a:tc>
+                  <a:txBody>
+                    <a:bodyPr/>
+                    <a:lstStyle/>
+                    <a:p>
+                      <a:pPr>
+                        <a:defRPr sz="1100">
+                          <a:solidFill>
+                            <a:srgbClr val="334155"/>
+                          </a:solidFill>
+                        </a:defRPr>
+                      </a:pPr>
+                      <a:r>
+                        <a:t>rpm</a:t>
+                      </a:r>
+                    </a:p>
+                  </a:txBody>
+                  <a:tcPr/>
+                </a:tc>
+                <a:tc>
+                  <a:txBody>
+                    <a:bodyPr/>
+                    <a:lstStyle/>
+                    <a:p>
+                      <a:pPr>
+                        <a:defRPr sz="1100">
+                          <a:solidFill>
+                            <a:srgbClr val="334155"/>
+                          </a:solidFill>
+                        </a:defRPr>
+                      </a:pPr>
+                      <a:r>
+                        <a:t>&lt; 1000</a:t>
+                      </a:r>
+                    </a:p>
+                  </a:txBody>
+                  <a:tcPr/>
+                </a:tc>
+                <a:tc>
+                  <a:txBody>
+                    <a:bodyPr/>
+                    <a:lstStyle/>
+                    <a:p>
+                      <a:pPr>
+                        <a:defRPr sz="1100">
+                          <a:solidFill>
+                            <a:srgbClr val="334155"/>
+                          </a:solidFill>
+                        </a:defRPr>
+                      </a:pPr>
+                      <a:r>
+                        <a:t>warning</a:t>
+                      </a:r>
+                    </a:p>
+                  </a:txBody>
+                  <a:tcPr/>
+                </a:tc>
+              </a:tr>
+            </a:tbl>
+          </a:graphicData>
+        </a:graphic>
+      </p:graphicFrame>
+      <p:sp>
+        <p:nvSpPr>
+          <p:cNvPr id="9" name="Rounded Rectangle 8"/>
+          <p:cNvSpPr/>
+          <p:nvPr/>
+        </p:nvSpPr>
+        <p:spPr>
+          <a:xfrm>
+            <a:off x="4297680" y="1280160"/>
+            <a:ext cx="3383280" cy="2743200"/>
           </a:xfrm>
           <a:prstGeom prst="roundRect">
             <a:avLst/>
@@ -3688,50 +5161,304 @@
           </a:fontRef>
         </p:style>
         <p:txBody>
-          <a:bodyPr rtlCol="0" anchor="ctr" wrap="square" lIns="182880" rIns="137160" tIns="137160" bIns="91440"/>
-          <a:lstStyle/>
-          <a:p>
-            <a:pPr algn="ctr">
-              <a:spcAft>
-                <a:spcPts val="600"/>
-              </a:spcAft>
+          <a:bodyPr rtlCol="0" anchor="ctr"/>
+          <a:lstStyle/>
+          <a:p>
+            <a:pPr algn="ctr"/>
+          </a:p>
+        </p:txBody>
+      </p:sp>
+      <p:sp>
+        <p:nvSpPr>
+          <p:cNvPr id="10" name="Rounded Rectangle 9"/>
+          <p:cNvSpPr/>
+          <p:nvPr/>
+        </p:nvSpPr>
+        <p:spPr>
+          <a:xfrm>
+            <a:off x="4297680" y="1280160"/>
+            <a:ext cx="3383280" cy="45720"/>
+          </a:xfrm>
+          <a:prstGeom prst="roundRect">
+            <a:avLst/>
+          </a:prstGeom>
+          <a:solidFill>
+            <a:srgbClr val="1A73E8"/>
+          </a:solidFill>
+          <a:ln>
+            <a:noFill/>
+          </a:ln>
+        </p:spPr>
+        <p:style>
+          <a:lnRef idx="1">
+            <a:schemeClr val="accent1"/>
+          </a:lnRef>
+          <a:fillRef idx="3">
+            <a:schemeClr val="accent1"/>
+          </a:fillRef>
+          <a:effectRef idx="2">
+            <a:schemeClr val="accent1"/>
+          </a:effectRef>
+          <a:fontRef idx="minor">
+            <a:schemeClr val="lt1"/>
+          </a:fontRef>
+        </p:style>
+        <p:txBody>
+          <a:bodyPr rtlCol="0" anchor="ctr"/>
+          <a:lstStyle/>
+          <a:p>
+            <a:pPr algn="ctr"/>
+          </a:p>
+        </p:txBody>
+      </p:sp>
+      <p:sp>
+        <p:nvSpPr>
+          <p:cNvPr id="11" name="TextBox 10"/>
+          <p:cNvSpPr txBox="1"/>
+          <p:nvPr/>
+        </p:nvSpPr>
+        <p:spPr>
+          <a:xfrm>
+            <a:off x="4480560" y="1371600"/>
+            <a:ext cx="3017520" cy="274320"/>
+          </a:xfrm>
+          <a:prstGeom prst="rect">
+            <a:avLst/>
+          </a:prstGeom>
+          <a:noFill/>
+        </p:spPr>
+        <p:txBody>
+          <a:bodyPr wrap="square">
+            <a:spAutoFit/>
+          </a:bodyPr>
+          <a:lstStyle/>
+          <a:p>
+            <a:pPr algn="l">
               <a:defRPr sz="1300" b="1">
                 <a:solidFill>
-                  <a:srgbClr val="0F172A"/>
-                </a:solidFill>
-              </a:defRPr>
-            </a:pPr>
-            <a:r>
-              <a:t>认证授权 (auth.py)</a:t>
-            </a:r>
-          </a:p>
-          <a:p>
-            <a:pPr>
-              <a:spcAft>
-                <a:spcPts val="200"/>
-              </a:spcAft>
-              <a:defRPr sz="1000">
-                <a:solidFill>
-                  <a:srgbClr val="64748B"/>
-                </a:solidFill>
-              </a:defRPr>
-            </a:pPr>
-            <a:r>
-              <a:t>JWT HS256 认证 + 角色管理 (admin/operator) + 设备级 ACL 权限控制，默认 admin/admin123</a:t>
-            </a:r>
-          </a:p>
-        </p:txBody>
-      </p:sp>
-      <p:sp>
-        <p:nvSpPr>
-          <p:cNvPr id="6" name="Rounded Rectangle 5"/>
+                  <a:srgbClr val="1E40AF"/>
+                </a:solidFill>
+              </a:defRPr>
+            </a:pPr>
+            <a:r>
+              <a:t>趋势规则 (2 条)</a:t>
+            </a:r>
+          </a:p>
+        </p:txBody>
+      </p:sp>
+      <p:sp>
+        <p:nvSpPr>
+          <p:cNvPr id="12" name="TextBox 11"/>
+          <p:cNvSpPr txBox="1"/>
+          <p:nvPr/>
+        </p:nvSpPr>
+        <p:spPr>
+          <a:xfrm>
+            <a:off x="4480560" y="1627632"/>
+            <a:ext cx="3017520" cy="182880"/>
+          </a:xfrm>
+          <a:prstGeom prst="rect">
+            <a:avLst/>
+          </a:prstGeom>
+          <a:noFill/>
+        </p:spPr>
+        <p:txBody>
+          <a:bodyPr wrap="square">
+            <a:spAutoFit/>
+          </a:bodyPr>
+          <a:lstStyle/>
+          <a:p>
+            <a:pPr algn="l">
+              <a:defRPr sz="900" b="0">
+                <a:solidFill>
+                  <a:srgbClr val="64748B"/>
+                </a:solidFill>
+              </a:defRPr>
+            </a:pPr>
+            <a:r>
+              <a:t>5 窗口滑动判定 · 每个 asset 独立缓冲</a:t>
+            </a:r>
+          </a:p>
+        </p:txBody>
+      </p:sp>
+      <p:sp>
+        <p:nvSpPr>
+          <p:cNvPr id="13" name="Rounded Rectangle 12"/>
           <p:cNvSpPr/>
           <p:nvPr/>
         </p:nvSpPr>
         <p:spPr>
           <a:xfrm>
-            <a:off x="731520" y="2468880"/>
-            <a:ext cx="5303520" cy="1005840"/>
+            <a:off x="4480560" y="1965960"/>
+            <a:ext cx="3017520" cy="777240"/>
+          </a:xfrm>
+          <a:prstGeom prst="roundRect">
+            <a:avLst/>
+          </a:prstGeom>
+          <a:solidFill>
+            <a:srgbClr val="F8FAFC"/>
+          </a:solidFill>
+          <a:ln w="12700">
+            <a:solidFill>
+              <a:srgbClr val="E2E8F0"/>
+            </a:solidFill>
+          </a:ln>
+        </p:spPr>
+        <p:style>
+          <a:lnRef idx="1">
+            <a:schemeClr val="accent1"/>
+          </a:lnRef>
+          <a:fillRef idx="3">
+            <a:schemeClr val="accent1"/>
+          </a:fillRef>
+          <a:effectRef idx="2">
+            <a:schemeClr val="accent1"/>
+          </a:effectRef>
+          <a:fontRef idx="minor">
+            <a:schemeClr val="lt1"/>
+          </a:fontRef>
+        </p:style>
+        <p:txBody>
+          <a:bodyPr rtlCol="0" anchor="ctr"/>
+          <a:lstStyle/>
+          <a:p>
+            <a:pPr algn="ctr"/>
+          </a:p>
+        </p:txBody>
+      </p:sp>
+      <p:sp>
+        <p:nvSpPr>
+          <p:cNvPr id="14" name="TextBox 13"/>
+          <p:cNvSpPr txBox="1"/>
+          <p:nvPr/>
+        </p:nvSpPr>
+        <p:spPr>
+          <a:xfrm>
+            <a:off x="4663440" y="2011680"/>
+            <a:ext cx="2651760" cy="685800"/>
+          </a:xfrm>
+          <a:prstGeom prst="rect">
+            <a:avLst/>
+          </a:prstGeom>
+          <a:noFill/>
+        </p:spPr>
+        <p:txBody>
+          <a:bodyPr wrap="square">
+            <a:spAutoFit/>
+          </a:bodyPr>
+          <a:lstStyle/>
+          <a:p>
+            <a:pPr algn="l">
+              <a:defRPr sz="1100" b="0">
+                <a:solidFill>
+                  <a:srgbClr val="334155"/>
+                </a:solidFill>
+              </a:defRPr>
+            </a:pPr>
+            <a:r>
+              <a:t>振动持续上升</a:t>
+            </a:r>
+            <a:br/>
+            <a:r>
+              <a:t>5 窗口内 vib_rms 上升 &gt;10%</a:t>
+            </a:r>
+          </a:p>
+        </p:txBody>
+      </p:sp>
+      <p:sp>
+        <p:nvSpPr>
+          <p:cNvPr id="15" name="Rounded Rectangle 14"/>
+          <p:cNvSpPr/>
+          <p:nvPr/>
+        </p:nvSpPr>
+        <p:spPr>
+          <a:xfrm>
+            <a:off x="4480560" y="2880360"/>
+            <a:ext cx="3017520" cy="777240"/>
+          </a:xfrm>
+          <a:prstGeom prst="roundRect">
+            <a:avLst/>
+          </a:prstGeom>
+          <a:solidFill>
+            <a:srgbClr val="F8FAFC"/>
+          </a:solidFill>
+          <a:ln w="12700">
+            <a:solidFill>
+              <a:srgbClr val="E2E8F0"/>
+            </a:solidFill>
+          </a:ln>
+        </p:spPr>
+        <p:style>
+          <a:lnRef idx="1">
+            <a:schemeClr val="accent1"/>
+          </a:lnRef>
+          <a:fillRef idx="3">
+            <a:schemeClr val="accent1"/>
+          </a:fillRef>
+          <a:effectRef idx="2">
+            <a:schemeClr val="accent1"/>
+          </a:effectRef>
+          <a:fontRef idx="minor">
+            <a:schemeClr val="lt1"/>
+          </a:fontRef>
+        </p:style>
+        <p:txBody>
+          <a:bodyPr rtlCol="0" anchor="ctr"/>
+          <a:lstStyle/>
+          <a:p>
+            <a:pPr algn="ctr"/>
+          </a:p>
+        </p:txBody>
+      </p:sp>
+      <p:sp>
+        <p:nvSpPr>
+          <p:cNvPr id="16" name="TextBox 15"/>
+          <p:cNvSpPr txBox="1"/>
+          <p:nvPr/>
+        </p:nvSpPr>
+        <p:spPr>
+          <a:xfrm>
+            <a:off x="4663440" y="2926080"/>
+            <a:ext cx="2651760" cy="685800"/>
+          </a:xfrm>
+          <a:prstGeom prst="rect">
+            <a:avLst/>
+          </a:prstGeom>
+          <a:noFill/>
+        </p:spPr>
+        <p:txBody>
+          <a:bodyPr wrap="square">
+            <a:spAutoFit/>
+          </a:bodyPr>
+          <a:lstStyle/>
+          <a:p>
+            <a:pPr algn="l">
+              <a:defRPr sz="1100" b="0">
+                <a:solidFill>
+                  <a:srgbClr val="334155"/>
+                </a:solidFill>
+              </a:defRPr>
+            </a:pPr>
+            <a:r>
+              <a:t>温度持续上升</a:t>
+            </a:r>
+            <a:br/>
+            <a:r>
+              <a:t>5 窗口内 temp_c 上升 &gt;5%</a:t>
+            </a:r>
+          </a:p>
+        </p:txBody>
+      </p:sp>
+      <p:sp>
+        <p:nvSpPr>
+          <p:cNvPr id="17" name="Rounded Rectangle 16"/>
+          <p:cNvSpPr/>
+          <p:nvPr/>
+        </p:nvSpPr>
+        <p:spPr>
+          <a:xfrm>
+            <a:off x="7863840" y="1280160"/>
+            <a:ext cx="3566160" cy="2743200"/>
           </a:xfrm>
           <a:prstGeom prst="roundRect">
             <a:avLst/>
@@ -3760,6 +5487,729 @@
           </a:fontRef>
         </p:style>
         <p:txBody>
+          <a:bodyPr rtlCol="0" anchor="ctr"/>
+          <a:lstStyle/>
+          <a:p>
+            <a:pPr algn="ctr"/>
+          </a:p>
+        </p:txBody>
+      </p:sp>
+      <p:sp>
+        <p:nvSpPr>
+          <p:cNvPr id="18" name="Rounded Rectangle 17"/>
+          <p:cNvSpPr/>
+          <p:nvPr/>
+        </p:nvSpPr>
+        <p:spPr>
+          <a:xfrm>
+            <a:off x="7863840" y="1280160"/>
+            <a:ext cx="3566160" cy="45720"/>
+          </a:xfrm>
+          <a:prstGeom prst="roundRect">
+            <a:avLst/>
+          </a:prstGeom>
+          <a:solidFill>
+            <a:srgbClr val="EF4444"/>
+          </a:solidFill>
+          <a:ln>
+            <a:noFill/>
+          </a:ln>
+        </p:spPr>
+        <p:style>
+          <a:lnRef idx="1">
+            <a:schemeClr val="accent1"/>
+          </a:lnRef>
+          <a:fillRef idx="3">
+            <a:schemeClr val="accent1"/>
+          </a:fillRef>
+          <a:effectRef idx="2">
+            <a:schemeClr val="accent1"/>
+          </a:effectRef>
+          <a:fontRef idx="minor">
+            <a:schemeClr val="lt1"/>
+          </a:fontRef>
+        </p:style>
+        <p:txBody>
+          <a:bodyPr rtlCol="0" anchor="ctr"/>
+          <a:lstStyle/>
+          <a:p>
+            <a:pPr algn="ctr"/>
+          </a:p>
+        </p:txBody>
+      </p:sp>
+      <p:sp>
+        <p:nvSpPr>
+          <p:cNvPr id="19" name="TextBox 18"/>
+          <p:cNvSpPr txBox="1"/>
+          <p:nvPr/>
+        </p:nvSpPr>
+        <p:spPr>
+          <a:xfrm>
+            <a:off x="8046720" y="1371600"/>
+            <a:ext cx="3200400" cy="274320"/>
+          </a:xfrm>
+          <a:prstGeom prst="rect">
+            <a:avLst/>
+          </a:prstGeom>
+          <a:noFill/>
+        </p:spPr>
+        <p:txBody>
+          <a:bodyPr wrap="square">
+            <a:spAutoFit/>
+          </a:bodyPr>
+          <a:lstStyle/>
+          <a:p>
+            <a:pPr algn="l">
+              <a:defRPr sz="1300" b="1">
+                <a:solidFill>
+                  <a:srgbClr val="991B1B"/>
+                </a:solidFill>
+              </a:defRPr>
+            </a:pPr>
+            <a:r>
+              <a:t>组合规则 (2 条)</a:t>
+            </a:r>
+          </a:p>
+        </p:txBody>
+      </p:sp>
+      <p:sp>
+        <p:nvSpPr>
+          <p:cNvPr id="20" name="TextBox 19"/>
+          <p:cNvSpPr txBox="1"/>
+          <p:nvPr/>
+        </p:nvSpPr>
+        <p:spPr>
+          <a:xfrm>
+            <a:off x="8046720" y="1627632"/>
+            <a:ext cx="3200400" cy="182880"/>
+          </a:xfrm>
+          <a:prstGeom prst="rect">
+            <a:avLst/>
+          </a:prstGeom>
+          <a:noFill/>
+        </p:spPr>
+        <p:txBody>
+          <a:bodyPr wrap="square">
+            <a:spAutoFit/>
+          </a:bodyPr>
+          <a:lstStyle/>
+          <a:p>
+            <a:pPr algn="l">
+              <a:defRPr sz="900" b="0">
+                <a:solidFill>
+                  <a:srgbClr val="64748B"/>
+                </a:solidFill>
+              </a:defRPr>
+            </a:pPr>
+            <a:r>
+              <a:t>AND 逻辑 · 多条件同时满足</a:t>
+            </a:r>
+          </a:p>
+        </p:txBody>
+      </p:sp>
+      <p:sp>
+        <p:nvSpPr>
+          <p:cNvPr id="21" name="Rounded Rectangle 20"/>
+          <p:cNvSpPr/>
+          <p:nvPr/>
+        </p:nvSpPr>
+        <p:spPr>
+          <a:xfrm>
+            <a:off x="8046720" y="1965960"/>
+            <a:ext cx="3200400" cy="777240"/>
+          </a:xfrm>
+          <a:prstGeom prst="roundRect">
+            <a:avLst/>
+          </a:prstGeom>
+          <a:solidFill>
+            <a:srgbClr val="FEE2E2"/>
+          </a:solidFill>
+          <a:ln w="12700">
+            <a:solidFill>
+              <a:srgbClr val="E2E8F0"/>
+            </a:solidFill>
+          </a:ln>
+        </p:spPr>
+        <p:style>
+          <a:lnRef idx="1">
+            <a:schemeClr val="accent1"/>
+          </a:lnRef>
+          <a:fillRef idx="3">
+            <a:schemeClr val="accent1"/>
+          </a:fillRef>
+          <a:effectRef idx="2">
+            <a:schemeClr val="accent1"/>
+          </a:effectRef>
+          <a:fontRef idx="minor">
+            <a:schemeClr val="lt1"/>
+          </a:fontRef>
+        </p:style>
+        <p:txBody>
+          <a:bodyPr rtlCol="0" anchor="ctr"/>
+          <a:lstStyle/>
+          <a:p>
+            <a:pPr algn="ctr"/>
+          </a:p>
+        </p:txBody>
+      </p:sp>
+      <p:sp>
+        <p:nvSpPr>
+          <p:cNvPr id="22" name="TextBox 21"/>
+          <p:cNvSpPr txBox="1"/>
+          <p:nvPr/>
+        </p:nvSpPr>
+        <p:spPr>
+          <a:xfrm>
+            <a:off x="8229600" y="2011680"/>
+            <a:ext cx="2834640" cy="685800"/>
+          </a:xfrm>
+          <a:prstGeom prst="rect">
+            <a:avLst/>
+          </a:prstGeom>
+          <a:noFill/>
+        </p:spPr>
+        <p:txBody>
+          <a:bodyPr wrap="square">
+            <a:spAutoFit/>
+          </a:bodyPr>
+          <a:lstStyle/>
+          <a:p>
+            <a:pPr algn="l">
+              <a:defRPr sz="1100" b="0">
+                <a:solidFill>
+                  <a:srgbClr val="334155"/>
+                </a:solidFill>
+              </a:defRPr>
+            </a:pPr>
+            <a:r>
+              <a:t>高温+高振动 → critical</a:t>
+            </a:r>
+            <a:br/>
+            <a:r>
+              <a:t>temp_c&gt;75 AND vib_rms&gt;3.5</a:t>
+            </a:r>
+          </a:p>
+        </p:txBody>
+      </p:sp>
+      <p:sp>
+        <p:nvSpPr>
+          <p:cNvPr id="23" name="Rounded Rectangle 22"/>
+          <p:cNvSpPr/>
+          <p:nvPr/>
+        </p:nvSpPr>
+        <p:spPr>
+          <a:xfrm>
+            <a:off x="8046720" y="2880360"/>
+            <a:ext cx="3200400" cy="777240"/>
+          </a:xfrm>
+          <a:prstGeom prst="roundRect">
+            <a:avLst/>
+          </a:prstGeom>
+          <a:solidFill>
+            <a:srgbClr val="FEE2E2"/>
+          </a:solidFill>
+          <a:ln w="12700">
+            <a:solidFill>
+              <a:srgbClr val="E2E8F0"/>
+            </a:solidFill>
+          </a:ln>
+        </p:spPr>
+        <p:style>
+          <a:lnRef idx="1">
+            <a:schemeClr val="accent1"/>
+          </a:lnRef>
+          <a:fillRef idx="3">
+            <a:schemeClr val="accent1"/>
+          </a:fillRef>
+          <a:effectRef idx="2">
+            <a:schemeClr val="accent1"/>
+          </a:effectRef>
+          <a:fontRef idx="minor">
+            <a:schemeClr val="lt1"/>
+          </a:fontRef>
+        </p:style>
+        <p:txBody>
+          <a:bodyPr rtlCol="0" anchor="ctr"/>
+          <a:lstStyle/>
+          <a:p>
+            <a:pPr algn="ctr"/>
+          </a:p>
+        </p:txBody>
+      </p:sp>
+      <p:sp>
+        <p:nvSpPr>
+          <p:cNvPr id="24" name="TextBox 23"/>
+          <p:cNvSpPr txBox="1"/>
+          <p:nvPr/>
+        </p:nvSpPr>
+        <p:spPr>
+          <a:xfrm>
+            <a:off x="8229600" y="2926080"/>
+            <a:ext cx="2834640" cy="685800"/>
+          </a:xfrm>
+          <a:prstGeom prst="rect">
+            <a:avLst/>
+          </a:prstGeom>
+          <a:noFill/>
+        </p:spPr>
+        <p:txBody>
+          <a:bodyPr wrap="square">
+            <a:spAutoFit/>
+          </a:bodyPr>
+          <a:lstStyle/>
+          <a:p>
+            <a:pPr algn="l">
+              <a:defRPr sz="1100" b="0">
+                <a:solidFill>
+                  <a:srgbClr val="334155"/>
+                </a:solidFill>
+              </a:defRPr>
+            </a:pPr>
+            <a:r>
+              <a:t>高温+大电流 → critical</a:t>
+            </a:r>
+            <a:br/>
+            <a:r>
+              <a:t>temp_c&gt;80 AND current&gt;10</a:t>
+            </a:r>
+          </a:p>
+        </p:txBody>
+      </p:sp>
+      <p:sp>
+        <p:nvSpPr>
+          <p:cNvPr id="25" name="Rounded Rectangle 24"/>
+          <p:cNvSpPr/>
+          <p:nvPr/>
+        </p:nvSpPr>
+        <p:spPr>
+          <a:xfrm>
+            <a:off x="731520" y="4389120"/>
+            <a:ext cx="10698480" cy="1463040"/>
+          </a:xfrm>
+          <a:prstGeom prst="roundRect">
+            <a:avLst/>
+          </a:prstGeom>
+          <a:solidFill>
+            <a:srgbClr val="FFFBEB"/>
+          </a:solidFill>
+          <a:ln w="12700">
+            <a:solidFill>
+              <a:srgbClr val="FDE68A"/>
+            </a:solidFill>
+          </a:ln>
+        </p:spPr>
+        <p:style>
+          <a:lnRef idx="1">
+            <a:schemeClr val="accent1"/>
+          </a:lnRef>
+          <a:fillRef idx="3">
+            <a:schemeClr val="accent1"/>
+          </a:fillRef>
+          <a:effectRef idx="2">
+            <a:schemeClr val="accent1"/>
+          </a:effectRef>
+          <a:fontRef idx="minor">
+            <a:schemeClr val="lt1"/>
+          </a:fontRef>
+        </p:style>
+        <p:txBody>
+          <a:bodyPr rtlCol="0" anchor="ctr"/>
+          <a:lstStyle/>
+          <a:p>
+            <a:pPr algn="ctr"/>
+          </a:p>
+        </p:txBody>
+      </p:sp>
+      <p:sp>
+        <p:nvSpPr>
+          <p:cNvPr id="26" name="Rounded Rectangle 25"/>
+          <p:cNvSpPr/>
+          <p:nvPr/>
+        </p:nvSpPr>
+        <p:spPr>
+          <a:xfrm>
+            <a:off x="731520" y="4389120"/>
+            <a:ext cx="54864" cy="1463040"/>
+          </a:xfrm>
+          <a:prstGeom prst="roundRect">
+            <a:avLst/>
+          </a:prstGeom>
+          <a:solidFill>
+            <a:srgbClr val="F59E0B"/>
+          </a:solidFill>
+          <a:ln>
+            <a:noFill/>
+          </a:ln>
+        </p:spPr>
+        <p:style>
+          <a:lnRef idx="1">
+            <a:schemeClr val="accent1"/>
+          </a:lnRef>
+          <a:fillRef idx="3">
+            <a:schemeClr val="accent1"/>
+          </a:fillRef>
+          <a:effectRef idx="2">
+            <a:schemeClr val="accent1"/>
+          </a:effectRef>
+          <a:fontRef idx="minor">
+            <a:schemeClr val="lt1"/>
+          </a:fontRef>
+        </p:style>
+        <p:txBody>
+          <a:bodyPr rtlCol="0" anchor="ctr"/>
+          <a:lstStyle/>
+          <a:p>
+            <a:pPr algn="ctr"/>
+          </a:p>
+        </p:txBody>
+      </p:sp>
+      <p:sp>
+        <p:nvSpPr>
+          <p:cNvPr id="27" name="TextBox 26"/>
+          <p:cNvSpPr txBox="1"/>
+          <p:nvPr/>
+        </p:nvSpPr>
+        <p:spPr>
+          <a:xfrm>
+            <a:off x="914400" y="4434840"/>
+            <a:ext cx="10378440" cy="1371600"/>
+          </a:xfrm>
+          <a:prstGeom prst="rect">
+            <a:avLst/>
+          </a:prstGeom>
+          <a:noFill/>
+        </p:spPr>
+        <p:txBody>
+          <a:bodyPr wrap="square">
+            <a:spAutoFit/>
+          </a:bodyPr>
+          <a:lstStyle/>
+          <a:p>
+            <a:pPr algn="l">
+              <a:defRPr sz="1100" b="0">
+                <a:solidFill>
+                  <a:srgbClr val="92400E"/>
+                </a:solidFill>
+              </a:defRPr>
+            </a:pPr>
+            <a:r>
+              <a:t>设计原则与扩展</a:t>
+            </a:r>
+            <a:br/>
+            <a:r>
+              <a:t>• 每条规则独立评估 → 在线打分后立即运行 → 报警通过 SSE (alarm 事件) 实时推送前端 → 60s 后自动清除</a:t>
+            </a:r>
+            <a:br/>
+            <a:r>
+              <a:t>• 规则基于 ISO 10816 / ISO 13374 / IEEE 841 等工业标准</a:t>
+            </a:r>
+            <a:br/>
+            <a:r>
+              <a:t>• 所有规则通过 AlarmEngine.add_*() 可扩展，不区分模型类型，统一接口</a:t>
+            </a:r>
+          </a:p>
+        </p:txBody>
+      </p:sp>
+      <p:sp>
+        <p:nvSpPr>
+          <p:cNvPr id="28" name="TextBox 27"/>
+          <p:cNvSpPr txBox="1"/>
+          <p:nvPr/>
+        </p:nvSpPr>
+        <p:spPr>
+          <a:xfrm>
+            <a:off x="10515600" y="6492240"/>
+            <a:ext cx="1371600" cy="274320"/>
+          </a:xfrm>
+          <a:prstGeom prst="rect">
+            <a:avLst/>
+          </a:prstGeom>
+          <a:noFill/>
+        </p:spPr>
+        <p:txBody>
+          <a:bodyPr wrap="square">
+            <a:spAutoFit/>
+          </a:bodyPr>
+          <a:lstStyle/>
+          <a:p>
+            <a:pPr algn="r">
+              <a:defRPr sz="1000" b="0">
+                <a:solidFill>
+                  <a:srgbClr val="64748B"/>
+                </a:solidFill>
+              </a:defRPr>
+            </a:pPr>
+            <a:r>
+              <a:t>11 / 19</a:t>
+            </a:r>
+          </a:p>
+        </p:txBody>
+      </p:sp>
+    </p:spTree>
+  </p:cSld>
+  <p:clrMapOvr>
+    <a:masterClrMapping/>
+  </p:clrMapOvr>
+</p:sld>
+</file>
+
+<file path=ppt/slides/slide12.xml><?xml version="1.0" encoding="utf-8"?>
+<p:sld xmlns:a="http://schemas.openxmlformats.org/drawingml/2006/main" xmlns:p="http://schemas.openxmlformats.org/presentationml/2006/main" xmlns:r="http://schemas.openxmlformats.org/officeDocument/2006/relationships">
+  <p:cSld>
+    <p:bg>
+      <p:bgPr>
+        <a:solidFill>
+          <a:srgbClr val="0F172A"/>
+        </a:solidFill>
+        <a:effectLst/>
+      </p:bgPr>
+    </p:bg>
+    <p:spTree>
+      <p:nvGrpSpPr>
+        <p:cNvPr id="1" name=""/>
+        <p:cNvGrpSpPr/>
+        <p:nvPr/>
+      </p:nvGrpSpPr>
+      <p:grpSpPr/>
+      <p:sp>
+        <p:nvSpPr>
+          <p:cNvPr id="2" name="TextBox 1"/>
+          <p:cNvSpPr txBox="1"/>
+          <p:nvPr/>
+        </p:nvSpPr>
+        <p:spPr>
+          <a:xfrm>
+            <a:off x="914400" y="2377440"/>
+            <a:ext cx="10332720" cy="1097280"/>
+          </a:xfrm>
+          <a:prstGeom prst="rect">
+            <a:avLst/>
+          </a:prstGeom>
+          <a:noFill/>
+        </p:spPr>
+        <p:txBody>
+          <a:bodyPr wrap="square">
+            <a:spAutoFit/>
+          </a:bodyPr>
+          <a:lstStyle/>
+          <a:p>
+            <a:pPr algn="ctr">
+              <a:defRPr sz="4200" b="1">
+                <a:solidFill>
+                  <a:srgbClr val="FFFFFF"/>
+                </a:solidFill>
+              </a:defRPr>
+            </a:pPr>
+            <a:r>
+              <a:t>后端与前端的协作</a:t>
+            </a:r>
+          </a:p>
+        </p:txBody>
+      </p:sp>
+      <p:sp>
+        <p:nvSpPr>
+          <p:cNvPr id="3" name="TextBox 2"/>
+          <p:cNvSpPr txBox="1"/>
+          <p:nvPr/>
+        </p:nvSpPr>
+        <p:spPr>
+          <a:xfrm>
+            <a:off x="914400" y="3566160"/>
+            <a:ext cx="10332720" cy="731520"/>
+          </a:xfrm>
+          <a:prstGeom prst="rect">
+            <a:avLst/>
+          </a:prstGeom>
+          <a:noFill/>
+        </p:spPr>
+        <p:txBody>
+          <a:bodyPr wrap="square">
+            <a:spAutoFit/>
+          </a:bodyPr>
+          <a:lstStyle/>
+          <a:p>
+            <a:pPr algn="ctr">
+              <a:defRPr sz="1800" b="0">
+                <a:solidFill>
+                  <a:srgbClr val="64748B"/>
+                </a:solidFill>
+              </a:defRPr>
+            </a:pPr>
+            <a:r>
+              <a:t>Flask + SSE + Vue 3 + ECharts 实时看板</a:t>
+            </a:r>
+          </a:p>
+        </p:txBody>
+      </p:sp>
+      <p:sp>
+        <p:nvSpPr>
+          <p:cNvPr id="4" name="TextBox 3"/>
+          <p:cNvSpPr txBox="1"/>
+          <p:nvPr/>
+        </p:nvSpPr>
+        <p:spPr>
+          <a:xfrm>
+            <a:off x="10515600" y="6492240"/>
+            <a:ext cx="1371600" cy="274320"/>
+          </a:xfrm>
+          <a:prstGeom prst="rect">
+            <a:avLst/>
+          </a:prstGeom>
+          <a:noFill/>
+        </p:spPr>
+        <p:txBody>
+          <a:bodyPr wrap="square">
+            <a:spAutoFit/>
+          </a:bodyPr>
+          <a:lstStyle/>
+          <a:p>
+            <a:pPr algn="r">
+              <a:defRPr sz="1000" b="0">
+                <a:solidFill>
+                  <a:srgbClr val="64748B"/>
+                </a:solidFill>
+              </a:defRPr>
+            </a:pPr>
+            <a:r>
+              <a:t>12 / 19</a:t>
+            </a:r>
+          </a:p>
+        </p:txBody>
+      </p:sp>
+    </p:spTree>
+  </p:cSld>
+  <p:clrMapOvr>
+    <a:masterClrMapping/>
+  </p:clrMapOvr>
+</p:sld>
+</file>
+
+<file path=ppt/slides/slide13.xml><?xml version="1.0" encoding="utf-8"?>
+<p:sld xmlns:a="http://schemas.openxmlformats.org/drawingml/2006/main" xmlns:p="http://schemas.openxmlformats.org/presentationml/2006/main" xmlns:r="http://schemas.openxmlformats.org/officeDocument/2006/relationships">
+  <p:cSld>
+    <p:bg>
+      <p:bgPr>
+        <a:solidFill>
+          <a:srgbClr val="F8FAFC"/>
+        </a:solidFill>
+        <a:effectLst/>
+      </p:bgPr>
+    </p:bg>
+    <p:spTree>
+      <p:nvGrpSpPr>
+        <p:cNvPr id="1" name=""/>
+        <p:cNvGrpSpPr/>
+        <p:nvPr/>
+      </p:nvGrpSpPr>
+      <p:grpSpPr/>
+      <p:sp>
+        <p:nvSpPr>
+          <p:cNvPr id="2" name="TextBox 1"/>
+          <p:cNvSpPr txBox="1"/>
+          <p:nvPr/>
+        </p:nvSpPr>
+        <p:spPr>
+          <a:xfrm>
+            <a:off x="731520" y="365760"/>
+            <a:ext cx="10058400" cy="548640"/>
+          </a:xfrm>
+          <a:prstGeom prst="rect">
+            <a:avLst/>
+          </a:prstGeom>
+          <a:noFill/>
+        </p:spPr>
+        <p:txBody>
+          <a:bodyPr wrap="square">
+            <a:spAutoFit/>
+          </a:bodyPr>
+          <a:lstStyle/>
+          <a:p>
+            <a:pPr algn="l">
+              <a:defRPr sz="2800" b="1">
+                <a:solidFill>
+                  <a:srgbClr val="0F172A"/>
+                </a:solidFill>
+              </a:defRPr>
+            </a:pPr>
+            <a:r>
+              <a:t>后端模块 + 前端看板</a:t>
+            </a:r>
+          </a:p>
+        </p:txBody>
+      </p:sp>
+      <p:sp>
+        <p:nvSpPr>
+          <p:cNvPr id="3" name="TextBox 2"/>
+          <p:cNvSpPr txBox="1"/>
+          <p:nvPr/>
+        </p:nvSpPr>
+        <p:spPr>
+          <a:xfrm>
+            <a:off x="731520" y="822960"/>
+            <a:ext cx="10058400" cy="274320"/>
+          </a:xfrm>
+          <a:prstGeom prst="rect">
+            <a:avLst/>
+          </a:prstGeom>
+          <a:noFill/>
+        </p:spPr>
+        <p:txBody>
+          <a:bodyPr wrap="square">
+            <a:spAutoFit/>
+          </a:bodyPr>
+          <a:lstStyle/>
+          <a:p>
+            <a:pPr algn="l">
+              <a:defRPr sz="1200" b="0">
+                <a:solidFill>
+                  <a:srgbClr val="64748B"/>
+                </a:solidFill>
+              </a:defRPr>
+            </a:pPr>
+            <a:r>
+              <a:t>7 个后端模块 · 4 个前端页面 · 实时事件驱动</a:t>
+            </a:r>
+          </a:p>
+        </p:txBody>
+      </p:sp>
+      <p:sp>
+        <p:nvSpPr>
+          <p:cNvPr id="4" name="Rounded Rectangle 3"/>
+          <p:cNvSpPr/>
+          <p:nvPr/>
+        </p:nvSpPr>
+        <p:spPr>
+          <a:xfrm>
+            <a:off x="731520" y="1280160"/>
+            <a:ext cx="5303520" cy="1005840"/>
+          </a:xfrm>
+          <a:prstGeom prst="roundRect">
+            <a:avLst/>
+          </a:prstGeom>
+          <a:solidFill>
+            <a:srgbClr val="FFFFFF"/>
+          </a:solidFill>
+          <a:ln w="12700">
+            <a:solidFill>
+              <a:srgbClr val="E2E8F0"/>
+            </a:solidFill>
+          </a:ln>
+        </p:spPr>
+        <p:style>
+          <a:lnRef idx="1">
+            <a:schemeClr val="accent1"/>
+          </a:lnRef>
+          <a:fillRef idx="3">
+            <a:schemeClr val="accent1"/>
+          </a:fillRef>
+          <a:effectRef idx="2">
+            <a:schemeClr val="accent1"/>
+          </a:effectRef>
+          <a:fontRef idx="minor">
+            <a:schemeClr val="lt1"/>
+          </a:fontRef>
+        </p:style>
+        <p:txBody>
           <a:bodyPr rtlCol="0" anchor="ctr" wrap="square" lIns="182880" rIns="137160" tIns="137160" bIns="91440"/>
           <a:lstStyle/>
           <a:p>
@@ -3774,7 +6224,7 @@
               </a:defRPr>
             </a:pPr>
             <a:r>
-              <a:t>SSE 事件中心 (sse.py)</a:t>
+              <a:t>Flask 主应用 (app.py)</a:t>
             </a:r>
           </a:p>
           <a:p>
@@ -3789,7 +6239,151 @@
               </a:defRPr>
             </a:pPr>
             <a:r>
-              <a:t>发布-订阅模式，多客户端并发，自动丢弃慢消费者过期消息，3 类事件: telemetry/prediction/flow</a:t>
+              <a:t>启动时自动初始化 MQTT 订阅器、状态管理、SSE 中心、打分器；并拉起 3 台仿真设备后台进程</a:t>
+            </a:r>
+          </a:p>
+        </p:txBody>
+      </p:sp>
+      <p:sp>
+        <p:nvSpPr>
+          <p:cNvPr id="5" name="Rounded Rectangle 4"/>
+          <p:cNvSpPr/>
+          <p:nvPr/>
+        </p:nvSpPr>
+        <p:spPr>
+          <a:xfrm>
+            <a:off x="6400800" y="1280160"/>
+            <a:ext cx="5303520" cy="1005840"/>
+          </a:xfrm>
+          <a:prstGeom prst="roundRect">
+            <a:avLst/>
+          </a:prstGeom>
+          <a:solidFill>
+            <a:srgbClr val="FFFFFF"/>
+          </a:solidFill>
+          <a:ln w="12700">
+            <a:solidFill>
+              <a:srgbClr val="E2E8F0"/>
+            </a:solidFill>
+          </a:ln>
+        </p:spPr>
+        <p:style>
+          <a:lnRef idx="1">
+            <a:schemeClr val="accent1"/>
+          </a:lnRef>
+          <a:fillRef idx="3">
+            <a:schemeClr val="accent1"/>
+          </a:fillRef>
+          <a:effectRef idx="2">
+            <a:schemeClr val="accent1"/>
+          </a:effectRef>
+          <a:fontRef idx="minor">
+            <a:schemeClr val="lt1"/>
+          </a:fontRef>
+        </p:style>
+        <p:txBody>
+          <a:bodyPr rtlCol="0" anchor="ctr" wrap="square" lIns="182880" rIns="137160" tIns="137160" bIns="91440"/>
+          <a:lstStyle/>
+          <a:p>
+            <a:pPr algn="ctr">
+              <a:spcAft>
+                <a:spcPts val="600"/>
+              </a:spcAft>
+              <a:defRPr sz="1300" b="1">
+                <a:solidFill>
+                  <a:srgbClr val="0F172A"/>
+                </a:solidFill>
+              </a:defRPr>
+            </a:pPr>
+            <a:r>
+              <a:t>认证授权 (auth.py)</a:t>
+            </a:r>
+          </a:p>
+          <a:p>
+            <a:pPr>
+              <a:spcAft>
+                <a:spcPts val="200"/>
+              </a:spcAft>
+              <a:defRPr sz="1000">
+                <a:solidFill>
+                  <a:srgbClr val="64748B"/>
+                </a:solidFill>
+              </a:defRPr>
+            </a:pPr>
+            <a:r>
+              <a:t>JWT HS256 认证 + 角色管理 (admin/operator) + 设备级 ACL 权限控制，默认 admin/admin123</a:t>
+            </a:r>
+          </a:p>
+        </p:txBody>
+      </p:sp>
+      <p:sp>
+        <p:nvSpPr>
+          <p:cNvPr id="6" name="Rounded Rectangle 5"/>
+          <p:cNvSpPr/>
+          <p:nvPr/>
+        </p:nvSpPr>
+        <p:spPr>
+          <a:xfrm>
+            <a:off x="731520" y="2468880"/>
+            <a:ext cx="5303520" cy="1005840"/>
+          </a:xfrm>
+          <a:prstGeom prst="roundRect">
+            <a:avLst/>
+          </a:prstGeom>
+          <a:solidFill>
+            <a:srgbClr val="FFFFFF"/>
+          </a:solidFill>
+          <a:ln w="12700">
+            <a:solidFill>
+              <a:srgbClr val="E2E8F0"/>
+            </a:solidFill>
+          </a:ln>
+        </p:spPr>
+        <p:style>
+          <a:lnRef idx="1">
+            <a:schemeClr val="accent1"/>
+          </a:lnRef>
+          <a:fillRef idx="3">
+            <a:schemeClr val="accent1"/>
+          </a:fillRef>
+          <a:effectRef idx="2">
+            <a:schemeClr val="accent1"/>
+          </a:effectRef>
+          <a:fontRef idx="minor">
+            <a:schemeClr val="lt1"/>
+          </a:fontRef>
+        </p:style>
+        <p:txBody>
+          <a:bodyPr rtlCol="0" anchor="ctr" wrap="square" lIns="182880" rIns="137160" tIns="137160" bIns="91440"/>
+          <a:lstStyle/>
+          <a:p>
+            <a:pPr algn="ctr">
+              <a:spcAft>
+                <a:spcPts val="600"/>
+              </a:spcAft>
+              <a:defRPr sz="1300" b="1">
+                <a:solidFill>
+                  <a:srgbClr val="0F172A"/>
+                </a:solidFill>
+              </a:defRPr>
+            </a:pPr>
+            <a:r>
+              <a:t>SSE 事件中心 (sse.py)</a:t>
+            </a:r>
+          </a:p>
+          <a:p>
+            <a:pPr>
+              <a:spcAft>
+                <a:spcPts val="200"/>
+              </a:spcAft>
+              <a:defRPr sz="1000">
+                <a:solidFill>
+                  <a:srgbClr val="64748B"/>
+                </a:solidFill>
+              </a:defRPr>
+            </a:pPr>
+            <a:r>
+              <a:t>发布-订阅模式，多客户端并发，自动丢弃慢消费者过期消息，4 类事件: telemetry/prediction/alarm/flow</a:t>
             </a:r>
           </a:p>
         </p:txBody>
@@ -4302,7 +6896,7 @@
               </a:defRPr>
             </a:pPr>
             <a:r>
-              <a:t>• 状态指示条：MQTT / 模型 / 数据状态</a:t>
+              <a:t>• 状态指示条：MQTT / 模型 / 数据延迟</a:t>
             </a:r>
           </a:p>
           <a:p>
@@ -4332,7 +6926,7 @@
               </a:defRPr>
             </a:pPr>
             <a:r>
-              <a:t>• 健康分数环形图 + 四级概率分布柱状图</a:t>
+              <a:t>• 健康分数环形图 + 四级概率分布</a:t>
             </a:r>
           </a:p>
           <a:p>
@@ -4347,7 +6941,7 @@
               </a:defRPr>
             </a:pPr>
             <a:r>
-              <a:t>• 诊断依据时间线（决策路径可视化）</a:t>
+              <a:t>• 诊断依据时间线 (多模型格式兼容)</a:t>
             </a:r>
           </a:p>
           <a:p>
@@ -4362,7 +6956,7 @@
               </a:defRPr>
             </a:pPr>
             <a:r>
-              <a:t>• 实时遥测表 + 事件日志</a:t>
+              <a:t>• ECharts 趋势图：健康分数+等级变化</a:t>
             </a:r>
           </a:p>
           <a:p>
@@ -4377,7 +6971,7 @@
               </a:defRPr>
             </a:pPr>
             <a:r>
-              <a:t>• 诊断报告：设备概览/异常指标/维护建议</a:t>
+              <a:t>• 报警面板：颜色区分严重度, 自动清除</a:t>
             </a:r>
           </a:p>
           <a:p>
@@ -4392,6 +6986,21 @@
               </a:defRPr>
             </a:pPr>
             <a:r>
+              <a:t>• 实时遥测表 + 事件日志</a:t>
+            </a:r>
+          </a:p>
+          <a:p>
+            <a:pPr>
+              <a:spcAft>
+                <a:spcPts val="200"/>
+              </a:spcAft>
+              <a:defRPr sz="1000">
+                <a:solidFill>
+                  <a:srgbClr val="64748B"/>
+                </a:solidFill>
+              </a:defRPr>
+            </a:pPr>
+            <a:r>
               <a:t>• 「恶化重演」：一键重启完整退化过程</a:t>
             </a:r>
           </a:p>
@@ -4427,1260 +7036,7 @@
               </a:defRPr>
             </a:pPr>
             <a:r>
-              <a:t>11 / 17</a:t>
-            </a:r>
-          </a:p>
-        </p:txBody>
-      </p:sp>
-    </p:spTree>
-  </p:cSld>
-  <p:clrMapOvr>
-    <a:masterClrMapping/>
-  </p:clrMapOvr>
-</p:sld>
-</file>
-
-<file path=ppt/slides/slide12.xml><?xml version="1.0" encoding="utf-8"?>
-<p:sld xmlns:a="http://schemas.openxmlformats.org/drawingml/2006/main" xmlns:p="http://schemas.openxmlformats.org/presentationml/2006/main" xmlns:r="http://schemas.openxmlformats.org/officeDocument/2006/relationships">
-  <p:cSld>
-    <p:bg>
-      <p:bgPr>
-        <a:solidFill>
-          <a:srgbClr val="0F172A"/>
-        </a:solidFill>
-        <a:effectLst/>
-      </p:bgPr>
-    </p:bg>
-    <p:spTree>
-      <p:nvGrpSpPr>
-        <p:cNvPr id="1" name=""/>
-        <p:cNvGrpSpPr/>
-        <p:nvPr/>
-      </p:nvGrpSpPr>
-      <p:grpSpPr/>
-      <p:sp>
-        <p:nvSpPr>
-          <p:cNvPr id="2" name="TextBox 1"/>
-          <p:cNvSpPr txBox="1"/>
-          <p:nvPr/>
-        </p:nvSpPr>
-        <p:spPr>
-          <a:xfrm>
-            <a:off x="914400" y="2377440"/>
-            <a:ext cx="10332720" cy="1097280"/>
-          </a:xfrm>
-          <a:prstGeom prst="rect">
-            <a:avLst/>
-          </a:prstGeom>
-          <a:noFill/>
-        </p:spPr>
-        <p:txBody>
-          <a:bodyPr wrap="square">
-            <a:spAutoFit/>
-          </a:bodyPr>
-          <a:lstStyle/>
-          <a:p>
-            <a:pPr algn="ctr">
-              <a:defRPr sz="4200" b="1">
-                <a:solidFill>
-                  <a:srgbClr val="FFFFFF"/>
-                </a:solidFill>
-              </a:defRPr>
-            </a:pPr>
-            <a:r>
-              <a:t>关键技术决策</a:t>
-            </a:r>
-          </a:p>
-        </p:txBody>
-      </p:sp>
-      <p:sp>
-        <p:nvSpPr>
-          <p:cNvPr id="3" name="TextBox 2"/>
-          <p:cNvSpPr txBox="1"/>
-          <p:nvPr/>
-        </p:nvSpPr>
-        <p:spPr>
-          <a:xfrm>
-            <a:off x="914400" y="3566160"/>
-            <a:ext cx="10332720" cy="731520"/>
-          </a:xfrm>
-          <a:prstGeom prst="rect">
-            <a:avLst/>
-          </a:prstGeom>
-          <a:noFill/>
-        </p:spPr>
-        <p:txBody>
-          <a:bodyPr wrap="square">
-            <a:spAutoFit/>
-          </a:bodyPr>
-          <a:lstStyle/>
-          <a:p>
-            <a:pPr algn="ctr">
-              <a:defRPr sz="1800" b="0">
-                <a:solidFill>
-                  <a:srgbClr val="64748B"/>
-                </a:solidFill>
-              </a:defRPr>
-            </a:pPr>
-            <a:r>
-              <a:t>为什么选择这些技术栈？每个选择背后都有明确的工业场景考量</a:t>
-            </a:r>
-          </a:p>
-        </p:txBody>
-      </p:sp>
-      <p:sp>
-        <p:nvSpPr>
-          <p:cNvPr id="4" name="TextBox 3"/>
-          <p:cNvSpPr txBox="1"/>
-          <p:nvPr/>
-        </p:nvSpPr>
-        <p:spPr>
-          <a:xfrm>
-            <a:off x="10515600" y="6492240"/>
-            <a:ext cx="1371600" cy="274320"/>
-          </a:xfrm>
-          <a:prstGeom prst="rect">
-            <a:avLst/>
-          </a:prstGeom>
-          <a:noFill/>
-        </p:spPr>
-        <p:txBody>
-          <a:bodyPr wrap="square">
-            <a:spAutoFit/>
-          </a:bodyPr>
-          <a:lstStyle/>
-          <a:p>
-            <a:pPr algn="r">
-              <a:defRPr sz="1000" b="0">
-                <a:solidFill>
-                  <a:srgbClr val="64748B"/>
-                </a:solidFill>
-              </a:defRPr>
-            </a:pPr>
-            <a:r>
-              <a:t>12 / 17</a:t>
-            </a:r>
-          </a:p>
-        </p:txBody>
-      </p:sp>
-    </p:spTree>
-  </p:cSld>
-  <p:clrMapOvr>
-    <a:masterClrMapping/>
-  </p:clrMapOvr>
-</p:sld>
-</file>
-
-<file path=ppt/slides/slide13.xml><?xml version="1.0" encoding="utf-8"?>
-<p:sld xmlns:a="http://schemas.openxmlformats.org/drawingml/2006/main" xmlns:p="http://schemas.openxmlformats.org/presentationml/2006/main" xmlns:r="http://schemas.openxmlformats.org/officeDocument/2006/relationships">
-  <p:cSld>
-    <p:bg>
-      <p:bgPr>
-        <a:solidFill>
-          <a:srgbClr val="F8FAFC"/>
-        </a:solidFill>
-        <a:effectLst/>
-      </p:bgPr>
-    </p:bg>
-    <p:spTree>
-      <p:nvGrpSpPr>
-        <p:cNvPr id="1" name=""/>
-        <p:cNvGrpSpPr/>
-        <p:nvPr/>
-      </p:nvGrpSpPr>
-      <p:grpSpPr/>
-      <p:sp>
-        <p:nvSpPr>
-          <p:cNvPr id="2" name="TextBox 1"/>
-          <p:cNvSpPr txBox="1"/>
-          <p:nvPr/>
-        </p:nvSpPr>
-        <p:spPr>
-          <a:xfrm>
-            <a:off x="731520" y="365760"/>
-            <a:ext cx="10058400" cy="548640"/>
-          </a:xfrm>
-          <a:prstGeom prst="rect">
-            <a:avLst/>
-          </a:prstGeom>
-          <a:noFill/>
-        </p:spPr>
-        <p:txBody>
-          <a:bodyPr wrap="square">
-            <a:spAutoFit/>
-          </a:bodyPr>
-          <a:lstStyle/>
-          <a:p>
-            <a:pPr algn="l">
-              <a:defRPr sz="2800" b="1">
-                <a:solidFill>
-                  <a:srgbClr val="0F172A"/>
-                </a:solidFill>
-              </a:defRPr>
-            </a:pPr>
-            <a:r>
-              <a:t>设计决策与理由</a:t>
-            </a:r>
-          </a:p>
-        </p:txBody>
-      </p:sp>
-      <p:sp>
-        <p:nvSpPr>
-          <p:cNvPr id="3" name="TextBox 2"/>
-          <p:cNvSpPr txBox="1"/>
-          <p:nvPr/>
-        </p:nvSpPr>
-        <p:spPr>
-          <a:xfrm>
-            <a:off x="731520" y="822960"/>
-            <a:ext cx="10058400" cy="274320"/>
-          </a:xfrm>
-          <a:prstGeom prst="rect">
-            <a:avLst/>
-          </a:prstGeom>
-          <a:noFill/>
-        </p:spPr>
-        <p:txBody>
-          <a:bodyPr wrap="square">
-            <a:spAutoFit/>
-          </a:bodyPr>
-          <a:lstStyle/>
-          <a:p>
-            <a:pPr algn="l">
-              <a:defRPr sz="1200" b="0">
-                <a:solidFill>
-                  <a:srgbClr val="64748B"/>
-                </a:solidFill>
-              </a:defRPr>
-            </a:pPr>
-            <a:r>
-              <a:t>每个技术选择背后都有明确的工业场景考量</a:t>
-            </a:r>
-          </a:p>
-        </p:txBody>
-      </p:sp>
-      <p:sp>
-        <p:nvSpPr>
-          <p:cNvPr id="4" name="Rounded Rectangle 3"/>
-          <p:cNvSpPr/>
-          <p:nvPr/>
-        </p:nvSpPr>
-        <p:spPr>
-          <a:xfrm>
-            <a:off x="731520" y="1280160"/>
-            <a:ext cx="5303520" cy="1463040"/>
-          </a:xfrm>
-          <a:prstGeom prst="roundRect">
-            <a:avLst/>
-          </a:prstGeom>
-          <a:solidFill>
-            <a:srgbClr val="FFFFFF"/>
-          </a:solidFill>
-          <a:ln w="12700">
-            <a:solidFill>
-              <a:srgbClr val="E2E8F0"/>
-            </a:solidFill>
-          </a:ln>
-        </p:spPr>
-        <p:style>
-          <a:lnRef idx="1">
-            <a:schemeClr val="accent1"/>
-          </a:lnRef>
-          <a:fillRef idx="3">
-            <a:schemeClr val="accent1"/>
-          </a:fillRef>
-          <a:effectRef idx="2">
-            <a:schemeClr val="accent1"/>
-          </a:effectRef>
-          <a:fontRef idx="minor">
-            <a:schemeClr val="lt1"/>
-          </a:fontRef>
-        </p:style>
-        <p:txBody>
-          <a:bodyPr rtlCol="0" anchor="ctr"/>
-          <a:lstStyle/>
-          <a:p>
-            <a:pPr algn="ctr"/>
-          </a:p>
-        </p:txBody>
-      </p:sp>
-      <p:sp>
-        <p:nvSpPr>
-          <p:cNvPr id="5" name="Rounded Rectangle 4"/>
-          <p:cNvSpPr/>
-          <p:nvPr/>
-        </p:nvSpPr>
-        <p:spPr>
-          <a:xfrm>
-            <a:off x="731520" y="1280160"/>
-            <a:ext cx="5303520" cy="45720"/>
-          </a:xfrm>
-          <a:prstGeom prst="roundRect">
-            <a:avLst/>
-          </a:prstGeom>
-          <a:solidFill>
-            <a:srgbClr val="1A73E8"/>
-          </a:solidFill>
-          <a:ln>
-            <a:noFill/>
-          </a:ln>
-        </p:spPr>
-        <p:style>
-          <a:lnRef idx="1">
-            <a:schemeClr val="accent1"/>
-          </a:lnRef>
-          <a:fillRef idx="3">
-            <a:schemeClr val="accent1"/>
-          </a:fillRef>
-          <a:effectRef idx="2">
-            <a:schemeClr val="accent1"/>
-          </a:effectRef>
-          <a:fontRef idx="minor">
-            <a:schemeClr val="lt1"/>
-          </a:fontRef>
-        </p:style>
-        <p:txBody>
-          <a:bodyPr rtlCol="0" anchor="ctr"/>
-          <a:lstStyle/>
-          <a:p>
-            <a:pPr algn="ctr"/>
-          </a:p>
-        </p:txBody>
-      </p:sp>
-      <p:sp>
-        <p:nvSpPr>
-          <p:cNvPr id="6" name="TextBox 5"/>
-          <p:cNvSpPr txBox="1"/>
-          <p:nvPr/>
-        </p:nvSpPr>
-        <p:spPr>
-          <a:xfrm>
-            <a:off x="914400" y="1389888"/>
-            <a:ext cx="4937760" cy="274320"/>
-          </a:xfrm>
-          <a:prstGeom prst="rect">
-            <a:avLst/>
-          </a:prstGeom>
-          <a:noFill/>
-        </p:spPr>
-        <p:txBody>
-          <a:bodyPr wrap="square">
-            <a:spAutoFit/>
-          </a:bodyPr>
-          <a:lstStyle/>
-          <a:p>
-            <a:pPr algn="l">
-              <a:defRPr sz="1300" b="1">
-                <a:solidFill>
-                  <a:srgbClr val="0F172A"/>
-                </a:solidFill>
-              </a:defRPr>
-            </a:pPr>
-            <a:r>
-              <a:t>为什么用决策树而非深度学习？</a:t>
-            </a:r>
-          </a:p>
-        </p:txBody>
-      </p:sp>
-      <p:sp>
-        <p:nvSpPr>
-          <p:cNvPr id="7" name="TextBox 6"/>
-          <p:cNvSpPr txBox="1"/>
-          <p:nvPr/>
-        </p:nvSpPr>
-        <p:spPr>
-          <a:xfrm>
-            <a:off x="914400" y="1783080"/>
-            <a:ext cx="4937760" cy="868680"/>
-          </a:xfrm>
-          <a:prstGeom prst="rect">
-            <a:avLst/>
-          </a:prstGeom>
-          <a:noFill/>
-        </p:spPr>
-        <p:txBody>
-          <a:bodyPr wrap="square">
-            <a:spAutoFit/>
-          </a:bodyPr>
-          <a:lstStyle/>
-          <a:p>
-            <a:pPr algn="l">
-              <a:defRPr sz="1100" b="0">
-                <a:solidFill>
-                  <a:srgbClr val="64748B"/>
-                </a:solidFill>
-              </a:defRPr>
-            </a:pPr>
-            <a:r>
-              <a:t>可解释性强：输出完整决策路径，非黑盒；数据量（千-万级窗口）决策树足够；单个 joblib 文件部署，无需 GPU，推理毫秒级</a:t>
-            </a:r>
-          </a:p>
-        </p:txBody>
-      </p:sp>
-      <p:sp>
-        <p:nvSpPr>
-          <p:cNvPr id="8" name="Rounded Rectangle 7"/>
-          <p:cNvSpPr/>
-          <p:nvPr/>
-        </p:nvSpPr>
-        <p:spPr>
-          <a:xfrm>
-            <a:off x="6400800" y="1280160"/>
-            <a:ext cx="5303520" cy="1463040"/>
-          </a:xfrm>
-          <a:prstGeom prst="roundRect">
-            <a:avLst/>
-          </a:prstGeom>
-          <a:solidFill>
-            <a:srgbClr val="FFFFFF"/>
-          </a:solidFill>
-          <a:ln w="12700">
-            <a:solidFill>
-              <a:srgbClr val="E2E8F0"/>
-            </a:solidFill>
-          </a:ln>
-        </p:spPr>
-        <p:style>
-          <a:lnRef idx="1">
-            <a:schemeClr val="accent1"/>
-          </a:lnRef>
-          <a:fillRef idx="3">
-            <a:schemeClr val="accent1"/>
-          </a:fillRef>
-          <a:effectRef idx="2">
-            <a:schemeClr val="accent1"/>
-          </a:effectRef>
-          <a:fontRef idx="minor">
-            <a:schemeClr val="lt1"/>
-          </a:fontRef>
-        </p:style>
-        <p:txBody>
-          <a:bodyPr rtlCol="0" anchor="ctr"/>
-          <a:lstStyle/>
-          <a:p>
-            <a:pPr algn="ctr"/>
-          </a:p>
-        </p:txBody>
-      </p:sp>
-      <p:sp>
-        <p:nvSpPr>
-          <p:cNvPr id="9" name="Rounded Rectangle 8"/>
-          <p:cNvSpPr/>
-          <p:nvPr/>
-        </p:nvSpPr>
-        <p:spPr>
-          <a:xfrm>
-            <a:off x="6400800" y="1280160"/>
-            <a:ext cx="5303520" cy="45720"/>
-          </a:xfrm>
-          <a:prstGeom prst="roundRect">
-            <a:avLst/>
-          </a:prstGeom>
-          <a:solidFill>
-            <a:srgbClr val="10B981"/>
-          </a:solidFill>
-          <a:ln>
-            <a:noFill/>
-          </a:ln>
-        </p:spPr>
-        <p:style>
-          <a:lnRef idx="1">
-            <a:schemeClr val="accent1"/>
-          </a:lnRef>
-          <a:fillRef idx="3">
-            <a:schemeClr val="accent1"/>
-          </a:fillRef>
-          <a:effectRef idx="2">
-            <a:schemeClr val="accent1"/>
-          </a:effectRef>
-          <a:fontRef idx="minor">
-            <a:schemeClr val="lt1"/>
-          </a:fontRef>
-        </p:style>
-        <p:txBody>
-          <a:bodyPr rtlCol="0" anchor="ctr"/>
-          <a:lstStyle/>
-          <a:p>
-            <a:pPr algn="ctr"/>
-          </a:p>
-        </p:txBody>
-      </p:sp>
-      <p:sp>
-        <p:nvSpPr>
-          <p:cNvPr id="10" name="TextBox 9"/>
-          <p:cNvSpPr txBox="1"/>
-          <p:nvPr/>
-        </p:nvSpPr>
-        <p:spPr>
-          <a:xfrm>
-            <a:off x="6583680" y="1389888"/>
-            <a:ext cx="4937760" cy="274320"/>
-          </a:xfrm>
-          <a:prstGeom prst="rect">
-            <a:avLst/>
-          </a:prstGeom>
-          <a:noFill/>
-        </p:spPr>
-        <p:txBody>
-          <a:bodyPr wrap="square">
-            <a:spAutoFit/>
-          </a:bodyPr>
-          <a:lstStyle/>
-          <a:p>
-            <a:pPr algn="l">
-              <a:defRPr sz="1300" b="1">
-                <a:solidFill>
-                  <a:srgbClr val="0F172A"/>
-                </a:solidFill>
-              </a:defRPr>
-            </a:pPr>
-            <a:r>
-              <a:t>为什么用 MQTT 而非 HTTP？</a:t>
-            </a:r>
-          </a:p>
-        </p:txBody>
-      </p:sp>
-      <p:sp>
-        <p:nvSpPr>
-          <p:cNvPr id="11" name="TextBox 10"/>
-          <p:cNvSpPr txBox="1"/>
-          <p:nvPr/>
-        </p:nvSpPr>
-        <p:spPr>
-          <a:xfrm>
-            <a:off x="6583680" y="1783080"/>
-            <a:ext cx="4937760" cy="868680"/>
-          </a:xfrm>
-          <a:prstGeom prst="rect">
-            <a:avLst/>
-          </a:prstGeom>
-          <a:noFill/>
-        </p:spPr>
-        <p:txBody>
-          <a:bodyPr wrap="square">
-            <a:spAutoFit/>
-          </a:bodyPr>
-          <a:lstStyle/>
-          <a:p>
-            <a:pPr algn="l">
-              <a:defRPr sz="1100" b="0">
-                <a:solidFill>
-                  <a:srgbClr val="64748B"/>
-                </a:solidFill>
-              </a:defRPr>
-            </a:pPr>
-            <a:r>
-              <a:t>IIoT 事实标准：发布/订阅解耦设备与消费者；QoS 消息保证；二进制协议带宽低；与 EMQX/HiveMQ/AWS IoT 生态兼容</a:t>
-            </a:r>
-          </a:p>
-        </p:txBody>
-      </p:sp>
-      <p:sp>
-        <p:nvSpPr>
-          <p:cNvPr id="12" name="Rounded Rectangle 11"/>
-          <p:cNvSpPr/>
-          <p:nvPr/>
-        </p:nvSpPr>
-        <p:spPr>
-          <a:xfrm>
-            <a:off x="731520" y="2926080"/>
-            <a:ext cx="5303520" cy="1463040"/>
-          </a:xfrm>
-          <a:prstGeom prst="roundRect">
-            <a:avLst/>
-          </a:prstGeom>
-          <a:solidFill>
-            <a:srgbClr val="FFFFFF"/>
-          </a:solidFill>
-          <a:ln w="12700">
-            <a:solidFill>
-              <a:srgbClr val="E2E8F0"/>
-            </a:solidFill>
-          </a:ln>
-        </p:spPr>
-        <p:style>
-          <a:lnRef idx="1">
-            <a:schemeClr val="accent1"/>
-          </a:lnRef>
-          <a:fillRef idx="3">
-            <a:schemeClr val="accent1"/>
-          </a:fillRef>
-          <a:effectRef idx="2">
-            <a:schemeClr val="accent1"/>
-          </a:effectRef>
-          <a:fontRef idx="minor">
-            <a:schemeClr val="lt1"/>
-          </a:fontRef>
-        </p:style>
-        <p:txBody>
-          <a:bodyPr rtlCol="0" anchor="ctr"/>
-          <a:lstStyle/>
-          <a:p>
-            <a:pPr algn="ctr"/>
-          </a:p>
-        </p:txBody>
-      </p:sp>
-      <p:sp>
-        <p:nvSpPr>
-          <p:cNvPr id="13" name="Rounded Rectangle 12"/>
-          <p:cNvSpPr/>
-          <p:nvPr/>
-        </p:nvSpPr>
-        <p:spPr>
-          <a:xfrm>
-            <a:off x="731520" y="2926080"/>
-            <a:ext cx="5303520" cy="45720"/>
-          </a:xfrm>
-          <a:prstGeom prst="roundRect">
-            <a:avLst/>
-          </a:prstGeom>
-          <a:solidFill>
-            <a:srgbClr val="F59E0B"/>
-          </a:solidFill>
-          <a:ln>
-            <a:noFill/>
-          </a:ln>
-        </p:spPr>
-        <p:style>
-          <a:lnRef idx="1">
-            <a:schemeClr val="accent1"/>
-          </a:lnRef>
-          <a:fillRef idx="3">
-            <a:schemeClr val="accent1"/>
-          </a:fillRef>
-          <a:effectRef idx="2">
-            <a:schemeClr val="accent1"/>
-          </a:effectRef>
-          <a:fontRef idx="minor">
-            <a:schemeClr val="lt1"/>
-          </a:fontRef>
-        </p:style>
-        <p:txBody>
-          <a:bodyPr rtlCol="0" anchor="ctr"/>
-          <a:lstStyle/>
-          <a:p>
-            <a:pPr algn="ctr"/>
-          </a:p>
-        </p:txBody>
-      </p:sp>
-      <p:sp>
-        <p:nvSpPr>
-          <p:cNvPr id="14" name="TextBox 13"/>
-          <p:cNvSpPr txBox="1"/>
-          <p:nvPr/>
-        </p:nvSpPr>
-        <p:spPr>
-          <a:xfrm>
-            <a:off x="914400" y="3035808"/>
-            <a:ext cx="4937760" cy="274320"/>
-          </a:xfrm>
-          <a:prstGeom prst="rect">
-            <a:avLst/>
-          </a:prstGeom>
-          <a:noFill/>
-        </p:spPr>
-        <p:txBody>
-          <a:bodyPr wrap="square">
-            <a:spAutoFit/>
-          </a:bodyPr>
-          <a:lstStyle/>
-          <a:p>
-            <a:pPr algn="l">
-              <a:defRPr sz="1300" b="1">
-                <a:solidFill>
-                  <a:srgbClr val="0F172A"/>
-                </a:solidFill>
-              </a:defRPr>
-            </a:pPr>
-            <a:r>
-              <a:t>为什么用 SSE 而非 WebSocket？</a:t>
-            </a:r>
-          </a:p>
-        </p:txBody>
-      </p:sp>
-      <p:sp>
-        <p:nvSpPr>
-          <p:cNvPr id="15" name="TextBox 14"/>
-          <p:cNvSpPr txBox="1"/>
-          <p:nvPr/>
-        </p:nvSpPr>
-        <p:spPr>
-          <a:xfrm>
-            <a:off x="914400" y="3429000"/>
-            <a:ext cx="4937760" cy="868680"/>
-          </a:xfrm>
-          <a:prstGeom prst="rect">
-            <a:avLst/>
-          </a:prstGeom>
-          <a:noFill/>
-        </p:spPr>
-        <p:txBody>
-          <a:bodyPr wrap="square">
-            <a:spAutoFit/>
-          </a:bodyPr>
-          <a:lstStyle/>
-          <a:p>
-            <a:pPr algn="l">
-              <a:defRPr sz="1100" b="0">
-                <a:solidFill>
-                  <a:srgbClr val="64748B"/>
-                </a:solidFill>
-              </a:defRPr>
-            </a:pPr>
-            <a:r>
-              <a:t>前端只需单向接收推送；SSE 基于 HTTP 无需协议升级；浏览器原生断线重连；实现复杂度远低于 WebSocket</a:t>
-            </a:r>
-          </a:p>
-        </p:txBody>
-      </p:sp>
-      <p:sp>
-        <p:nvSpPr>
-          <p:cNvPr id="16" name="Rounded Rectangle 15"/>
-          <p:cNvSpPr/>
-          <p:nvPr/>
-        </p:nvSpPr>
-        <p:spPr>
-          <a:xfrm>
-            <a:off x="6400800" y="2926080"/>
-            <a:ext cx="5303520" cy="1463040"/>
-          </a:xfrm>
-          <a:prstGeom prst="roundRect">
-            <a:avLst/>
-          </a:prstGeom>
-          <a:solidFill>
-            <a:srgbClr val="FFFFFF"/>
-          </a:solidFill>
-          <a:ln w="12700">
-            <a:solidFill>
-              <a:srgbClr val="E2E8F0"/>
-            </a:solidFill>
-          </a:ln>
-        </p:spPr>
-        <p:style>
-          <a:lnRef idx="1">
-            <a:schemeClr val="accent1"/>
-          </a:lnRef>
-          <a:fillRef idx="3">
-            <a:schemeClr val="accent1"/>
-          </a:fillRef>
-          <a:effectRef idx="2">
-            <a:schemeClr val="accent1"/>
-          </a:effectRef>
-          <a:fontRef idx="minor">
-            <a:schemeClr val="lt1"/>
-          </a:fontRef>
-        </p:style>
-        <p:txBody>
-          <a:bodyPr rtlCol="0" anchor="ctr"/>
-          <a:lstStyle/>
-          <a:p>
-            <a:pPr algn="ctr"/>
-          </a:p>
-        </p:txBody>
-      </p:sp>
-      <p:sp>
-        <p:nvSpPr>
-          <p:cNvPr id="17" name="Rounded Rectangle 16"/>
-          <p:cNvSpPr/>
-          <p:nvPr/>
-        </p:nvSpPr>
-        <p:spPr>
-          <a:xfrm>
-            <a:off x="6400800" y="2926080"/>
-            <a:ext cx="5303520" cy="45720"/>
-          </a:xfrm>
-          <a:prstGeom prst="roundRect">
-            <a:avLst/>
-          </a:prstGeom>
-          <a:solidFill>
-            <a:srgbClr val="EF4444"/>
-          </a:solidFill>
-          <a:ln>
-            <a:noFill/>
-          </a:ln>
-        </p:spPr>
-        <p:style>
-          <a:lnRef idx="1">
-            <a:schemeClr val="accent1"/>
-          </a:lnRef>
-          <a:fillRef idx="3">
-            <a:schemeClr val="accent1"/>
-          </a:fillRef>
-          <a:effectRef idx="2">
-            <a:schemeClr val="accent1"/>
-          </a:effectRef>
-          <a:fontRef idx="minor">
-            <a:schemeClr val="lt1"/>
-          </a:fontRef>
-        </p:style>
-        <p:txBody>
-          <a:bodyPr rtlCol="0" anchor="ctr"/>
-          <a:lstStyle/>
-          <a:p>
-            <a:pPr algn="ctr"/>
-          </a:p>
-        </p:txBody>
-      </p:sp>
-      <p:sp>
-        <p:nvSpPr>
-          <p:cNvPr id="18" name="TextBox 17"/>
-          <p:cNvSpPr txBox="1"/>
-          <p:nvPr/>
-        </p:nvSpPr>
-        <p:spPr>
-          <a:xfrm>
-            <a:off x="6583680" y="3035808"/>
-            <a:ext cx="4937760" cy="274320"/>
-          </a:xfrm>
-          <a:prstGeom prst="rect">
-            <a:avLst/>
-          </a:prstGeom>
-          <a:noFill/>
-        </p:spPr>
-        <p:txBody>
-          <a:bodyPr wrap="square">
-            <a:spAutoFit/>
-          </a:bodyPr>
-          <a:lstStyle/>
-          <a:p>
-            <a:pPr algn="l">
-              <a:defRPr sz="1300" b="1">
-                <a:solidFill>
-                  <a:srgbClr val="0F172A"/>
-                </a:solidFill>
-              </a:defRPr>
-            </a:pPr>
-            <a:r>
-              <a:t>为什么需要去抖迟滞？</a:t>
-            </a:r>
-          </a:p>
-        </p:txBody>
-      </p:sp>
-      <p:sp>
-        <p:nvSpPr>
-          <p:cNvPr id="19" name="TextBox 18"/>
-          <p:cNvSpPr txBox="1"/>
-          <p:nvPr/>
-        </p:nvSpPr>
-        <p:spPr>
-          <a:xfrm>
-            <a:off x="6583680" y="3429000"/>
-            <a:ext cx="4937760" cy="868680"/>
-          </a:xfrm>
-          <a:prstGeom prst="rect">
-            <a:avLst/>
-          </a:prstGeom>
-          <a:noFill/>
-        </p:spPr>
-        <p:txBody>
-          <a:bodyPr wrap="square">
-            <a:spAutoFit/>
-          </a:bodyPr>
-          <a:lstStyle/>
-          <a:p>
-            <a:pPr algn="l">
-              <a:defRPr sz="1100" b="0">
-                <a:solidFill>
-                  <a:srgbClr val="64748B"/>
-                </a:solidFill>
-              </a:defRPr>
-            </a:pPr>
-            <a:r>
-              <a:t>传感器噪声和瞬态工况会导致等级边界抖动；上升快速确认（3次），恢复慢速确认（5次），符合工业"报警易·解除难"需求</a:t>
-            </a:r>
-          </a:p>
-        </p:txBody>
-      </p:sp>
-      <p:sp>
-        <p:nvSpPr>
-          <p:cNvPr id="20" name="Rounded Rectangle 19"/>
-          <p:cNvSpPr/>
-          <p:nvPr/>
-        </p:nvSpPr>
-        <p:spPr>
-          <a:xfrm>
-            <a:off x="731520" y="4572000"/>
-            <a:ext cx="5303520" cy="1463040"/>
-          </a:xfrm>
-          <a:prstGeom prst="roundRect">
-            <a:avLst/>
-          </a:prstGeom>
-          <a:solidFill>
-            <a:srgbClr val="FFFFFF"/>
-          </a:solidFill>
-          <a:ln w="12700">
-            <a:solidFill>
-              <a:srgbClr val="E2E8F0"/>
-            </a:solidFill>
-          </a:ln>
-        </p:spPr>
-        <p:style>
-          <a:lnRef idx="1">
-            <a:schemeClr val="accent1"/>
-          </a:lnRef>
-          <a:fillRef idx="3">
-            <a:schemeClr val="accent1"/>
-          </a:fillRef>
-          <a:effectRef idx="2">
-            <a:schemeClr val="accent1"/>
-          </a:effectRef>
-          <a:fontRef idx="minor">
-            <a:schemeClr val="lt1"/>
-          </a:fontRef>
-        </p:style>
-        <p:txBody>
-          <a:bodyPr rtlCol="0" anchor="ctr"/>
-          <a:lstStyle/>
-          <a:p>
-            <a:pPr algn="ctr"/>
-          </a:p>
-        </p:txBody>
-      </p:sp>
-      <p:sp>
-        <p:nvSpPr>
-          <p:cNvPr id="21" name="Rounded Rectangle 20"/>
-          <p:cNvSpPr/>
-          <p:nvPr/>
-        </p:nvSpPr>
-        <p:spPr>
-          <a:xfrm>
-            <a:off x="731520" y="4572000"/>
-            <a:ext cx="5303520" cy="45720"/>
-          </a:xfrm>
-          <a:prstGeom prst="roundRect">
-            <a:avLst/>
-          </a:prstGeom>
-          <a:solidFill>
-            <a:srgbClr val="8B5CF6"/>
-          </a:solidFill>
-          <a:ln>
-            <a:noFill/>
-          </a:ln>
-        </p:spPr>
-        <p:style>
-          <a:lnRef idx="1">
-            <a:schemeClr val="accent1"/>
-          </a:lnRef>
-          <a:fillRef idx="3">
-            <a:schemeClr val="accent1"/>
-          </a:fillRef>
-          <a:effectRef idx="2">
-            <a:schemeClr val="accent1"/>
-          </a:effectRef>
-          <a:fontRef idx="minor">
-            <a:schemeClr val="lt1"/>
-          </a:fontRef>
-        </p:style>
-        <p:txBody>
-          <a:bodyPr rtlCol="0" anchor="ctr"/>
-          <a:lstStyle/>
-          <a:p>
-            <a:pPr algn="ctr"/>
-          </a:p>
-        </p:txBody>
-      </p:sp>
-      <p:sp>
-        <p:nvSpPr>
-          <p:cNvPr id="22" name="TextBox 21"/>
-          <p:cNvSpPr txBox="1"/>
-          <p:nvPr/>
-        </p:nvSpPr>
-        <p:spPr>
-          <a:xfrm>
-            <a:off x="914400" y="4681728"/>
-            <a:ext cx="4937760" cy="274320"/>
-          </a:xfrm>
-          <a:prstGeom prst="rect">
-            <a:avLst/>
-          </a:prstGeom>
-          <a:noFill/>
-        </p:spPr>
-        <p:txBody>
-          <a:bodyPr wrap="square">
-            <a:spAutoFit/>
-          </a:bodyPr>
-          <a:lstStyle/>
-          <a:p>
-            <a:pPr algn="l">
-              <a:defRPr sz="1300" b="1">
-                <a:solidFill>
-                  <a:srgbClr val="0F172A"/>
-                </a:solidFill>
-              </a:defRPr>
-            </a:pPr>
-            <a:r>
-              <a:t>为什么用时间序列分割？</a:t>
-            </a:r>
-          </a:p>
-        </p:txBody>
-      </p:sp>
-      <p:sp>
-        <p:nvSpPr>
-          <p:cNvPr id="23" name="TextBox 22"/>
-          <p:cNvSpPr txBox="1"/>
-          <p:nvPr/>
-        </p:nvSpPr>
-        <p:spPr>
-          <a:xfrm>
-            <a:off x="914400" y="5074920"/>
-            <a:ext cx="4937760" cy="868680"/>
-          </a:xfrm>
-          <a:prstGeom prst="rect">
-            <a:avLst/>
-          </a:prstGeom>
-          <a:noFill/>
-        </p:spPr>
-        <p:txBody>
-          <a:bodyPr wrap="square">
-            <a:spAutoFit/>
-          </a:bodyPr>
-          <a:lstStyle/>
-          <a:p>
-            <a:pPr algn="l">
-              <a:defRPr sz="1100" b="0">
-                <a:solidFill>
-                  <a:srgbClr val="64748B"/>
-                </a:solidFill>
-              </a:defRPr>
-            </a:pPr>
-            <a:r>
-              <a:t>避免随机切分导致未来信息泄露到训练集，使评估结果更接近真实在线部署场景，每个 asset 独立切分保证评估严谨性</a:t>
-            </a:r>
-          </a:p>
-        </p:txBody>
-      </p:sp>
-      <p:sp>
-        <p:nvSpPr>
-          <p:cNvPr id="24" name="Rounded Rectangle 23"/>
-          <p:cNvSpPr/>
-          <p:nvPr/>
-        </p:nvSpPr>
-        <p:spPr>
-          <a:xfrm>
-            <a:off x="6400800" y="4572000"/>
-            <a:ext cx="5303520" cy="1463040"/>
-          </a:xfrm>
-          <a:prstGeom prst="roundRect">
-            <a:avLst/>
-          </a:prstGeom>
-          <a:solidFill>
-            <a:srgbClr val="FFFFFF"/>
-          </a:solidFill>
-          <a:ln w="12700">
-            <a:solidFill>
-              <a:srgbClr val="E2E8F0"/>
-            </a:solidFill>
-          </a:ln>
-        </p:spPr>
-        <p:style>
-          <a:lnRef idx="1">
-            <a:schemeClr val="accent1"/>
-          </a:lnRef>
-          <a:fillRef idx="3">
-            <a:schemeClr val="accent1"/>
-          </a:fillRef>
-          <a:effectRef idx="2">
-            <a:schemeClr val="accent1"/>
-          </a:effectRef>
-          <a:fontRef idx="minor">
-            <a:schemeClr val="lt1"/>
-          </a:fontRef>
-        </p:style>
-        <p:txBody>
-          <a:bodyPr rtlCol="0" anchor="ctr"/>
-          <a:lstStyle/>
-          <a:p>
-            <a:pPr algn="ctr"/>
-          </a:p>
-        </p:txBody>
-      </p:sp>
-      <p:sp>
-        <p:nvSpPr>
-          <p:cNvPr id="25" name="Rounded Rectangle 24"/>
-          <p:cNvSpPr/>
-          <p:nvPr/>
-        </p:nvSpPr>
-        <p:spPr>
-          <a:xfrm>
-            <a:off x="6400800" y="4572000"/>
-            <a:ext cx="5303520" cy="45720"/>
-          </a:xfrm>
-          <a:prstGeom prst="roundRect">
-            <a:avLst/>
-          </a:prstGeom>
-          <a:solidFill>
-            <a:srgbClr val="EC4899"/>
-          </a:solidFill>
-          <a:ln>
-            <a:noFill/>
-          </a:ln>
-        </p:spPr>
-        <p:style>
-          <a:lnRef idx="1">
-            <a:schemeClr val="accent1"/>
-          </a:lnRef>
-          <a:fillRef idx="3">
-            <a:schemeClr val="accent1"/>
-          </a:fillRef>
-          <a:effectRef idx="2">
-            <a:schemeClr val="accent1"/>
-          </a:effectRef>
-          <a:fontRef idx="minor">
-            <a:schemeClr val="lt1"/>
-          </a:fontRef>
-        </p:style>
-        <p:txBody>
-          <a:bodyPr rtlCol="0" anchor="ctr"/>
-          <a:lstStyle/>
-          <a:p>
-            <a:pPr algn="ctr"/>
-          </a:p>
-        </p:txBody>
-      </p:sp>
-      <p:sp>
-        <p:nvSpPr>
-          <p:cNvPr id="26" name="TextBox 25"/>
-          <p:cNvSpPr txBox="1"/>
-          <p:nvPr/>
-        </p:nvSpPr>
-        <p:spPr>
-          <a:xfrm>
-            <a:off x="6583680" y="4681728"/>
-            <a:ext cx="4937760" cy="274320"/>
-          </a:xfrm>
-          <a:prstGeom prst="rect">
-            <a:avLst/>
-          </a:prstGeom>
-          <a:noFill/>
-        </p:spPr>
-        <p:txBody>
-          <a:bodyPr wrap="square">
-            <a:spAutoFit/>
-          </a:bodyPr>
-          <a:lstStyle/>
-          <a:p>
-            <a:pPr algn="l">
-              <a:defRPr sz="1300" b="1">
-                <a:solidFill>
-                  <a:srgbClr val="0F172A"/>
-                </a:solidFill>
-              </a:defRPr>
-            </a:pPr>
-            <a:r>
-              <a:t>为什么 feature_set=online？</a:t>
-            </a:r>
-          </a:p>
-        </p:txBody>
-      </p:sp>
-      <p:sp>
-        <p:nvSpPr>
-          <p:cNvPr id="27" name="TextBox 26"/>
-          <p:cNvSpPr txBox="1"/>
-          <p:nvPr/>
-        </p:nvSpPr>
-        <p:spPr>
-          <a:xfrm>
-            <a:off x="6583680" y="5074920"/>
-            <a:ext cx="4937760" cy="868680"/>
-          </a:xfrm>
-          <a:prstGeom prst="rect">
-            <a:avLst/>
-          </a:prstGeom>
-          <a:noFill/>
-        </p:spPr>
-        <p:txBody>
-          <a:bodyPr wrap="square">
-            <a:spAutoFit/>
-          </a:bodyPr>
-          <a:lstStyle/>
-          <a:p>
-            <a:pPr algn="l">
-              <a:defRPr sz="1100" b="0">
-                <a:solidFill>
-                  <a:srgbClr val="64748B"/>
-                </a:solidFill>
-              </a:defRPr>
-            </a:pPr>
-            <a:r>
-              <a:t>训练时只使用在线可实时计算的特征列，避免大量离线特征被中位数填充成常数，导致预测结果长期不变化</a:t>
-            </a:r>
-          </a:p>
-        </p:txBody>
-      </p:sp>
-      <p:sp>
-        <p:nvSpPr>
-          <p:cNvPr id="28" name="Rounded Rectangle 27"/>
-          <p:cNvSpPr/>
-          <p:nvPr/>
-        </p:nvSpPr>
-        <p:spPr>
-          <a:xfrm>
-            <a:off x="731520" y="6309360"/>
-            <a:ext cx="10698480" cy="0"/>
-          </a:xfrm>
-          <a:prstGeom prst="roundRect">
-            <a:avLst/>
-          </a:prstGeom>
-          <a:solidFill>
-            <a:srgbClr val="F59E0B"/>
-          </a:solidFill>
-          <a:ln>
-            <a:noFill/>
-          </a:ln>
-        </p:spPr>
-        <p:style>
-          <a:lnRef idx="1">
-            <a:schemeClr val="accent1"/>
-          </a:lnRef>
-          <a:fillRef idx="3">
-            <a:schemeClr val="accent1"/>
-          </a:fillRef>
-          <a:effectRef idx="2">
-            <a:schemeClr val="accent1"/>
-          </a:effectRef>
-          <a:fontRef idx="minor">
-            <a:schemeClr val="lt1"/>
-          </a:fontRef>
-        </p:style>
-        <p:txBody>
-          <a:bodyPr rtlCol="0" anchor="ctr"/>
-          <a:lstStyle/>
-          <a:p>
-            <a:pPr algn="ctr"/>
-          </a:p>
-        </p:txBody>
-      </p:sp>
-      <p:sp>
-        <p:nvSpPr>
-          <p:cNvPr id="29" name="TextBox 28"/>
-          <p:cNvSpPr txBox="1"/>
-          <p:nvPr/>
-        </p:nvSpPr>
-        <p:spPr>
-          <a:xfrm>
-            <a:off x="10515600" y="6492240"/>
-            <a:ext cx="1371600" cy="274320"/>
-          </a:xfrm>
-          <a:prstGeom prst="rect">
-            <a:avLst/>
-          </a:prstGeom>
-          <a:noFill/>
-        </p:spPr>
-        <p:txBody>
-          <a:bodyPr wrap="square">
-            <a:spAutoFit/>
-          </a:bodyPr>
-          <a:lstStyle/>
-          <a:p>
-            <a:pPr algn="r">
-              <a:defRPr sz="1000" b="0">
-                <a:solidFill>
-                  <a:srgbClr val="64748B"/>
-                </a:solidFill>
-              </a:defRPr>
-            </a:pPr>
-            <a:r>
-              <a:t>13 / 17</a:t>
+              <a:t>13 / 19</a:t>
             </a:r>
           </a:p>
         </p:txBody>
@@ -5741,7 +7097,7 @@
               </a:defRPr>
             </a:pPr>
             <a:r>
-              <a:t>部署与扩展</a:t>
+              <a:t>关键技术决策</a:t>
             </a:r>
           </a:p>
         </p:txBody>
@@ -5776,7 +7132,7 @@
               </a:defRPr>
             </a:pPr>
             <a:r>
-              <a:t>一键启动 · Docker 部署 · 接入真实设备 · 模型替换</a:t>
+              <a:t>为什么选择这些技术栈？每个选择背后都有明确的工业场景考量</a:t>
             </a:r>
           </a:p>
         </p:txBody>
@@ -5811,7 +7167,7 @@
               </a:defRPr>
             </a:pPr>
             <a:r>
-              <a:t>14 / 17</a:t>
+              <a:t>14 / 19</a:t>
             </a:r>
           </a:p>
         </p:txBody>
@@ -5872,7 +7228,7 @@
               </a:defRPr>
             </a:pPr>
             <a:r>
-              <a:t>部署方案 + 扩展指南</a:t>
+              <a:t>设计决策与理由</a:t>
             </a:r>
           </a:p>
         </p:txBody>
@@ -5907,7 +7263,7 @@
               </a:defRPr>
             </a:pPr>
             <a:r>
-              <a:t>从开发到生产，从仿真到真实</a:t>
+              <a:t>每个技术选择背后都有明确的工业场景考量</a:t>
             </a:r>
           </a:p>
         </p:txBody>
@@ -5921,167 +7277,7 @@
         <p:spPr>
           <a:xfrm>
             <a:off x="731520" y="1280160"/>
-            <a:ext cx="5303520" cy="640080"/>
-          </a:xfrm>
-          <a:prstGeom prst="roundRect">
-            <a:avLst/>
-          </a:prstGeom>
-          <a:solidFill>
-            <a:srgbClr val="1E293B"/>
-          </a:solidFill>
-          <a:ln>
-            <a:noFill/>
-          </a:ln>
-        </p:spPr>
-        <p:style>
-          <a:lnRef idx="1">
-            <a:schemeClr val="accent1"/>
-          </a:lnRef>
-          <a:fillRef idx="3">
-            <a:schemeClr val="accent1"/>
-          </a:fillRef>
-          <a:effectRef idx="2">
-            <a:schemeClr val="accent1"/>
-          </a:effectRef>
-          <a:fontRef idx="minor">
-            <a:schemeClr val="lt1"/>
-          </a:fontRef>
-        </p:style>
-        <p:txBody>
-          <a:bodyPr rtlCol="0" anchor="ctr" wrap="square" lIns="182880" tIns="109728" bIns="109728"/>
-          <a:lstStyle/>
-          <a:p>
-            <a:pPr algn="ctr">
-              <a:spcAft>
-                <a:spcPts val="100"/>
-              </a:spcAft>
-              <a:defRPr sz="1000">
-                <a:solidFill>
-                  <a:srgbClr val="E2E8F0"/>
-                </a:solidFill>
-                <a:latin typeface="Courier New"/>
-              </a:defRPr>
-            </a:pPr>
-            <a:r>
-              <a:t># 一键启动</a:t>
-            </a:r>
-            <a:br/>
-            <a:r>
-              <a:t>bash start.sh</a:t>
-            </a:r>
-            <a:br/>
-            <a:r>
-              <a:t># 前端 http://localhost:5173</a:t>
-            </a:r>
-            <a:br/>
-            <a:r>
-              <a:t># 后端 http://localhost:5000</a:t>
-            </a:r>
-            <a:br/>
-            <a:r>
-              <a:t># 账号 admin / admin123</a:t>
-            </a:r>
-          </a:p>
-        </p:txBody>
-      </p:sp>
-      <p:sp>
-        <p:nvSpPr>
-          <p:cNvPr id="5" name="Rounded Rectangle 4"/>
-          <p:cNvSpPr/>
-          <p:nvPr/>
-        </p:nvSpPr>
-        <p:spPr>
-          <a:xfrm>
-            <a:off x="6400800" y="1280160"/>
-            <a:ext cx="5303520" cy="2011680"/>
-          </a:xfrm>
-          <a:prstGeom prst="roundRect">
-            <a:avLst/>
-          </a:prstGeom>
-          <a:solidFill>
-            <a:srgbClr val="1E293B"/>
-          </a:solidFill>
-          <a:ln>
-            <a:noFill/>
-          </a:ln>
-        </p:spPr>
-        <p:style>
-          <a:lnRef idx="1">
-            <a:schemeClr val="accent1"/>
-          </a:lnRef>
-          <a:fillRef idx="3">
-            <a:schemeClr val="accent1"/>
-          </a:fillRef>
-          <a:effectRef idx="2">
-            <a:schemeClr val="accent1"/>
-          </a:effectRef>
-          <a:fontRef idx="minor">
-            <a:schemeClr val="lt1"/>
-          </a:fontRef>
-        </p:style>
-        <p:txBody>
-          <a:bodyPr rtlCol="0" anchor="ctr" wrap="square" lIns="182880" tIns="109728" bIns="109728"/>
-          <a:lstStyle/>
-          <a:p>
-            <a:pPr algn="ctr">
-              <a:spcAft>
-                <a:spcPts val="100"/>
-              </a:spcAft>
-              <a:defRPr sz="1000">
-                <a:solidFill>
-                  <a:srgbClr val="E2E8F0"/>
-                </a:solidFill>
-                <a:latin typeface="Courier New"/>
-              </a:defRPr>
-            </a:pPr>
-            <a:r>
-              <a:t># Docker Compose</a:t>
-            </a:r>
-            <a:br/>
-            <a:r>
-              <a:t>services:</a:t>
-            </a:r>
-            <a:br/>
-            <a:r>
-              <a:t>  emqx:   image: emqx/emqx</a:t>
-            </a:r>
-            <a:br/>
-            <a:r>
-              <a:t>  mysql:  image: mysql:8</a:t>
-            </a:r>
-            <a:br/>
-            <a:r>
-              <a:t>          environment:</a:t>
-            </a:r>
-            <a:br/>
-            <a:r>
-              <a:t>            MYSQL_ROOT_PASSWORD: root</a:t>
-            </a:r>
-            <a:br/>
-            <a:r>
-              <a:t>            MYSQL_DATABASE: ihealthsim</a:t>
-            </a:r>
-            <a:br/>
-            <a:r>
-              <a:t>  backend:  build: .</a:t>
-            </a:r>
-            <a:br/>
-            <a:r>
-              <a:t>  frontend: build: ./frontend</a:t>
-            </a:r>
-          </a:p>
-        </p:txBody>
-      </p:sp>
-      <p:sp>
-        <p:nvSpPr>
-          <p:cNvPr id="6" name="Rounded Rectangle 5"/>
-          <p:cNvSpPr/>
-          <p:nvPr/>
-        </p:nvSpPr>
-        <p:spPr>
-          <a:xfrm>
-            <a:off x="731520" y="3474720"/>
-            <a:ext cx="5303520" cy="1645920"/>
+            <a:ext cx="5303520" cy="1463040"/>
           </a:xfrm>
           <a:prstGeom prst="roundRect">
             <a:avLst/>
@@ -6110,155 +7306,136 @@
           </a:fontRef>
         </p:style>
         <p:txBody>
-          <a:bodyPr rtlCol="0" anchor="ctr" wrap="square" lIns="182880" rIns="137160" tIns="137160" bIns="91440"/>
-          <a:lstStyle/>
-          <a:p>
-            <a:pPr algn="ctr">
-              <a:spcAft>
-                <a:spcPts val="600"/>
-              </a:spcAft>
-              <a:defRPr sz="1400" b="1">
+          <a:bodyPr rtlCol="0" anchor="ctr"/>
+          <a:lstStyle/>
+          <a:p>
+            <a:pPr algn="ctr"/>
+          </a:p>
+        </p:txBody>
+      </p:sp>
+      <p:sp>
+        <p:nvSpPr>
+          <p:cNvPr id="5" name="Rounded Rectangle 4"/>
+          <p:cNvSpPr/>
+          <p:nvPr/>
+        </p:nvSpPr>
+        <p:spPr>
+          <a:xfrm>
+            <a:off x="731520" y="1280160"/>
+            <a:ext cx="5303520" cy="45720"/>
+          </a:xfrm>
+          <a:prstGeom prst="roundRect">
+            <a:avLst/>
+          </a:prstGeom>
+          <a:solidFill>
+            <a:srgbClr val="1A73E8"/>
+          </a:solidFill>
+          <a:ln>
+            <a:noFill/>
+          </a:ln>
+        </p:spPr>
+        <p:style>
+          <a:lnRef idx="1">
+            <a:schemeClr val="accent1"/>
+          </a:lnRef>
+          <a:fillRef idx="3">
+            <a:schemeClr val="accent1"/>
+          </a:fillRef>
+          <a:effectRef idx="2">
+            <a:schemeClr val="accent1"/>
+          </a:effectRef>
+          <a:fontRef idx="minor">
+            <a:schemeClr val="lt1"/>
+          </a:fontRef>
+        </p:style>
+        <p:txBody>
+          <a:bodyPr rtlCol="0" anchor="ctr"/>
+          <a:lstStyle/>
+          <a:p>
+            <a:pPr algn="ctr"/>
+          </a:p>
+        </p:txBody>
+      </p:sp>
+      <p:sp>
+        <p:nvSpPr>
+          <p:cNvPr id="6" name="TextBox 5"/>
+          <p:cNvSpPr txBox="1"/>
+          <p:nvPr/>
+        </p:nvSpPr>
+        <p:spPr>
+          <a:xfrm>
+            <a:off x="914400" y="1389888"/>
+            <a:ext cx="4937760" cy="274320"/>
+          </a:xfrm>
+          <a:prstGeom prst="rect">
+            <a:avLst/>
+          </a:prstGeom>
+          <a:noFill/>
+        </p:spPr>
+        <p:txBody>
+          <a:bodyPr wrap="square">
+            <a:spAutoFit/>
+          </a:bodyPr>
+          <a:lstStyle/>
+          <a:p>
+            <a:pPr algn="l">
+              <a:defRPr sz="1300" b="1">
                 <a:solidFill>
                   <a:srgbClr val="0F172A"/>
                 </a:solidFill>
               </a:defRPr>
             </a:pPr>
             <a:r>
-              <a:t>接入真实设备 — 零代码改动</a:t>
-            </a:r>
-          </a:p>
-          <a:p>
-            <a:pPr>
-              <a:spcAft>
-                <a:spcPts val="200"/>
-              </a:spcAft>
-              <a:defRPr sz="900">
-                <a:solidFill>
-                  <a:srgbClr val="64748B"/>
-                </a:solidFill>
-              </a:defRPr>
-            </a:pPr>
-            <a:r>
-              <a:t>只需确保 MQTT 消息格式一致：</a:t>
-            </a:r>
-          </a:p>
-          <a:p>
-            <a:pPr>
-              <a:spcAft>
-                <a:spcPts val="200"/>
-              </a:spcAft>
-              <a:defRPr sz="900">
-                <a:solidFill>
-                  <a:srgbClr val="64748B"/>
-                </a:solidFill>
-              </a:defRPr>
-            </a:pPr>
-            <a:r>
-              <a:t>{</a:t>
-            </a:r>
-          </a:p>
-          <a:p>
-            <a:pPr>
-              <a:spcAft>
-                <a:spcPts val="200"/>
-              </a:spcAft>
-              <a:defRPr sz="900">
-                <a:solidFill>
-                  <a:srgbClr val="64748B"/>
-                </a:solidFill>
-              </a:defRPr>
-            </a:pPr>
-            <a:r>
-              <a:t>  "ts_ms": 1710000000000,</a:t>
-            </a:r>
-          </a:p>
-          <a:p>
-            <a:pPr>
-              <a:spcAft>
-                <a:spcPts val="200"/>
-              </a:spcAft>
-              <a:defRPr sz="900">
-                <a:solidFill>
-                  <a:srgbClr val="64748B"/>
-                </a:solidFill>
-              </a:defRPr>
-            </a:pPr>
-            <a:r>
-              <a:t>  "asset_id": "REAL-PUMP-001",</a:t>
-            </a:r>
-          </a:p>
-          <a:p>
-            <a:pPr>
-              <a:spcAft>
-                <a:spcPts val="200"/>
-              </a:spcAft>
-              <a:defRPr sz="900">
-                <a:solidFill>
-                  <a:srgbClr val="64748B"/>
-                </a:solidFill>
-              </a:defRPr>
-            </a:pPr>
-            <a:r>
-              <a:t>  "point": "temp_c", "value": 55.2,</a:t>
-            </a:r>
-          </a:p>
-          <a:p>
-            <a:pPr>
-              <a:spcAft>
-                <a:spcPts val="200"/>
-              </a:spcAft>
-              <a:defRPr sz="900">
-                <a:solidFill>
-                  <a:srgbClr val="64748B"/>
-                </a:solidFill>
-              </a:defRPr>
-            </a:pPr>
-            <a:r>
-              <a:t>  "quality": "good"</a:t>
-            </a:r>
-          </a:p>
-          <a:p>
-            <a:pPr>
-              <a:spcAft>
-                <a:spcPts val="200"/>
-              </a:spcAft>
-              <a:defRPr sz="900">
-                <a:solidFill>
-                  <a:srgbClr val="64748B"/>
-                </a:solidFill>
-              </a:defRPr>
-            </a:pPr>
-            <a:r>
-              <a:t>}</a:t>
-            </a:r>
-          </a:p>
-          <a:p>
-            <a:pPr>
-              <a:spcAft>
-                <a:spcPts val="200"/>
-              </a:spcAft>
-              <a:defRPr sz="900">
-                <a:solidFill>
-                  <a:srgbClr val="64748B"/>
-                </a:solidFill>
-              </a:defRPr>
-            </a:pPr>
-            <a:r>
-              <a:t>系统自动接收 → 存储 → 打分 → 推送</a:t>
-            </a:r>
-          </a:p>
-        </p:txBody>
-      </p:sp>
-      <p:sp>
-        <p:nvSpPr>
-          <p:cNvPr id="7" name="Rounded Rectangle 6"/>
+              <a:t>为什么支持多模型？</a:t>
+            </a:r>
+          </a:p>
+        </p:txBody>
+      </p:sp>
+      <p:sp>
+        <p:nvSpPr>
+          <p:cNvPr id="7" name="TextBox 6"/>
+          <p:cNvSpPr txBox="1"/>
+          <p:nvPr/>
+        </p:nvSpPr>
+        <p:spPr>
+          <a:xfrm>
+            <a:off x="914400" y="1783080"/>
+            <a:ext cx="4937760" cy="868680"/>
+          </a:xfrm>
+          <a:prstGeom prst="rect">
+            <a:avLst/>
+          </a:prstGeom>
+          <a:noFill/>
+        </p:spPr>
+        <p:txBody>
+          <a:bodyPr wrap="square">
+            <a:spAutoFit/>
+          </a:bodyPr>
+          <a:lstStyle/>
+          <a:p>
+            <a:pPr algn="l">
+              <a:defRPr sz="1100" b="0">
+                <a:solidFill>
+                  <a:srgbClr val="64748B"/>
+                </a:solidFill>
+              </a:defRPr>
+            </a:pPr>
+            <a:r>
+              <a:t>Tree 提供完整决策路径(可审计)；XGBoost/LightGBM 精度更高；非树模型通过 Lv0 基线偏差诊断实现可解释性；--model 一键切换，Pipeline 架构共用</a:t>
+            </a:r>
+          </a:p>
+        </p:txBody>
+      </p:sp>
+      <p:sp>
+        <p:nvSpPr>
+          <p:cNvPr id="8" name="Rounded Rectangle 7"/>
           <p:cNvSpPr/>
           <p:nvPr/>
         </p:nvSpPr>
         <p:spPr>
           <a:xfrm>
-            <a:off x="6400800" y="3474720"/>
-            <a:ext cx="5303520" cy="1645920"/>
+            <a:off x="6400800" y="1280160"/>
+            <a:ext cx="5303520" cy="1463040"/>
           </a:xfrm>
           <a:prstGeom prst="roundRect">
             <a:avLst/>
@@ -6287,164 +7464,66 @@
           </a:fontRef>
         </p:style>
         <p:txBody>
-          <a:bodyPr rtlCol="0" anchor="ctr" wrap="square" lIns="182880" rIns="137160" tIns="137160" bIns="91440"/>
-          <a:lstStyle/>
-          <a:p>
-            <a:pPr algn="ctr">
-              <a:spcAft>
-                <a:spcPts val="600"/>
-              </a:spcAft>
-              <a:defRPr sz="1400" b="1">
-                <a:solidFill>
-                  <a:srgbClr val="0F172A"/>
-                </a:solidFill>
-              </a:defRPr>
-            </a:pPr>
-            <a:r>
-              <a:t>扩展方向</a:t>
-            </a:r>
-          </a:p>
-          <a:p>
-            <a:pPr>
-              <a:spcAft>
-                <a:spcPts val="200"/>
-              </a:spcAft>
-              <a:defRPr sz="900">
-                <a:solidFill>
-                  <a:srgbClr val="64748B"/>
-                </a:solidFill>
-              </a:defRPr>
-            </a:pPr>
-            <a:r>
-              <a:t>🔧 替换模型：任何 sklearn 兼容分类器</a:t>
-            </a:r>
-          </a:p>
-          <a:p>
-            <a:pPr>
-              <a:spcAft>
-                <a:spcPts val="200"/>
-              </a:spcAft>
-              <a:defRPr sz="900">
-                <a:solidFill>
-                  <a:srgbClr val="64748B"/>
-                </a:solidFill>
-              </a:defRPr>
-            </a:pPr>
-            <a:r>
-              <a:t>  → 修改 train.py + 对齐 ONLINE_FEATURE_COLS</a:t>
-            </a:r>
-          </a:p>
-          <a:p>
-            <a:pPr>
-              <a:spcAft>
-                <a:spcPts val="200"/>
-              </a:spcAft>
-              <a:defRPr sz="900">
-                <a:solidFill>
-                  <a:srgbClr val="64748B"/>
-                </a:solidFill>
-              </a:defRPr>
-            </a:pPr>
-          </a:p>
-          <a:p>
-            <a:pPr>
-              <a:spcAft>
-                <a:spcPts val="200"/>
-              </a:spcAft>
-              <a:defRPr sz="900">
-                <a:solidFill>
-                  <a:srgbClr val="64748B"/>
-                </a:solidFill>
-              </a:defRPr>
-            </a:pPr>
-            <a:r>
-              <a:t>📊 增加点位：四点对齐</a:t>
-            </a:r>
-          </a:p>
-          <a:p>
-            <a:pPr>
-              <a:spcAft>
-                <a:spcPts val="200"/>
-              </a:spcAft>
-              <a:defRPr sz="900">
-                <a:solidFill>
-                  <a:srgbClr val="64748B"/>
-                </a:solidFill>
-              </a:defRPr>
-            </a:pPr>
-            <a:r>
-              <a:t>  → step() → features.py → train.py → Dashboard.vue</a:t>
-            </a:r>
-          </a:p>
-          <a:p>
-            <a:pPr>
-              <a:spcAft>
-                <a:spcPts val="200"/>
-              </a:spcAft>
-              <a:defRPr sz="900">
-                <a:solidFill>
-                  <a:srgbClr val="64748B"/>
-                </a:solidFill>
-              </a:defRPr>
-            </a:pPr>
-          </a:p>
-          <a:p>
-            <a:pPr>
-              <a:spcAft>
-                <a:spcPts val="200"/>
-              </a:spcAft>
-              <a:defRPr sz="900">
-                <a:solidFill>
-                  <a:srgbClr val="64748B"/>
-                </a:solidFill>
-              </a:defRPr>
-            </a:pPr>
-            <a:r>
-              <a:t>📈 未来规划</a:t>
-            </a:r>
-          </a:p>
-          <a:p>
-            <a:pPr>
-              <a:spcAft>
-                <a:spcPts val="200"/>
-              </a:spcAft>
-              <a:defRPr sz="900">
-                <a:solidFill>
-                  <a:srgbClr val="64748B"/>
-                </a:solidFill>
-              </a:defRPr>
-            </a:pPr>
-            <a:r>
-              <a:t>  → XGBoost/LightGBM · ECharts 历史趋势</a:t>
-            </a:r>
-          </a:p>
-          <a:p>
-            <a:pPr>
-              <a:spcAft>
-                <a:spcPts val="200"/>
-              </a:spcAft>
-              <a:defRPr sz="900">
-                <a:solidFill>
-                  <a:srgbClr val="64748B"/>
-                </a:solidFill>
-              </a:defRPr>
-            </a:pPr>
-            <a:r>
-              <a:t>  → 报警规则引擎 · Docker 一键部署 · i18n</a:t>
-            </a:r>
-          </a:p>
-        </p:txBody>
-      </p:sp>
-      <p:sp>
-        <p:nvSpPr>
-          <p:cNvPr id="8" name="TextBox 7"/>
+          <a:bodyPr rtlCol="0" anchor="ctr"/>
+          <a:lstStyle/>
+          <a:p>
+            <a:pPr algn="ctr"/>
+          </a:p>
+        </p:txBody>
+      </p:sp>
+      <p:sp>
+        <p:nvSpPr>
+          <p:cNvPr id="9" name="Rounded Rectangle 8"/>
+          <p:cNvSpPr/>
+          <p:nvPr/>
+        </p:nvSpPr>
+        <p:spPr>
+          <a:xfrm>
+            <a:off x="6400800" y="1280160"/>
+            <a:ext cx="5303520" cy="45720"/>
+          </a:xfrm>
+          <a:prstGeom prst="roundRect">
+            <a:avLst/>
+          </a:prstGeom>
+          <a:solidFill>
+            <a:srgbClr val="10B981"/>
+          </a:solidFill>
+          <a:ln>
+            <a:noFill/>
+          </a:ln>
+        </p:spPr>
+        <p:style>
+          <a:lnRef idx="1">
+            <a:schemeClr val="accent1"/>
+          </a:lnRef>
+          <a:fillRef idx="3">
+            <a:schemeClr val="accent1"/>
+          </a:fillRef>
+          <a:effectRef idx="2">
+            <a:schemeClr val="accent1"/>
+          </a:effectRef>
+          <a:fontRef idx="minor">
+            <a:schemeClr val="lt1"/>
+          </a:fontRef>
+        </p:style>
+        <p:txBody>
+          <a:bodyPr rtlCol="0" anchor="ctr"/>
+          <a:lstStyle/>
+          <a:p>
+            <a:pPr algn="ctr"/>
+          </a:p>
+        </p:txBody>
+      </p:sp>
+      <p:sp>
+        <p:nvSpPr>
+          <p:cNvPr id="10" name="TextBox 9"/>
           <p:cNvSpPr txBox="1"/>
           <p:nvPr/>
         </p:nvSpPr>
         <p:spPr>
           <a:xfrm>
-            <a:off x="10515600" y="6492240"/>
-            <a:ext cx="1371600" cy="274320"/>
+            <a:off x="6583680" y="1389888"/>
+            <a:ext cx="4937760" cy="274320"/>
           </a:xfrm>
           <a:prstGeom prst="rect">
             <a:avLst/>
@@ -6457,6 +7536,860 @@
           </a:bodyPr>
           <a:lstStyle/>
           <a:p>
+            <a:pPr algn="l">
+              <a:defRPr sz="1300" b="1">
+                <a:solidFill>
+                  <a:srgbClr val="0F172A"/>
+                </a:solidFill>
+              </a:defRPr>
+            </a:pPr>
+            <a:r>
+              <a:t>为什么用 MQTT 而非 HTTP？</a:t>
+            </a:r>
+          </a:p>
+        </p:txBody>
+      </p:sp>
+      <p:sp>
+        <p:nvSpPr>
+          <p:cNvPr id="11" name="TextBox 10"/>
+          <p:cNvSpPr txBox="1"/>
+          <p:nvPr/>
+        </p:nvSpPr>
+        <p:spPr>
+          <a:xfrm>
+            <a:off x="6583680" y="1783080"/>
+            <a:ext cx="4937760" cy="868680"/>
+          </a:xfrm>
+          <a:prstGeom prst="rect">
+            <a:avLst/>
+          </a:prstGeom>
+          <a:noFill/>
+        </p:spPr>
+        <p:txBody>
+          <a:bodyPr wrap="square">
+            <a:spAutoFit/>
+          </a:bodyPr>
+          <a:lstStyle/>
+          <a:p>
+            <a:pPr algn="l">
+              <a:defRPr sz="1100" b="0">
+                <a:solidFill>
+                  <a:srgbClr val="64748B"/>
+                </a:solidFill>
+              </a:defRPr>
+            </a:pPr>
+            <a:r>
+              <a:t>IIoT 事实标准：发布/订阅解耦设备与消费者；QoS 消息保证；二进制协议带宽低；与 EMQX/HiveMQ/AWS IoT 生态兼容</a:t>
+            </a:r>
+          </a:p>
+        </p:txBody>
+      </p:sp>
+      <p:sp>
+        <p:nvSpPr>
+          <p:cNvPr id="12" name="Rounded Rectangle 11"/>
+          <p:cNvSpPr/>
+          <p:nvPr/>
+        </p:nvSpPr>
+        <p:spPr>
+          <a:xfrm>
+            <a:off x="731520" y="2926080"/>
+            <a:ext cx="5303520" cy="1463040"/>
+          </a:xfrm>
+          <a:prstGeom prst="roundRect">
+            <a:avLst/>
+          </a:prstGeom>
+          <a:solidFill>
+            <a:srgbClr val="FFFFFF"/>
+          </a:solidFill>
+          <a:ln w="12700">
+            <a:solidFill>
+              <a:srgbClr val="E2E8F0"/>
+            </a:solidFill>
+          </a:ln>
+        </p:spPr>
+        <p:style>
+          <a:lnRef idx="1">
+            <a:schemeClr val="accent1"/>
+          </a:lnRef>
+          <a:fillRef idx="3">
+            <a:schemeClr val="accent1"/>
+          </a:fillRef>
+          <a:effectRef idx="2">
+            <a:schemeClr val="accent1"/>
+          </a:effectRef>
+          <a:fontRef idx="minor">
+            <a:schemeClr val="lt1"/>
+          </a:fontRef>
+        </p:style>
+        <p:txBody>
+          <a:bodyPr rtlCol="0" anchor="ctr"/>
+          <a:lstStyle/>
+          <a:p>
+            <a:pPr algn="ctr"/>
+          </a:p>
+        </p:txBody>
+      </p:sp>
+      <p:sp>
+        <p:nvSpPr>
+          <p:cNvPr id="13" name="Rounded Rectangle 12"/>
+          <p:cNvSpPr/>
+          <p:nvPr/>
+        </p:nvSpPr>
+        <p:spPr>
+          <a:xfrm>
+            <a:off x="731520" y="2926080"/>
+            <a:ext cx="5303520" cy="45720"/>
+          </a:xfrm>
+          <a:prstGeom prst="roundRect">
+            <a:avLst/>
+          </a:prstGeom>
+          <a:solidFill>
+            <a:srgbClr val="F59E0B"/>
+          </a:solidFill>
+          <a:ln>
+            <a:noFill/>
+          </a:ln>
+        </p:spPr>
+        <p:style>
+          <a:lnRef idx="1">
+            <a:schemeClr val="accent1"/>
+          </a:lnRef>
+          <a:fillRef idx="3">
+            <a:schemeClr val="accent1"/>
+          </a:fillRef>
+          <a:effectRef idx="2">
+            <a:schemeClr val="accent1"/>
+          </a:effectRef>
+          <a:fontRef idx="minor">
+            <a:schemeClr val="lt1"/>
+          </a:fontRef>
+        </p:style>
+        <p:txBody>
+          <a:bodyPr rtlCol="0" anchor="ctr"/>
+          <a:lstStyle/>
+          <a:p>
+            <a:pPr algn="ctr"/>
+          </a:p>
+        </p:txBody>
+      </p:sp>
+      <p:sp>
+        <p:nvSpPr>
+          <p:cNvPr id="14" name="TextBox 13"/>
+          <p:cNvSpPr txBox="1"/>
+          <p:nvPr/>
+        </p:nvSpPr>
+        <p:spPr>
+          <a:xfrm>
+            <a:off x="914400" y="3035808"/>
+            <a:ext cx="4937760" cy="274320"/>
+          </a:xfrm>
+          <a:prstGeom prst="rect">
+            <a:avLst/>
+          </a:prstGeom>
+          <a:noFill/>
+        </p:spPr>
+        <p:txBody>
+          <a:bodyPr wrap="square">
+            <a:spAutoFit/>
+          </a:bodyPr>
+          <a:lstStyle/>
+          <a:p>
+            <a:pPr algn="l">
+              <a:defRPr sz="1300" b="1">
+                <a:solidFill>
+                  <a:srgbClr val="0F172A"/>
+                </a:solidFill>
+              </a:defRPr>
+            </a:pPr>
+            <a:r>
+              <a:t>为什么用 SSE 而非 WebSocket？</a:t>
+            </a:r>
+          </a:p>
+        </p:txBody>
+      </p:sp>
+      <p:sp>
+        <p:nvSpPr>
+          <p:cNvPr id="15" name="TextBox 14"/>
+          <p:cNvSpPr txBox="1"/>
+          <p:nvPr/>
+        </p:nvSpPr>
+        <p:spPr>
+          <a:xfrm>
+            <a:off x="914400" y="3429000"/>
+            <a:ext cx="4937760" cy="868680"/>
+          </a:xfrm>
+          <a:prstGeom prst="rect">
+            <a:avLst/>
+          </a:prstGeom>
+          <a:noFill/>
+        </p:spPr>
+        <p:txBody>
+          <a:bodyPr wrap="square">
+            <a:spAutoFit/>
+          </a:bodyPr>
+          <a:lstStyle/>
+          <a:p>
+            <a:pPr algn="l">
+              <a:defRPr sz="1100" b="0">
+                <a:solidFill>
+                  <a:srgbClr val="64748B"/>
+                </a:solidFill>
+              </a:defRPr>
+            </a:pPr>
+            <a:r>
+              <a:t>前端只需单向接收推送；SSE 基于 HTTP 无需协议升级；浏览器原生断线重连；实现复杂度远低于 WebSocket</a:t>
+            </a:r>
+          </a:p>
+        </p:txBody>
+      </p:sp>
+      <p:sp>
+        <p:nvSpPr>
+          <p:cNvPr id="16" name="Rounded Rectangle 15"/>
+          <p:cNvSpPr/>
+          <p:nvPr/>
+        </p:nvSpPr>
+        <p:spPr>
+          <a:xfrm>
+            <a:off x="6400800" y="2926080"/>
+            <a:ext cx="5303520" cy="1463040"/>
+          </a:xfrm>
+          <a:prstGeom prst="roundRect">
+            <a:avLst/>
+          </a:prstGeom>
+          <a:solidFill>
+            <a:srgbClr val="FFFFFF"/>
+          </a:solidFill>
+          <a:ln w="12700">
+            <a:solidFill>
+              <a:srgbClr val="E2E8F0"/>
+            </a:solidFill>
+          </a:ln>
+        </p:spPr>
+        <p:style>
+          <a:lnRef idx="1">
+            <a:schemeClr val="accent1"/>
+          </a:lnRef>
+          <a:fillRef idx="3">
+            <a:schemeClr val="accent1"/>
+          </a:fillRef>
+          <a:effectRef idx="2">
+            <a:schemeClr val="accent1"/>
+          </a:effectRef>
+          <a:fontRef idx="minor">
+            <a:schemeClr val="lt1"/>
+          </a:fontRef>
+        </p:style>
+        <p:txBody>
+          <a:bodyPr rtlCol="0" anchor="ctr"/>
+          <a:lstStyle/>
+          <a:p>
+            <a:pPr algn="ctr"/>
+          </a:p>
+        </p:txBody>
+      </p:sp>
+      <p:sp>
+        <p:nvSpPr>
+          <p:cNvPr id="17" name="Rounded Rectangle 16"/>
+          <p:cNvSpPr/>
+          <p:nvPr/>
+        </p:nvSpPr>
+        <p:spPr>
+          <a:xfrm>
+            <a:off x="6400800" y="2926080"/>
+            <a:ext cx="5303520" cy="45720"/>
+          </a:xfrm>
+          <a:prstGeom prst="roundRect">
+            <a:avLst/>
+          </a:prstGeom>
+          <a:solidFill>
+            <a:srgbClr val="EF4444"/>
+          </a:solidFill>
+          <a:ln>
+            <a:noFill/>
+          </a:ln>
+        </p:spPr>
+        <p:style>
+          <a:lnRef idx="1">
+            <a:schemeClr val="accent1"/>
+          </a:lnRef>
+          <a:fillRef idx="3">
+            <a:schemeClr val="accent1"/>
+          </a:fillRef>
+          <a:effectRef idx="2">
+            <a:schemeClr val="accent1"/>
+          </a:effectRef>
+          <a:fontRef idx="minor">
+            <a:schemeClr val="lt1"/>
+          </a:fontRef>
+        </p:style>
+        <p:txBody>
+          <a:bodyPr rtlCol="0" anchor="ctr"/>
+          <a:lstStyle/>
+          <a:p>
+            <a:pPr algn="ctr"/>
+          </a:p>
+        </p:txBody>
+      </p:sp>
+      <p:sp>
+        <p:nvSpPr>
+          <p:cNvPr id="18" name="TextBox 17"/>
+          <p:cNvSpPr txBox="1"/>
+          <p:nvPr/>
+        </p:nvSpPr>
+        <p:spPr>
+          <a:xfrm>
+            <a:off x="6583680" y="3035808"/>
+            <a:ext cx="4937760" cy="274320"/>
+          </a:xfrm>
+          <a:prstGeom prst="rect">
+            <a:avLst/>
+          </a:prstGeom>
+          <a:noFill/>
+        </p:spPr>
+        <p:txBody>
+          <a:bodyPr wrap="square">
+            <a:spAutoFit/>
+          </a:bodyPr>
+          <a:lstStyle/>
+          <a:p>
+            <a:pPr algn="l">
+              <a:defRPr sz="1300" b="1">
+                <a:solidFill>
+                  <a:srgbClr val="0F172A"/>
+                </a:solidFill>
+              </a:defRPr>
+            </a:pPr>
+            <a:r>
+              <a:t>为什么需要去抖迟滞？</a:t>
+            </a:r>
+          </a:p>
+        </p:txBody>
+      </p:sp>
+      <p:sp>
+        <p:nvSpPr>
+          <p:cNvPr id="19" name="TextBox 18"/>
+          <p:cNvSpPr txBox="1"/>
+          <p:nvPr/>
+        </p:nvSpPr>
+        <p:spPr>
+          <a:xfrm>
+            <a:off x="6583680" y="3429000"/>
+            <a:ext cx="4937760" cy="868680"/>
+          </a:xfrm>
+          <a:prstGeom prst="rect">
+            <a:avLst/>
+          </a:prstGeom>
+          <a:noFill/>
+        </p:spPr>
+        <p:txBody>
+          <a:bodyPr wrap="square">
+            <a:spAutoFit/>
+          </a:bodyPr>
+          <a:lstStyle/>
+          <a:p>
+            <a:pPr algn="l">
+              <a:defRPr sz="1100" b="0">
+                <a:solidFill>
+                  <a:srgbClr val="64748B"/>
+                </a:solidFill>
+              </a:defRPr>
+            </a:pPr>
+            <a:r>
+              <a:t>传感器噪声和瞬态工况导致等级边界抖动；上升快速确认（3次），恢复慢速确认（5次），符合工业"报警容易解除难"需求</a:t>
+            </a:r>
+          </a:p>
+        </p:txBody>
+      </p:sp>
+      <p:sp>
+        <p:nvSpPr>
+          <p:cNvPr id="20" name="Rounded Rectangle 19"/>
+          <p:cNvSpPr/>
+          <p:nvPr/>
+        </p:nvSpPr>
+        <p:spPr>
+          <a:xfrm>
+            <a:off x="731520" y="4572000"/>
+            <a:ext cx="5303520" cy="1463040"/>
+          </a:xfrm>
+          <a:prstGeom prst="roundRect">
+            <a:avLst/>
+          </a:prstGeom>
+          <a:solidFill>
+            <a:srgbClr val="FFFFFF"/>
+          </a:solidFill>
+          <a:ln w="12700">
+            <a:solidFill>
+              <a:srgbClr val="E2E8F0"/>
+            </a:solidFill>
+          </a:ln>
+        </p:spPr>
+        <p:style>
+          <a:lnRef idx="1">
+            <a:schemeClr val="accent1"/>
+          </a:lnRef>
+          <a:fillRef idx="3">
+            <a:schemeClr val="accent1"/>
+          </a:fillRef>
+          <a:effectRef idx="2">
+            <a:schemeClr val="accent1"/>
+          </a:effectRef>
+          <a:fontRef idx="minor">
+            <a:schemeClr val="lt1"/>
+          </a:fontRef>
+        </p:style>
+        <p:txBody>
+          <a:bodyPr rtlCol="0" anchor="ctr"/>
+          <a:lstStyle/>
+          <a:p>
+            <a:pPr algn="ctr"/>
+          </a:p>
+        </p:txBody>
+      </p:sp>
+      <p:sp>
+        <p:nvSpPr>
+          <p:cNvPr id="21" name="Rounded Rectangle 20"/>
+          <p:cNvSpPr/>
+          <p:nvPr/>
+        </p:nvSpPr>
+        <p:spPr>
+          <a:xfrm>
+            <a:off x="731520" y="4572000"/>
+            <a:ext cx="5303520" cy="45720"/>
+          </a:xfrm>
+          <a:prstGeom prst="roundRect">
+            <a:avLst/>
+          </a:prstGeom>
+          <a:solidFill>
+            <a:srgbClr val="8B5CF6"/>
+          </a:solidFill>
+          <a:ln>
+            <a:noFill/>
+          </a:ln>
+        </p:spPr>
+        <p:style>
+          <a:lnRef idx="1">
+            <a:schemeClr val="accent1"/>
+          </a:lnRef>
+          <a:fillRef idx="3">
+            <a:schemeClr val="accent1"/>
+          </a:fillRef>
+          <a:effectRef idx="2">
+            <a:schemeClr val="accent1"/>
+          </a:effectRef>
+          <a:fontRef idx="minor">
+            <a:schemeClr val="lt1"/>
+          </a:fontRef>
+        </p:style>
+        <p:txBody>
+          <a:bodyPr rtlCol="0" anchor="ctr"/>
+          <a:lstStyle/>
+          <a:p>
+            <a:pPr algn="ctr"/>
+          </a:p>
+        </p:txBody>
+      </p:sp>
+      <p:sp>
+        <p:nvSpPr>
+          <p:cNvPr id="22" name="TextBox 21"/>
+          <p:cNvSpPr txBox="1"/>
+          <p:nvPr/>
+        </p:nvSpPr>
+        <p:spPr>
+          <a:xfrm>
+            <a:off x="914400" y="4681728"/>
+            <a:ext cx="4937760" cy="274320"/>
+          </a:xfrm>
+          <a:prstGeom prst="rect">
+            <a:avLst/>
+          </a:prstGeom>
+          <a:noFill/>
+        </p:spPr>
+        <p:txBody>
+          <a:bodyPr wrap="square">
+            <a:spAutoFit/>
+          </a:bodyPr>
+          <a:lstStyle/>
+          <a:p>
+            <a:pPr algn="l">
+              <a:defRPr sz="1300" b="1">
+                <a:solidFill>
+                  <a:srgbClr val="0F172A"/>
+                </a:solidFill>
+              </a:defRPr>
+            </a:pPr>
+            <a:r>
+              <a:t>为什么用时间序列分割？</a:t>
+            </a:r>
+          </a:p>
+        </p:txBody>
+      </p:sp>
+      <p:sp>
+        <p:nvSpPr>
+          <p:cNvPr id="23" name="TextBox 22"/>
+          <p:cNvSpPr txBox="1"/>
+          <p:nvPr/>
+        </p:nvSpPr>
+        <p:spPr>
+          <a:xfrm>
+            <a:off x="914400" y="5074920"/>
+            <a:ext cx="4937760" cy="868680"/>
+          </a:xfrm>
+          <a:prstGeom prst="rect">
+            <a:avLst/>
+          </a:prstGeom>
+          <a:noFill/>
+        </p:spPr>
+        <p:txBody>
+          <a:bodyPr wrap="square">
+            <a:spAutoFit/>
+          </a:bodyPr>
+          <a:lstStyle/>
+          <a:p>
+            <a:pPr algn="l">
+              <a:defRPr sz="1100" b="0">
+                <a:solidFill>
+                  <a:srgbClr val="64748B"/>
+                </a:solidFill>
+              </a:defRPr>
+            </a:pPr>
+            <a:r>
+              <a:t>避免随机切分导致未来信息泄露到训练集，使评估结果更接近真实在线部署场景，每个 asset 独立切分保证评估严谨性</a:t>
+            </a:r>
+          </a:p>
+        </p:txBody>
+      </p:sp>
+      <p:sp>
+        <p:nvSpPr>
+          <p:cNvPr id="24" name="Rounded Rectangle 23"/>
+          <p:cNvSpPr/>
+          <p:nvPr/>
+        </p:nvSpPr>
+        <p:spPr>
+          <a:xfrm>
+            <a:off x="6400800" y="4572000"/>
+            <a:ext cx="5303520" cy="1463040"/>
+          </a:xfrm>
+          <a:prstGeom prst="roundRect">
+            <a:avLst/>
+          </a:prstGeom>
+          <a:solidFill>
+            <a:srgbClr val="FFFFFF"/>
+          </a:solidFill>
+          <a:ln w="12700">
+            <a:solidFill>
+              <a:srgbClr val="E2E8F0"/>
+            </a:solidFill>
+          </a:ln>
+        </p:spPr>
+        <p:style>
+          <a:lnRef idx="1">
+            <a:schemeClr val="accent1"/>
+          </a:lnRef>
+          <a:fillRef idx="3">
+            <a:schemeClr val="accent1"/>
+          </a:fillRef>
+          <a:effectRef idx="2">
+            <a:schemeClr val="accent1"/>
+          </a:effectRef>
+          <a:fontRef idx="minor">
+            <a:schemeClr val="lt1"/>
+          </a:fontRef>
+        </p:style>
+        <p:txBody>
+          <a:bodyPr rtlCol="0" anchor="ctr"/>
+          <a:lstStyle/>
+          <a:p>
+            <a:pPr algn="ctr"/>
+          </a:p>
+        </p:txBody>
+      </p:sp>
+      <p:sp>
+        <p:nvSpPr>
+          <p:cNvPr id="25" name="Rounded Rectangle 24"/>
+          <p:cNvSpPr/>
+          <p:nvPr/>
+        </p:nvSpPr>
+        <p:spPr>
+          <a:xfrm>
+            <a:off x="6400800" y="4572000"/>
+            <a:ext cx="5303520" cy="45720"/>
+          </a:xfrm>
+          <a:prstGeom prst="roundRect">
+            <a:avLst/>
+          </a:prstGeom>
+          <a:solidFill>
+            <a:srgbClr val="EC4899"/>
+          </a:solidFill>
+          <a:ln>
+            <a:noFill/>
+          </a:ln>
+        </p:spPr>
+        <p:style>
+          <a:lnRef idx="1">
+            <a:schemeClr val="accent1"/>
+          </a:lnRef>
+          <a:fillRef idx="3">
+            <a:schemeClr val="accent1"/>
+          </a:fillRef>
+          <a:effectRef idx="2">
+            <a:schemeClr val="accent1"/>
+          </a:effectRef>
+          <a:fontRef idx="minor">
+            <a:schemeClr val="lt1"/>
+          </a:fontRef>
+        </p:style>
+        <p:txBody>
+          <a:bodyPr rtlCol="0" anchor="ctr"/>
+          <a:lstStyle/>
+          <a:p>
+            <a:pPr algn="ctr"/>
+          </a:p>
+        </p:txBody>
+      </p:sp>
+      <p:sp>
+        <p:nvSpPr>
+          <p:cNvPr id="26" name="TextBox 25"/>
+          <p:cNvSpPr txBox="1"/>
+          <p:nvPr/>
+        </p:nvSpPr>
+        <p:spPr>
+          <a:xfrm>
+            <a:off x="6583680" y="4681728"/>
+            <a:ext cx="4937760" cy="274320"/>
+          </a:xfrm>
+          <a:prstGeom prst="rect">
+            <a:avLst/>
+          </a:prstGeom>
+          <a:noFill/>
+        </p:spPr>
+        <p:txBody>
+          <a:bodyPr wrap="square">
+            <a:spAutoFit/>
+          </a:bodyPr>
+          <a:lstStyle/>
+          <a:p>
+            <a:pPr algn="l">
+              <a:defRPr sz="1300" b="1">
+                <a:solidFill>
+                  <a:srgbClr val="0F172A"/>
+                </a:solidFill>
+              </a:defRPr>
+            </a:pPr>
+            <a:r>
+              <a:t>为什么 feature_set=online？</a:t>
+            </a:r>
+          </a:p>
+        </p:txBody>
+      </p:sp>
+      <p:sp>
+        <p:nvSpPr>
+          <p:cNvPr id="27" name="TextBox 26"/>
+          <p:cNvSpPr txBox="1"/>
+          <p:nvPr/>
+        </p:nvSpPr>
+        <p:spPr>
+          <a:xfrm>
+            <a:off x="6583680" y="5074920"/>
+            <a:ext cx="4937760" cy="868680"/>
+          </a:xfrm>
+          <a:prstGeom prst="rect">
+            <a:avLst/>
+          </a:prstGeom>
+          <a:noFill/>
+        </p:spPr>
+        <p:txBody>
+          <a:bodyPr wrap="square">
+            <a:spAutoFit/>
+          </a:bodyPr>
+          <a:lstStyle/>
+          <a:p>
+            <a:pPr algn="l">
+              <a:defRPr sz="1100" b="0">
+                <a:solidFill>
+                  <a:srgbClr val="64748B"/>
+                </a:solidFill>
+              </a:defRPr>
+            </a:pPr>
+            <a:r>
+              <a:t>训练时只用在线打分可实时计算的特征列，避免大量离线特征被中位数填充成常数，导致预测结果长期不变化</a:t>
+            </a:r>
+          </a:p>
+        </p:txBody>
+      </p:sp>
+      <p:sp>
+        <p:nvSpPr>
+          <p:cNvPr id="28" name="Rounded Rectangle 27"/>
+          <p:cNvSpPr/>
+          <p:nvPr/>
+        </p:nvSpPr>
+        <p:spPr>
+          <a:xfrm>
+            <a:off x="731520" y="6309360"/>
+            <a:ext cx="10698480" cy="0"/>
+          </a:xfrm>
+          <a:prstGeom prst="roundRect">
+            <a:avLst/>
+          </a:prstGeom>
+          <a:solidFill>
+            <a:srgbClr val="FFFBEB"/>
+          </a:solidFill>
+          <a:ln w="12700">
+            <a:solidFill>
+              <a:srgbClr val="FDE68A"/>
+            </a:solidFill>
+          </a:ln>
+        </p:spPr>
+        <p:style>
+          <a:lnRef idx="1">
+            <a:schemeClr val="accent1"/>
+          </a:lnRef>
+          <a:fillRef idx="3">
+            <a:schemeClr val="accent1"/>
+          </a:fillRef>
+          <a:effectRef idx="2">
+            <a:schemeClr val="accent1"/>
+          </a:effectRef>
+          <a:fontRef idx="minor">
+            <a:schemeClr val="lt1"/>
+          </a:fontRef>
+        </p:style>
+        <p:txBody>
+          <a:bodyPr rtlCol="0" anchor="ctr"/>
+          <a:lstStyle/>
+          <a:p>
+            <a:pPr algn="ctr"/>
+          </a:p>
+        </p:txBody>
+      </p:sp>
+      <p:sp>
+        <p:nvSpPr>
+          <p:cNvPr id="29" name="Rounded Rectangle 28"/>
+          <p:cNvSpPr/>
+          <p:nvPr/>
+        </p:nvSpPr>
+        <p:spPr>
+          <a:xfrm>
+            <a:off x="731520" y="6309360"/>
+            <a:ext cx="54864" cy="0"/>
+          </a:xfrm>
+          <a:prstGeom prst="roundRect">
+            <a:avLst/>
+          </a:prstGeom>
+          <a:solidFill>
+            <a:srgbClr val="F59E0B"/>
+          </a:solidFill>
+          <a:ln>
+            <a:noFill/>
+          </a:ln>
+        </p:spPr>
+        <p:style>
+          <a:lnRef idx="1">
+            <a:schemeClr val="accent1"/>
+          </a:lnRef>
+          <a:fillRef idx="3">
+            <a:schemeClr val="accent1"/>
+          </a:fillRef>
+          <a:effectRef idx="2">
+            <a:schemeClr val="accent1"/>
+          </a:effectRef>
+          <a:fontRef idx="minor">
+            <a:schemeClr val="lt1"/>
+          </a:fontRef>
+        </p:style>
+        <p:txBody>
+          <a:bodyPr rtlCol="0" anchor="ctr"/>
+          <a:lstStyle/>
+          <a:p>
+            <a:pPr algn="ctr"/>
+          </a:p>
+        </p:txBody>
+      </p:sp>
+      <p:sp>
+        <p:nvSpPr>
+          <p:cNvPr id="30" name="TextBox 29"/>
+          <p:cNvSpPr txBox="1"/>
+          <p:nvPr/>
+        </p:nvSpPr>
+        <p:spPr>
+          <a:xfrm>
+            <a:off x="914400" y="6355080"/>
+            <a:ext cx="10378440" cy="-91440"/>
+          </a:xfrm>
+          <a:prstGeom prst="rect">
+            <a:avLst/>
+          </a:prstGeom>
+          <a:noFill/>
+        </p:spPr>
+        <p:txBody>
+          <a:bodyPr wrap="square">
+            <a:spAutoFit/>
+          </a:bodyPr>
+          <a:lstStyle/>
+          <a:p>
+            <a:pPr algn="l">
+              <a:defRPr sz="1100" b="0">
+                <a:solidFill>
+                  <a:srgbClr val="92400E"/>
+                </a:solidFill>
+              </a:defRPr>
+            </a:pPr>
+          </a:p>
+        </p:txBody>
+      </p:sp>
+      <p:sp>
+        <p:nvSpPr>
+          <p:cNvPr id="31" name="TextBox 30"/>
+          <p:cNvSpPr txBox="1"/>
+          <p:nvPr/>
+        </p:nvSpPr>
+        <p:spPr>
+          <a:xfrm>
+            <a:off x="731520" y="6309360"/>
+            <a:ext cx="10698480" cy="0"/>
+          </a:xfrm>
+          <a:prstGeom prst="rect">
+            <a:avLst/>
+          </a:prstGeom>
+          <a:noFill/>
+        </p:spPr>
+        <p:txBody>
+          <a:bodyPr wrap="square">
+            <a:spAutoFit/>
+          </a:bodyPr>
+          <a:lstStyle/>
+          <a:p>
+            <a:pPr algn="l">
+              <a:defRPr sz="800" b="0">
+                <a:solidFill>
+                  <a:srgbClr val="92400E"/>
+                </a:solidFill>
+              </a:defRPr>
+            </a:pPr>
+          </a:p>
+        </p:txBody>
+      </p:sp>
+      <p:sp>
+        <p:nvSpPr>
+          <p:cNvPr id="32" name="TextBox 31"/>
+          <p:cNvSpPr txBox="1"/>
+          <p:nvPr/>
+        </p:nvSpPr>
+        <p:spPr>
+          <a:xfrm>
+            <a:off x="10515600" y="6492240"/>
+            <a:ext cx="1371600" cy="274320"/>
+          </a:xfrm>
+          <a:prstGeom prst="rect">
+            <a:avLst/>
+          </a:prstGeom>
+          <a:noFill/>
+        </p:spPr>
+        <p:txBody>
+          <a:bodyPr wrap="square">
+            <a:spAutoFit/>
+          </a:bodyPr>
+          <a:lstStyle/>
+          <a:p>
             <a:pPr algn="r">
               <a:defRPr sz="1000" b="0">
                 <a:solidFill>
@@ -6465,7 +8398,7 @@
               </a:defRPr>
             </a:pPr>
             <a:r>
-              <a:t>15 / 17</a:t>
+              <a:t>15 / 19</a:t>
             </a:r>
           </a:p>
         </p:txBody>
@@ -6479,6 +8412,137 @@
 </file>
 
 <file path=ppt/slides/slide16.xml><?xml version="1.0" encoding="utf-8"?>
+<p:sld xmlns:a="http://schemas.openxmlformats.org/drawingml/2006/main" xmlns:p="http://schemas.openxmlformats.org/presentationml/2006/main" xmlns:r="http://schemas.openxmlformats.org/officeDocument/2006/relationships">
+  <p:cSld>
+    <p:bg>
+      <p:bgPr>
+        <a:solidFill>
+          <a:srgbClr val="0F172A"/>
+        </a:solidFill>
+        <a:effectLst/>
+      </p:bgPr>
+    </p:bg>
+    <p:spTree>
+      <p:nvGrpSpPr>
+        <p:cNvPr id="1" name=""/>
+        <p:cNvGrpSpPr/>
+        <p:nvPr/>
+      </p:nvGrpSpPr>
+      <p:grpSpPr/>
+      <p:sp>
+        <p:nvSpPr>
+          <p:cNvPr id="2" name="TextBox 1"/>
+          <p:cNvSpPr txBox="1"/>
+          <p:nvPr/>
+        </p:nvSpPr>
+        <p:spPr>
+          <a:xfrm>
+            <a:off x="914400" y="2377440"/>
+            <a:ext cx="10332720" cy="1097280"/>
+          </a:xfrm>
+          <a:prstGeom prst="rect">
+            <a:avLst/>
+          </a:prstGeom>
+          <a:noFill/>
+        </p:spPr>
+        <p:txBody>
+          <a:bodyPr wrap="square">
+            <a:spAutoFit/>
+          </a:bodyPr>
+          <a:lstStyle/>
+          <a:p>
+            <a:pPr algn="ctr">
+              <a:defRPr sz="4200" b="1">
+                <a:solidFill>
+                  <a:srgbClr val="FFFFFF"/>
+                </a:solidFill>
+              </a:defRPr>
+            </a:pPr>
+            <a:r>
+              <a:t>部署与扩展</a:t>
+            </a:r>
+          </a:p>
+        </p:txBody>
+      </p:sp>
+      <p:sp>
+        <p:nvSpPr>
+          <p:cNvPr id="3" name="TextBox 2"/>
+          <p:cNvSpPr txBox="1"/>
+          <p:nvPr/>
+        </p:nvSpPr>
+        <p:spPr>
+          <a:xfrm>
+            <a:off x="914400" y="3566160"/>
+            <a:ext cx="10332720" cy="731520"/>
+          </a:xfrm>
+          <a:prstGeom prst="rect">
+            <a:avLst/>
+          </a:prstGeom>
+          <a:noFill/>
+        </p:spPr>
+        <p:txBody>
+          <a:bodyPr wrap="square">
+            <a:spAutoFit/>
+          </a:bodyPr>
+          <a:lstStyle/>
+          <a:p>
+            <a:pPr algn="ctr">
+              <a:defRPr sz="1800" b="0">
+                <a:solidFill>
+                  <a:srgbClr val="64748B"/>
+                </a:solidFill>
+              </a:defRPr>
+            </a:pPr>
+            <a:r>
+              <a:t>一键启动 · Docker 部署 · 接入真实设备 · 模型替换</a:t>
+            </a:r>
+          </a:p>
+        </p:txBody>
+      </p:sp>
+      <p:sp>
+        <p:nvSpPr>
+          <p:cNvPr id="4" name="TextBox 3"/>
+          <p:cNvSpPr txBox="1"/>
+          <p:nvPr/>
+        </p:nvSpPr>
+        <p:spPr>
+          <a:xfrm>
+            <a:off x="10515600" y="6492240"/>
+            <a:ext cx="1371600" cy="274320"/>
+          </a:xfrm>
+          <a:prstGeom prst="rect">
+            <a:avLst/>
+          </a:prstGeom>
+          <a:noFill/>
+        </p:spPr>
+        <p:txBody>
+          <a:bodyPr wrap="square">
+            <a:spAutoFit/>
+          </a:bodyPr>
+          <a:lstStyle/>
+          <a:p>
+            <a:pPr algn="r">
+              <a:defRPr sz="1000" b="0">
+                <a:solidFill>
+                  <a:srgbClr val="64748B"/>
+                </a:solidFill>
+              </a:defRPr>
+            </a:pPr>
+            <a:r>
+              <a:t>16 / 19</a:t>
+            </a:r>
+          </a:p>
+        </p:txBody>
+      </p:sp>
+    </p:spTree>
+  </p:cSld>
+  <p:clrMapOvr>
+    <a:masterClrMapping/>
+  </p:clrMapOvr>
+</p:sld>
+</file>
+
+<file path=ppt/slides/slide17.xml><?xml version="1.0" encoding="utf-8"?>
 <p:sld xmlns:a="http://schemas.openxmlformats.org/drawingml/2006/main" xmlns:p="http://schemas.openxmlformats.org/presentationml/2006/main" xmlns:r="http://schemas.openxmlformats.org/officeDocument/2006/relationships">
   <p:cSld>
     <p:bg>
@@ -6526,7 +8590,7 @@
               </a:defRPr>
             </a:pPr>
             <a:r>
-              <a:t>技术栈总览</a:t>
+              <a:t>部署方案 + 扩展指南</a:t>
             </a:r>
           </a:p>
         </p:txBody>
@@ -6561,7 +8625,7 @@
               </a:defRPr>
             </a:pPr>
             <a:r>
-              <a:t>项目依赖全景图</a:t>
+              <a:t>从开发到生产，从仿真到真实</a:t>
             </a:r>
           </a:p>
         </p:txBody>
@@ -6575,7 +8639,7 @@
         <p:spPr>
           <a:xfrm>
             <a:off x="731520" y="1280160"/>
-            <a:ext cx="3566160" cy="2011680"/>
+            <a:ext cx="5303520" cy="1463040"/>
           </a:xfrm>
           <a:prstGeom prst="roundRect">
             <a:avLst/>
@@ -6618,7 +8682,7 @@
               </a:defRPr>
             </a:pPr>
             <a:r>
-              <a:t>Python 核心</a:t>
+              <a:t>一键启动</a:t>
             </a:r>
           </a:p>
           <a:p>
@@ -6626,14 +8690,14 @@
               <a:spcAft>
                 <a:spcPts val="200"/>
               </a:spcAft>
-              <a:defRPr sz="1100">
-                <a:solidFill>
-                  <a:srgbClr val="64748B"/>
-                </a:solidFill>
-              </a:defRPr>
-            </a:pPr>
-            <a:r>
-              <a:t>• numpy + pandas 数据处理</a:t>
+              <a:defRPr sz="1000">
+                <a:solidFill>
+                  <a:srgbClr val="64748B"/>
+                </a:solidFill>
+              </a:defRPr>
+            </a:pPr>
+            <a:r>
+              <a:t>$ bash start.sh</a:t>
             </a:r>
           </a:p>
           <a:p>
@@ -6641,29 +8705,26 @@
               <a:spcAft>
                 <a:spcPts val="200"/>
               </a:spcAft>
-              <a:defRPr sz="1100">
-                <a:solidFill>
-                  <a:srgbClr val="64748B"/>
-                </a:solidFill>
-              </a:defRPr>
-            </a:pPr>
-            <a:r>
-              <a:t>• scikit-learn 决策树</a:t>
-            </a:r>
+              <a:defRPr sz="1000">
+                <a:solidFill>
+                  <a:srgbClr val="64748B"/>
+                </a:solidFill>
+              </a:defRPr>
+            </a:pPr>
           </a:p>
           <a:p>
             <a:pPr>
               <a:spcAft>
                 <a:spcPts val="200"/>
               </a:spcAft>
-              <a:defRPr sz="1100">
-                <a:solidFill>
-                  <a:srgbClr val="64748B"/>
-                </a:solidFill>
-              </a:defRPr>
-            </a:pPr>
-            <a:r>
-              <a:t>• joblib 模型持久化</a:t>
+              <a:defRPr sz="1000">
+                <a:solidFill>
+                  <a:srgbClr val="64748B"/>
+                </a:solidFill>
+              </a:defRPr>
+            </a:pPr>
+            <a:r>
+              <a:t>启动后访问:</a:t>
             </a:r>
           </a:p>
           <a:p>
@@ -6671,14 +8732,44 @@
               <a:spcAft>
                 <a:spcPts val="200"/>
               </a:spcAft>
-              <a:defRPr sz="1100">
-                <a:solidFill>
-                  <a:srgbClr val="64748B"/>
-                </a:solidFill>
-              </a:defRPr>
-            </a:pPr>
-            <a:r>
-              <a:t>• rich CLI 美化</a:t>
+              <a:defRPr sz="1000">
+                <a:solidFill>
+                  <a:srgbClr val="64748B"/>
+                </a:solidFill>
+              </a:defRPr>
+            </a:pPr>
+            <a:r>
+              <a:t>  前端 http://localhost:5173</a:t>
+            </a:r>
+          </a:p>
+          <a:p>
+            <a:pPr>
+              <a:spcAft>
+                <a:spcPts val="200"/>
+              </a:spcAft>
+              <a:defRPr sz="1000">
+                <a:solidFill>
+                  <a:srgbClr val="64748B"/>
+                </a:solidFill>
+              </a:defRPr>
+            </a:pPr>
+            <a:r>
+              <a:t>  后端 http://localhost:5000</a:t>
+            </a:r>
+          </a:p>
+          <a:p>
+            <a:pPr>
+              <a:spcAft>
+                <a:spcPts val="200"/>
+              </a:spcAft>
+              <a:defRPr sz="1000">
+                <a:solidFill>
+                  <a:srgbClr val="64748B"/>
+                </a:solidFill>
+              </a:defRPr>
+            </a:pPr>
+            <a:r>
+              <a:t>  账号 admin / admin123</a:t>
             </a:r>
           </a:p>
         </p:txBody>
@@ -6691,8 +8782,84 @@
         </p:nvSpPr>
         <p:spPr>
           <a:xfrm>
-            <a:off x="4572000" y="1280160"/>
-            <a:ext cx="3566160" cy="2011680"/>
+            <a:off x="6400800" y="1280160"/>
+            <a:ext cx="5303520" cy="1463040"/>
+          </a:xfrm>
+          <a:prstGeom prst="roundRect">
+            <a:avLst/>
+          </a:prstGeom>
+          <a:solidFill>
+            <a:srgbClr val="1E293B"/>
+          </a:solidFill>
+          <a:ln>
+            <a:noFill/>
+          </a:ln>
+        </p:spPr>
+        <p:style>
+          <a:lnRef idx="1">
+            <a:schemeClr val="accent1"/>
+          </a:lnRef>
+          <a:fillRef idx="3">
+            <a:schemeClr val="accent1"/>
+          </a:fillRef>
+          <a:effectRef idx="2">
+            <a:schemeClr val="accent1"/>
+          </a:effectRef>
+          <a:fontRef idx="minor">
+            <a:schemeClr val="lt1"/>
+          </a:fontRef>
+        </p:style>
+        <p:txBody>
+          <a:bodyPr rtlCol="0" anchor="ctr" wrap="square" lIns="182880" tIns="109728" bIns="109728"/>
+          <a:lstStyle/>
+          <a:p>
+            <a:pPr algn="ctr">
+              <a:spcAft>
+                <a:spcPts val="100"/>
+              </a:spcAft>
+              <a:defRPr sz="1000">
+                <a:solidFill>
+                  <a:srgbClr val="E2E8F0"/>
+                </a:solidFill>
+                <a:latin typeface="Courier New"/>
+              </a:defRPr>
+            </a:pPr>
+            <a:r>
+              <a:t># Docker Compose</a:t>
+            </a:r>
+            <a:br/>
+            <a:r>
+              <a:t>services:</a:t>
+            </a:r>
+            <a:br/>
+            <a:r>
+              <a:t>  emqx:   image: emqx/emqx</a:t>
+            </a:r>
+            <a:br/>
+            <a:r>
+              <a:t>  mysql:  image: mysql:8</a:t>
+            </a:r>
+            <a:br/>
+            <a:r>
+              <a:t>  backend:  build: .</a:t>
+            </a:r>
+            <a:br/>
+            <a:r>
+              <a:t>  frontend: build: ./frontend</a:t>
+            </a:r>
+          </a:p>
+        </p:txBody>
+      </p:sp>
+      <p:sp>
+        <p:nvSpPr>
+          <p:cNvPr id="6" name="Rounded Rectangle 5"/>
+          <p:cNvSpPr/>
+          <p:nvPr/>
+        </p:nvSpPr>
+        <p:spPr>
+          <a:xfrm>
+            <a:off x="731520" y="2926080"/>
+            <a:ext cx="5303520" cy="2011680"/>
           </a:xfrm>
           <a:prstGeom prst="roundRect">
             <a:avLst/>
@@ -6735,7 +8902,7 @@
               </a:defRPr>
             </a:pPr>
             <a:r>
-              <a:t>网络与通信</a:t>
+              <a:t>接入真实设备 — 零代码改动</a:t>
             </a:r>
           </a:p>
           <a:p>
@@ -6743,14 +8910,14 @@
               <a:spcAft>
                 <a:spcPts val="200"/>
               </a:spcAft>
-              <a:defRPr sz="1100">
-                <a:solidFill>
-                  <a:srgbClr val="64748B"/>
-                </a:solidFill>
-              </a:defRPr>
-            </a:pPr>
-            <a:r>
-              <a:t>• EMQX MQTT Broker</a:t>
+              <a:defRPr sz="900">
+                <a:solidFill>
+                  <a:srgbClr val="64748B"/>
+                </a:solidFill>
+              </a:defRPr>
+            </a:pPr>
+            <a:r>
+              <a:t>只需确保 MQTT 消息格式一致：</a:t>
             </a:r>
           </a:p>
           <a:p>
@@ -6758,14 +8925,14 @@
               <a:spcAft>
                 <a:spcPts val="200"/>
               </a:spcAft>
-              <a:defRPr sz="1100">
-                <a:solidFill>
-                  <a:srgbClr val="64748B"/>
-                </a:solidFill>
-              </a:defRPr>
-            </a:pPr>
-            <a:r>
-              <a:t>• paho-mqtt 客户端</a:t>
+              <a:defRPr sz="900">
+                <a:solidFill>
+                  <a:srgbClr val="64748B"/>
+                </a:solidFill>
+              </a:defRPr>
+            </a:pPr>
+            <a:r>
+              <a:t>{</a:t>
             </a:r>
           </a:p>
           <a:p>
@@ -6773,14 +8940,14 @@
               <a:spcAft>
                 <a:spcPts val="200"/>
               </a:spcAft>
-              <a:defRPr sz="1100">
-                <a:solidFill>
-                  <a:srgbClr val="64748B"/>
-                </a:solidFill>
-              </a:defRPr>
-            </a:pPr>
-            <a:r>
-              <a:t>• Flask REST API</a:t>
+              <a:defRPr sz="900">
+                <a:solidFill>
+                  <a:srgbClr val="64748B"/>
+                </a:solidFill>
+              </a:defRPr>
+            </a:pPr>
+            <a:r>
+              <a:t>  "ts_ms": 1710000000000,</a:t>
             </a:r>
           </a:p>
           <a:p>
@@ -6788,28 +8955,88 @@
               <a:spcAft>
                 <a:spcPts val="200"/>
               </a:spcAft>
-              <a:defRPr sz="1100">
-                <a:solidFill>
-                  <a:srgbClr val="64748B"/>
-                </a:solidFill>
-              </a:defRPr>
-            </a:pPr>
-            <a:r>
-              <a:t>• SSE 事件推送</a:t>
-            </a:r>
-          </a:p>
-        </p:txBody>
-      </p:sp>
-      <p:sp>
-        <p:nvSpPr>
-          <p:cNvPr id="6" name="Rounded Rectangle 5"/>
+              <a:defRPr sz="900">
+                <a:solidFill>
+                  <a:srgbClr val="64748B"/>
+                </a:solidFill>
+              </a:defRPr>
+            </a:pPr>
+            <a:r>
+              <a:t>  "asset_id": "REAL-PUMP-001",</a:t>
+            </a:r>
+          </a:p>
+          <a:p>
+            <a:pPr>
+              <a:spcAft>
+                <a:spcPts val="200"/>
+              </a:spcAft>
+              <a:defRPr sz="900">
+                <a:solidFill>
+                  <a:srgbClr val="64748B"/>
+                </a:solidFill>
+              </a:defRPr>
+            </a:pPr>
+            <a:r>
+              <a:t>  "point": "temp_c", "value": 55.2,</a:t>
+            </a:r>
+          </a:p>
+          <a:p>
+            <a:pPr>
+              <a:spcAft>
+                <a:spcPts val="200"/>
+              </a:spcAft>
+              <a:defRPr sz="900">
+                <a:solidFill>
+                  <a:srgbClr val="64748B"/>
+                </a:solidFill>
+              </a:defRPr>
+            </a:pPr>
+            <a:r>
+              <a:t>  "quality": "good"</a:t>
+            </a:r>
+          </a:p>
+          <a:p>
+            <a:pPr>
+              <a:spcAft>
+                <a:spcPts val="200"/>
+              </a:spcAft>
+              <a:defRPr sz="900">
+                <a:solidFill>
+                  <a:srgbClr val="64748B"/>
+                </a:solidFill>
+              </a:defRPr>
+            </a:pPr>
+            <a:r>
+              <a:t>}</a:t>
+            </a:r>
+          </a:p>
+          <a:p>
+            <a:pPr>
+              <a:spcAft>
+                <a:spcPts val="200"/>
+              </a:spcAft>
+              <a:defRPr sz="900">
+                <a:solidFill>
+                  <a:srgbClr val="64748B"/>
+                </a:solidFill>
+              </a:defRPr>
+            </a:pPr>
+            <a:r>
+              <a:t>系统自动接收 → 存储 → 打分 → 推送</a:t>
+            </a:r>
+          </a:p>
+        </p:txBody>
+      </p:sp>
+      <p:sp>
+        <p:nvSpPr>
+          <p:cNvPr id="7" name="Rounded Rectangle 6"/>
           <p:cNvSpPr/>
           <p:nvPr/>
         </p:nvSpPr>
         <p:spPr>
           <a:xfrm>
-            <a:off x="8412480" y="1280160"/>
-            <a:ext cx="3566160" cy="2011680"/>
+            <a:off x="6400800" y="2926080"/>
+            <a:ext cx="5303520" cy="2011680"/>
           </a:xfrm>
           <a:prstGeom prst="roundRect">
             <a:avLst/>
@@ -6852,7 +9079,7 @@
               </a:defRPr>
             </a:pPr>
             <a:r>
-              <a:t>前端 + 数据库</a:t>
+              <a:t>扩展方向</a:t>
             </a:r>
           </a:p>
           <a:p>
@@ -6860,14 +9087,14 @@
               <a:spcAft>
                 <a:spcPts val="200"/>
               </a:spcAft>
-              <a:defRPr sz="1100">
-                <a:solidFill>
-                  <a:srgbClr val="64748B"/>
-                </a:solidFill>
-              </a:defRPr>
-            </a:pPr>
-            <a:r>
-              <a:t>• Vue 3 + Vue Router</a:t>
+              <a:defRPr sz="900">
+                <a:solidFill>
+                  <a:srgbClr val="64748B"/>
+                </a:solidFill>
+              </a:defRPr>
+            </a:pPr>
+            <a:r>
+              <a:t>✅ v0.2.0 已完成: XGBoost/LightGBM 可选</a:t>
             </a:r>
           </a:p>
           <a:p>
@@ -6875,14 +9102,14 @@
               <a:spcAft>
                 <a:spcPts val="200"/>
               </a:spcAft>
-              <a:defRPr sz="1100">
-                <a:solidFill>
-                  <a:srgbClr val="64748B"/>
-                </a:solidFill>
-              </a:defRPr>
-            </a:pPr>
-            <a:r>
-              <a:t>• Vite 构建工具</a:t>
+              <a:defRPr sz="900">
+                <a:solidFill>
+                  <a:srgbClr val="64748B"/>
+                </a:solidFill>
+              </a:defRPr>
+            </a:pPr>
+            <a:r>
+              <a:t>   ECharts 历史趋势 · 报警规则引擎</a:t>
             </a:r>
           </a:p>
           <a:p>
@@ -6890,14 +9117,14 @@
               <a:spcAft>
                 <a:spcPts val="200"/>
               </a:spcAft>
-              <a:defRPr sz="1100">
-                <a:solidFill>
-                  <a:srgbClr val="64748B"/>
-                </a:solidFill>
-              </a:defRPr>
-            </a:pPr>
-            <a:r>
-              <a:t>• MySQL 用户/事件存储</a:t>
+              <a:defRPr sz="900">
+                <a:solidFill>
+                  <a:srgbClr val="64748B"/>
+                </a:solidFill>
+              </a:defRPr>
+            </a:pPr>
+            <a:r>
+              <a:t>   z-score 偏差诊断 · 多模型解释对比</a:t>
             </a:r>
           </a:p>
           <a:p>
@@ -6905,28 +9132,70 @@
               <a:spcAft>
                 <a:spcPts val="200"/>
               </a:spcAft>
-              <a:defRPr sz="1100">
-                <a:solidFill>
-                  <a:srgbClr val="64748B"/>
-                </a:solidFill>
-              </a:defRPr>
-            </a:pPr>
-            <a:r>
-              <a:t>• JWT (PyJWT) 认证</a:t>
-            </a:r>
-          </a:p>
-        </p:txBody>
-      </p:sp>
-      <p:sp>
-        <p:nvSpPr>
-          <p:cNvPr id="7" name="TextBox 6"/>
+              <a:defRPr sz="900">
+                <a:solidFill>
+                  <a:srgbClr val="64748B"/>
+                </a:solidFill>
+              </a:defRPr>
+            </a:pPr>
+          </a:p>
+          <a:p>
+            <a:pPr>
+              <a:spcAft>
+                <a:spcPts val="200"/>
+              </a:spcAft>
+              <a:defRPr sz="900">
+                <a:solidFill>
+                  <a:srgbClr val="64748B"/>
+                </a:solidFill>
+              </a:defRPr>
+            </a:pPr>
+            <a:r>
+              <a:t>🔧 替换模型: sklearn 兼容分类器</a:t>
+            </a:r>
+          </a:p>
+          <a:p>
+            <a:pPr>
+              <a:spcAft>
+                <a:spcPts val="200"/>
+              </a:spcAft>
+              <a:defRPr sz="900">
+                <a:solidFill>
+                  <a:srgbClr val="64748B"/>
+                </a:solidFill>
+              </a:defRPr>
+            </a:pPr>
+            <a:r>
+              <a:t>📊 增加点位: step()→features.py→train.py→Dashboard.vue</a:t>
+            </a:r>
+          </a:p>
+          <a:p>
+            <a:pPr>
+              <a:spcAft>
+                <a:spcPts val="200"/>
+              </a:spcAft>
+              <a:defRPr sz="900">
+                <a:solidFill>
+                  <a:srgbClr val="64748B"/>
+                </a:solidFill>
+              </a:defRPr>
+            </a:pPr>
+            <a:r>
+              <a:t>📈 未来: 更多设备类型 · Docker · WebSocket · i18n</a:t>
+            </a:r>
+          </a:p>
+        </p:txBody>
+      </p:sp>
+      <p:sp>
+        <p:nvSpPr>
+          <p:cNvPr id="8" name="TextBox 7"/>
           <p:cNvSpPr txBox="1"/>
           <p:nvPr/>
         </p:nvSpPr>
         <p:spPr>
           <a:xfrm>
-            <a:off x="731520" y="3566160"/>
-            <a:ext cx="4572000" cy="274320"/>
+            <a:off x="10515600" y="6492240"/>
+            <a:ext cx="1371600" cy="274320"/>
           </a:xfrm>
           <a:prstGeom prst="rect">
             <a:avLst/>
@@ -6939,29 +9208,125 @@
           </a:bodyPr>
           <a:lstStyle/>
           <a:p>
+            <a:pPr algn="r">
+              <a:defRPr sz="1000" b="0">
+                <a:solidFill>
+                  <a:srgbClr val="64748B"/>
+                </a:solidFill>
+              </a:defRPr>
+            </a:pPr>
+            <a:r>
+              <a:t>17 / 19</a:t>
+            </a:r>
+          </a:p>
+        </p:txBody>
+      </p:sp>
+    </p:spTree>
+  </p:cSld>
+  <p:clrMapOvr>
+    <a:masterClrMapping/>
+  </p:clrMapOvr>
+</p:sld>
+</file>
+
+<file path=ppt/slides/slide18.xml><?xml version="1.0" encoding="utf-8"?>
+<p:sld xmlns:a="http://schemas.openxmlformats.org/drawingml/2006/main" xmlns:p="http://schemas.openxmlformats.org/presentationml/2006/main" xmlns:r="http://schemas.openxmlformats.org/officeDocument/2006/relationships">
+  <p:cSld>
+    <p:bg>
+      <p:bgPr>
+        <a:solidFill>
+          <a:srgbClr val="F8FAFC"/>
+        </a:solidFill>
+        <a:effectLst/>
+      </p:bgPr>
+    </p:bg>
+    <p:spTree>
+      <p:nvGrpSpPr>
+        <p:cNvPr id="1" name=""/>
+        <p:cNvGrpSpPr/>
+        <p:nvPr/>
+      </p:nvGrpSpPr>
+      <p:grpSpPr/>
+      <p:sp>
+        <p:nvSpPr>
+          <p:cNvPr id="2" name="TextBox 1"/>
+          <p:cNvSpPr txBox="1"/>
+          <p:nvPr/>
+        </p:nvSpPr>
+        <p:spPr>
+          <a:xfrm>
+            <a:off x="731520" y="365760"/>
+            <a:ext cx="10058400" cy="548640"/>
+          </a:xfrm>
+          <a:prstGeom prst="rect">
+            <a:avLst/>
+          </a:prstGeom>
+          <a:noFill/>
+        </p:spPr>
+        <p:txBody>
+          <a:bodyPr wrap="square">
+            <a:spAutoFit/>
+          </a:bodyPr>
+          <a:lstStyle/>
+          <a:p>
             <a:pPr algn="l">
-              <a:defRPr sz="1400" b="1">
+              <a:defRPr sz="2800" b="1">
                 <a:solidFill>
                   <a:srgbClr val="0F172A"/>
                 </a:solidFill>
               </a:defRPr>
             </a:pPr>
             <a:r>
-              <a:t>项目规模</a:t>
-            </a:r>
-          </a:p>
-        </p:txBody>
-      </p:sp>
-      <p:sp>
-        <p:nvSpPr>
-          <p:cNvPr id="8" name="Rounded Rectangle 7"/>
+              <a:t>技术栈总览</a:t>
+            </a:r>
+          </a:p>
+        </p:txBody>
+      </p:sp>
+      <p:sp>
+        <p:nvSpPr>
+          <p:cNvPr id="3" name="TextBox 2"/>
+          <p:cNvSpPr txBox="1"/>
+          <p:nvPr/>
+        </p:nvSpPr>
+        <p:spPr>
+          <a:xfrm>
+            <a:off x="731520" y="822960"/>
+            <a:ext cx="10058400" cy="274320"/>
+          </a:xfrm>
+          <a:prstGeom prst="rect">
+            <a:avLst/>
+          </a:prstGeom>
+          <a:noFill/>
+        </p:spPr>
+        <p:txBody>
+          <a:bodyPr wrap="square">
+            <a:spAutoFit/>
+          </a:bodyPr>
+          <a:lstStyle/>
+          <a:p>
+            <a:pPr algn="l">
+              <a:defRPr sz="1200" b="0">
+                <a:solidFill>
+                  <a:srgbClr val="64748B"/>
+                </a:solidFill>
+              </a:defRPr>
+            </a:pPr>
+            <a:r>
+              <a:t>项目依赖全景图</a:t>
+            </a:r>
+          </a:p>
+        </p:txBody>
+      </p:sp>
+      <p:sp>
+        <p:nvSpPr>
+          <p:cNvPr id="4" name="Rounded Rectangle 3"/>
           <p:cNvSpPr/>
           <p:nvPr/>
         </p:nvSpPr>
         <p:spPr>
           <a:xfrm>
-            <a:off x="731520" y="3931920"/>
-            <a:ext cx="2560320" cy="1097280"/>
+            <a:off x="731520" y="1280160"/>
+            <a:ext cx="3566160" cy="2286000"/>
           </a:xfrm>
           <a:prstGeom prst="roundRect">
             <a:avLst/>
@@ -6990,22 +9355,28 @@
           </a:fontRef>
         </p:style>
         <p:txBody>
-          <a:bodyPr rtlCol="0" anchor="ctr" wrap="square"/>
+          <a:bodyPr rtlCol="0" anchor="ctr" wrap="square" lIns="182880" rIns="137160" tIns="137160" bIns="91440"/>
           <a:lstStyle/>
           <a:p>
             <a:pPr algn="ctr">
-              <a:defRPr sz="3200" b="1">
-                <a:solidFill>
-                  <a:srgbClr val="1A73E8"/>
-                </a:solidFill>
-              </a:defRPr>
-            </a:pPr>
-            <a:r>
-              <a:t>12+</a:t>
-            </a:r>
-          </a:p>
-          <a:p>
-            <a:pPr algn="ctr">
+              <a:spcAft>
+                <a:spcPts val="600"/>
+              </a:spcAft>
+              <a:defRPr sz="1400" b="1">
+                <a:solidFill>
+                  <a:srgbClr val="0F172A"/>
+                </a:solidFill>
+              </a:defRPr>
+            </a:pPr>
+            <a:r>
+              <a:t>Python 核心</a:t>
+            </a:r>
+          </a:p>
+          <a:p>
+            <a:pPr>
+              <a:spcAft>
+                <a:spcPts val="200"/>
+              </a:spcAft>
               <a:defRPr sz="1100">
                 <a:solidFill>
                   <a:srgbClr val="64748B"/>
@@ -7013,21 +9384,81 @@
               </a:defRPr>
             </a:pPr>
             <a:r>
-              <a:t>CLI 子命令</a:t>
-            </a:r>
-          </a:p>
-        </p:txBody>
-      </p:sp>
-      <p:sp>
-        <p:nvSpPr>
-          <p:cNvPr id="9" name="Rounded Rectangle 8"/>
+              <a:t>• numpy + pandas 数据处理</a:t>
+            </a:r>
+          </a:p>
+          <a:p>
+            <a:pPr>
+              <a:spcAft>
+                <a:spcPts val="200"/>
+              </a:spcAft>
+              <a:defRPr sz="1100">
+                <a:solidFill>
+                  <a:srgbClr val="64748B"/>
+                </a:solidFill>
+              </a:defRPr>
+            </a:pPr>
+            <a:r>
+              <a:t>• scikit-learn 决策树</a:t>
+            </a:r>
+          </a:p>
+          <a:p>
+            <a:pPr>
+              <a:spcAft>
+                <a:spcPts val="200"/>
+              </a:spcAft>
+              <a:defRPr sz="1100">
+                <a:solidFill>
+                  <a:srgbClr val="64748B"/>
+                </a:solidFill>
+              </a:defRPr>
+            </a:pPr>
+            <a:r>
+              <a:t>• XGBoost + LightGBM</a:t>
+            </a:r>
+          </a:p>
+          <a:p>
+            <a:pPr>
+              <a:spcAft>
+                <a:spcPts val="200"/>
+              </a:spcAft>
+              <a:defRPr sz="1100">
+                <a:solidFill>
+                  <a:srgbClr val="64748B"/>
+                </a:solidFill>
+              </a:defRPr>
+            </a:pPr>
+            <a:r>
+              <a:t>• joblib 模型持久化</a:t>
+            </a:r>
+          </a:p>
+          <a:p>
+            <a:pPr>
+              <a:spcAft>
+                <a:spcPts val="200"/>
+              </a:spcAft>
+              <a:defRPr sz="1100">
+                <a:solidFill>
+                  <a:srgbClr val="64748B"/>
+                </a:solidFill>
+              </a:defRPr>
+            </a:pPr>
+            <a:r>
+              <a:t>• rich CLI 美化输出</a:t>
+            </a:r>
+          </a:p>
+        </p:txBody>
+      </p:sp>
+      <p:sp>
+        <p:nvSpPr>
+          <p:cNvPr id="5" name="Rounded Rectangle 4"/>
           <p:cNvSpPr/>
           <p:nvPr/>
         </p:nvSpPr>
         <p:spPr>
           <a:xfrm>
-            <a:off x="3566160" y="3931920"/>
-            <a:ext cx="2560320" cy="1097280"/>
+            <a:off x="4572000" y="1280160"/>
+            <a:ext cx="3566160" cy="2286000"/>
           </a:xfrm>
           <a:prstGeom prst="roundRect">
             <a:avLst/>
@@ -7056,22 +9487,28 @@
           </a:fontRef>
         </p:style>
         <p:txBody>
-          <a:bodyPr rtlCol="0" anchor="ctr" wrap="square"/>
+          <a:bodyPr rtlCol="0" anchor="ctr" wrap="square" lIns="182880" rIns="137160" tIns="137160" bIns="91440"/>
           <a:lstStyle/>
           <a:p>
             <a:pPr algn="ctr">
-              <a:defRPr sz="3200" b="1">
-                <a:solidFill>
-                  <a:srgbClr val="10B981"/>
-                </a:solidFill>
-              </a:defRPr>
-            </a:pPr>
-            <a:r>
-              <a:t>10+</a:t>
-            </a:r>
-          </a:p>
-          <a:p>
-            <a:pPr algn="ctr">
+              <a:spcAft>
+                <a:spcPts val="600"/>
+              </a:spcAft>
+              <a:defRPr sz="1400" b="1">
+                <a:solidFill>
+                  <a:srgbClr val="0F172A"/>
+                </a:solidFill>
+              </a:defRPr>
+            </a:pPr>
+            <a:r>
+              <a:t>网络与通信</a:t>
+            </a:r>
+          </a:p>
+          <a:p>
+            <a:pPr>
+              <a:spcAft>
+                <a:spcPts val="200"/>
+              </a:spcAft>
               <a:defRPr sz="1100">
                 <a:solidFill>
                   <a:srgbClr val="64748B"/>
@@ -7079,21 +9516,66 @@
               </a:defRPr>
             </a:pPr>
             <a:r>
-              <a:t>REST API 端点</a:t>
-            </a:r>
-          </a:p>
-        </p:txBody>
-      </p:sp>
-      <p:sp>
-        <p:nvSpPr>
-          <p:cNvPr id="10" name="Rounded Rectangle 9"/>
+              <a:t>• EMQX MQTT Broker</a:t>
+            </a:r>
+          </a:p>
+          <a:p>
+            <a:pPr>
+              <a:spcAft>
+                <a:spcPts val="200"/>
+              </a:spcAft>
+              <a:defRPr sz="1100">
+                <a:solidFill>
+                  <a:srgbClr val="64748B"/>
+                </a:solidFill>
+              </a:defRPr>
+            </a:pPr>
+            <a:r>
+              <a:t>• paho-mqtt 客户端</a:t>
+            </a:r>
+          </a:p>
+          <a:p>
+            <a:pPr>
+              <a:spcAft>
+                <a:spcPts val="200"/>
+              </a:spcAft>
+              <a:defRPr sz="1100">
+                <a:solidFill>
+                  <a:srgbClr val="64748B"/>
+                </a:solidFill>
+              </a:defRPr>
+            </a:pPr>
+            <a:r>
+              <a:t>• Flask REST API</a:t>
+            </a:r>
+          </a:p>
+          <a:p>
+            <a:pPr>
+              <a:spcAft>
+                <a:spcPts val="200"/>
+              </a:spcAft>
+              <a:defRPr sz="1100">
+                <a:solidFill>
+                  <a:srgbClr val="64748B"/>
+                </a:solidFill>
+              </a:defRPr>
+            </a:pPr>
+            <a:r>
+              <a:t>• SSE 事件推送</a:t>
+            </a:r>
+          </a:p>
+        </p:txBody>
+      </p:sp>
+      <p:sp>
+        <p:nvSpPr>
+          <p:cNvPr id="6" name="Rounded Rectangle 5"/>
           <p:cNvSpPr/>
           <p:nvPr/>
         </p:nvSpPr>
         <p:spPr>
           <a:xfrm>
-            <a:off x="6400800" y="3931920"/>
-            <a:ext cx="2560320" cy="1097280"/>
+            <a:off x="8412480" y="1280160"/>
+            <a:ext cx="3566160" cy="2286000"/>
           </a:xfrm>
           <a:prstGeom prst="roundRect">
             <a:avLst/>
@@ -7122,22 +9604,28 @@
           </a:fontRef>
         </p:style>
         <p:txBody>
-          <a:bodyPr rtlCol="0" anchor="ctr" wrap="square"/>
+          <a:bodyPr rtlCol="0" anchor="ctr" wrap="square" lIns="182880" rIns="137160" tIns="137160" bIns="91440"/>
           <a:lstStyle/>
           <a:p>
             <a:pPr algn="ctr">
-              <a:defRPr sz="3200" b="1">
-                <a:solidFill>
-                  <a:srgbClr val="8B5CF6"/>
-                </a:solidFill>
-              </a:defRPr>
-            </a:pPr>
-            <a:r>
-              <a:t>7</a:t>
-            </a:r>
-          </a:p>
-          <a:p>
-            <a:pPr algn="ctr">
+              <a:spcAft>
+                <a:spcPts val="600"/>
+              </a:spcAft>
+              <a:defRPr sz="1400" b="1">
+                <a:solidFill>
+                  <a:srgbClr val="0F172A"/>
+                </a:solidFill>
+              </a:defRPr>
+            </a:pPr>
+            <a:r>
+              <a:t>前端 + 数据库</a:t>
+            </a:r>
+          </a:p>
+          <a:p>
+            <a:pPr>
+              <a:spcAft>
+                <a:spcPts val="200"/>
+              </a:spcAft>
               <a:defRPr sz="1100">
                 <a:solidFill>
                   <a:srgbClr val="64748B"/>
@@ -7145,20 +9633,115 @@
               </a:defRPr>
             </a:pPr>
             <a:r>
-              <a:t>后端模块</a:t>
-            </a:r>
-          </a:p>
-        </p:txBody>
-      </p:sp>
-      <p:sp>
-        <p:nvSpPr>
-          <p:cNvPr id="11" name="Rounded Rectangle 10"/>
+              <a:t>• Vue 3 + Vue Router</a:t>
+            </a:r>
+          </a:p>
+          <a:p>
+            <a:pPr>
+              <a:spcAft>
+                <a:spcPts val="200"/>
+              </a:spcAft>
+              <a:defRPr sz="1100">
+                <a:solidFill>
+                  <a:srgbClr val="64748B"/>
+                </a:solidFill>
+              </a:defRPr>
+            </a:pPr>
+            <a:r>
+              <a:t>• ECharts 趋势图表</a:t>
+            </a:r>
+          </a:p>
+          <a:p>
+            <a:pPr>
+              <a:spcAft>
+                <a:spcPts val="200"/>
+              </a:spcAft>
+              <a:defRPr sz="1100">
+                <a:solidFill>
+                  <a:srgbClr val="64748B"/>
+                </a:solidFill>
+              </a:defRPr>
+            </a:pPr>
+            <a:r>
+              <a:t>• Vite 构建工具</a:t>
+            </a:r>
+          </a:p>
+          <a:p>
+            <a:pPr>
+              <a:spcAft>
+                <a:spcPts val="200"/>
+              </a:spcAft>
+              <a:defRPr sz="1100">
+                <a:solidFill>
+                  <a:srgbClr val="64748B"/>
+                </a:solidFill>
+              </a:defRPr>
+            </a:pPr>
+            <a:r>
+              <a:t>• MySQL 用户/事件存储</a:t>
+            </a:r>
+          </a:p>
+          <a:p>
+            <a:pPr>
+              <a:spcAft>
+                <a:spcPts val="200"/>
+              </a:spcAft>
+              <a:defRPr sz="1100">
+                <a:solidFill>
+                  <a:srgbClr val="64748B"/>
+                </a:solidFill>
+              </a:defRPr>
+            </a:pPr>
+            <a:r>
+              <a:t>• JWT (PyJWT) 认证</a:t>
+            </a:r>
+          </a:p>
+        </p:txBody>
+      </p:sp>
+      <p:sp>
+        <p:nvSpPr>
+          <p:cNvPr id="7" name="TextBox 6"/>
+          <p:cNvSpPr txBox="1"/>
+          <p:nvPr/>
+        </p:nvSpPr>
+        <p:spPr>
+          <a:xfrm>
+            <a:off x="731520" y="3840480"/>
+            <a:ext cx="4572000" cy="274320"/>
+          </a:xfrm>
+          <a:prstGeom prst="rect">
+            <a:avLst/>
+          </a:prstGeom>
+          <a:noFill/>
+        </p:spPr>
+        <p:txBody>
+          <a:bodyPr wrap="square">
+            <a:spAutoFit/>
+          </a:bodyPr>
+          <a:lstStyle/>
+          <a:p>
+            <a:pPr algn="l">
+              <a:defRPr sz="1400" b="1">
+                <a:solidFill>
+                  <a:srgbClr val="0F172A"/>
+                </a:solidFill>
+              </a:defRPr>
+            </a:pPr>
+            <a:r>
+              <a:t>项目规模</a:t>
+            </a:r>
+          </a:p>
+        </p:txBody>
+      </p:sp>
+      <p:sp>
+        <p:nvSpPr>
+          <p:cNvPr id="8" name="Rounded Rectangle 7"/>
           <p:cNvSpPr/>
           <p:nvPr/>
         </p:nvSpPr>
         <p:spPr>
           <a:xfrm>
-            <a:off x="9235440" y="3931920"/>
+            <a:off x="731520" y="4206240"/>
             <a:ext cx="2560320" cy="1097280"/>
           </a:xfrm>
           <a:prstGeom prst="roundRect">
@@ -7194,12 +9777,12 @@
             <a:pPr algn="ctr">
               <a:defRPr sz="3200" b="1">
                 <a:solidFill>
-                  <a:srgbClr val="F59E0B"/>
-                </a:solidFill>
-              </a:defRPr>
-            </a:pPr>
-            <a:r>
-              <a:t>4</a:t>
+                  <a:srgbClr val="1A73E8"/>
+                </a:solidFill>
+              </a:defRPr>
+            </a:pPr>
+            <a:r>
+              <a:t>12+</a:t>
             </a:r>
           </a:p>
           <a:p>
@@ -7211,6 +9794,204 @@
               </a:defRPr>
             </a:pPr>
             <a:r>
+              <a:t>CLI 子命令</a:t>
+            </a:r>
+          </a:p>
+        </p:txBody>
+      </p:sp>
+      <p:sp>
+        <p:nvSpPr>
+          <p:cNvPr id="9" name="Rounded Rectangle 8"/>
+          <p:cNvSpPr/>
+          <p:nvPr/>
+        </p:nvSpPr>
+        <p:spPr>
+          <a:xfrm>
+            <a:off x="3566160" y="4206240"/>
+            <a:ext cx="2560320" cy="1097280"/>
+          </a:xfrm>
+          <a:prstGeom prst="roundRect">
+            <a:avLst/>
+          </a:prstGeom>
+          <a:solidFill>
+            <a:srgbClr val="FFFFFF"/>
+          </a:solidFill>
+          <a:ln w="12700">
+            <a:solidFill>
+              <a:srgbClr val="E2E8F0"/>
+            </a:solidFill>
+          </a:ln>
+        </p:spPr>
+        <p:style>
+          <a:lnRef idx="1">
+            <a:schemeClr val="accent1"/>
+          </a:lnRef>
+          <a:fillRef idx="3">
+            <a:schemeClr val="accent1"/>
+          </a:fillRef>
+          <a:effectRef idx="2">
+            <a:schemeClr val="accent1"/>
+          </a:effectRef>
+          <a:fontRef idx="minor">
+            <a:schemeClr val="lt1"/>
+          </a:fontRef>
+        </p:style>
+        <p:txBody>
+          <a:bodyPr rtlCol="0" anchor="ctr" wrap="square"/>
+          <a:lstStyle/>
+          <a:p>
+            <a:pPr algn="ctr">
+              <a:defRPr sz="3200" b="1">
+                <a:solidFill>
+                  <a:srgbClr val="10B981"/>
+                </a:solidFill>
+              </a:defRPr>
+            </a:pPr>
+            <a:r>
+              <a:t>10+</a:t>
+            </a:r>
+          </a:p>
+          <a:p>
+            <a:pPr algn="ctr">
+              <a:defRPr sz="1100">
+                <a:solidFill>
+                  <a:srgbClr val="64748B"/>
+                </a:solidFill>
+              </a:defRPr>
+            </a:pPr>
+            <a:r>
+              <a:t>REST API 端点</a:t>
+            </a:r>
+          </a:p>
+        </p:txBody>
+      </p:sp>
+      <p:sp>
+        <p:nvSpPr>
+          <p:cNvPr id="10" name="Rounded Rectangle 9"/>
+          <p:cNvSpPr/>
+          <p:nvPr/>
+        </p:nvSpPr>
+        <p:spPr>
+          <a:xfrm>
+            <a:off x="6400800" y="4206240"/>
+            <a:ext cx="2560320" cy="1097280"/>
+          </a:xfrm>
+          <a:prstGeom prst="roundRect">
+            <a:avLst/>
+          </a:prstGeom>
+          <a:solidFill>
+            <a:srgbClr val="FFFFFF"/>
+          </a:solidFill>
+          <a:ln w="12700">
+            <a:solidFill>
+              <a:srgbClr val="E2E8F0"/>
+            </a:solidFill>
+          </a:ln>
+        </p:spPr>
+        <p:style>
+          <a:lnRef idx="1">
+            <a:schemeClr val="accent1"/>
+          </a:lnRef>
+          <a:fillRef idx="3">
+            <a:schemeClr val="accent1"/>
+          </a:fillRef>
+          <a:effectRef idx="2">
+            <a:schemeClr val="accent1"/>
+          </a:effectRef>
+          <a:fontRef idx="minor">
+            <a:schemeClr val="lt1"/>
+          </a:fontRef>
+        </p:style>
+        <p:txBody>
+          <a:bodyPr rtlCol="0" anchor="ctr" wrap="square"/>
+          <a:lstStyle/>
+          <a:p>
+            <a:pPr algn="ctr">
+              <a:defRPr sz="3200" b="1">
+                <a:solidFill>
+                  <a:srgbClr val="8B5CF6"/>
+                </a:solidFill>
+              </a:defRPr>
+            </a:pPr>
+            <a:r>
+              <a:t>8</a:t>
+            </a:r>
+          </a:p>
+          <a:p>
+            <a:pPr algn="ctr">
+              <a:defRPr sz="1100">
+                <a:solidFill>
+                  <a:srgbClr val="64748B"/>
+                </a:solidFill>
+              </a:defRPr>
+            </a:pPr>
+            <a:r>
+              <a:t>后端模块</a:t>
+            </a:r>
+          </a:p>
+        </p:txBody>
+      </p:sp>
+      <p:sp>
+        <p:nvSpPr>
+          <p:cNvPr id="11" name="Rounded Rectangle 10"/>
+          <p:cNvSpPr/>
+          <p:nvPr/>
+        </p:nvSpPr>
+        <p:spPr>
+          <a:xfrm>
+            <a:off x="9235440" y="4206240"/>
+            <a:ext cx="2560320" cy="1097280"/>
+          </a:xfrm>
+          <a:prstGeom prst="roundRect">
+            <a:avLst/>
+          </a:prstGeom>
+          <a:solidFill>
+            <a:srgbClr val="FFFFFF"/>
+          </a:solidFill>
+          <a:ln w="12700">
+            <a:solidFill>
+              <a:srgbClr val="E2E8F0"/>
+            </a:solidFill>
+          </a:ln>
+        </p:spPr>
+        <p:style>
+          <a:lnRef idx="1">
+            <a:schemeClr val="accent1"/>
+          </a:lnRef>
+          <a:fillRef idx="3">
+            <a:schemeClr val="accent1"/>
+          </a:fillRef>
+          <a:effectRef idx="2">
+            <a:schemeClr val="accent1"/>
+          </a:effectRef>
+          <a:fontRef idx="minor">
+            <a:schemeClr val="lt1"/>
+          </a:fontRef>
+        </p:style>
+        <p:txBody>
+          <a:bodyPr rtlCol="0" anchor="ctr" wrap="square"/>
+          <a:lstStyle/>
+          <a:p>
+            <a:pPr algn="ctr">
+              <a:defRPr sz="3200" b="1">
+                <a:solidFill>
+                  <a:srgbClr val="F59E0B"/>
+                </a:solidFill>
+              </a:defRPr>
+            </a:pPr>
+            <a:r>
+              <a:t>4</a:t>
+            </a:r>
+          </a:p>
+          <a:p>
+            <a:pPr algn="ctr">
+              <a:defRPr sz="1100">
+                <a:solidFill>
+                  <a:srgbClr val="64748B"/>
+                </a:solidFill>
+              </a:defRPr>
+            </a:pPr>
+            <a:r>
               <a:t>前端页面</a:t>
             </a:r>
           </a:p>
@@ -7224,8 +10005,8 @@
         </p:nvSpPr>
         <p:spPr>
           <a:xfrm>
-            <a:off x="731520" y="5303520"/>
-            <a:ext cx="4572000" cy="274320"/>
+            <a:off x="10515600" y="6492240"/>
+            <a:ext cx="1371600" cy="274320"/>
           </a:xfrm>
           <a:prstGeom prst="rect">
             <a:avLst/>
@@ -7238,541 +10019,6 @@
           </a:bodyPr>
           <a:lstStyle/>
           <a:p>
-            <a:pPr algn="l">
-              <a:defRPr sz="1400" b="1">
-                <a:solidFill>
-                  <a:srgbClr val="0F172A"/>
-                </a:solidFill>
-              </a:defRPr>
-            </a:pPr>
-            <a:r>
-              <a:t>关键依赖</a:t>
-            </a:r>
-          </a:p>
-        </p:txBody>
-      </p:sp>
-      <p:graphicFrame>
-        <p:nvGraphicFramePr>
-          <p:cNvPr id="13" name="Table 12"/>
-          <p:cNvGraphicFramePr>
-            <a:graphicFrameLocks noGrp="1"/>
-          </p:cNvGraphicFramePr>
-          <p:nvPr/>
-        </p:nvGraphicFramePr>
-        <p:xfrm>
-          <a:off x="731520" y="5577840"/>
-          <a:ext cx="10972800" cy="1920239"/>
-        </p:xfrm>
-        <a:graphic>
-          <a:graphicData uri="http://schemas.openxmlformats.org/drawingml/2006/table">
-            <a:tbl>
-              <a:tblPr firstRow="1" bandRow="1">
-                <a:tableStyleId>{5C22544A-7EE6-4342-B048-85BDC9FD1C3A}</a:tableStyleId>
-              </a:tblPr>
-              <a:tblGrid>
-                <a:gridCol w="2743200"/>
-                <a:gridCol w="2743200"/>
-                <a:gridCol w="2743200"/>
-                <a:gridCol w="2743200"/>
-              </a:tblGrid>
-              <a:tr h="320039">
-                <a:tc>
-                  <a:txBody>
-                    <a:bodyPr/>
-                    <a:lstStyle/>
-                    <a:p>
-                      <a:pPr>
-                        <a:defRPr sz="1100" b="1">
-                          <a:solidFill>
-                            <a:srgbClr val="0F172A"/>
-                          </a:solidFill>
-                        </a:defRPr>
-                      </a:pPr>
-                      <a:r>
-                        <a:t>Python</a:t>
-                      </a:r>
-                    </a:p>
-                  </a:txBody>
-                  <a:tcPr>
-                    <a:solidFill>
-                      <a:srgbClr val="F8FAFC"/>
-                    </a:solidFill>
-                  </a:tcPr>
-                </a:tc>
-                <a:tc>
-                  <a:txBody>
-                    <a:bodyPr/>
-                    <a:lstStyle/>
-                    <a:p>
-                      <a:pPr>
-                        <a:defRPr sz="1100" b="1">
-                          <a:solidFill>
-                            <a:srgbClr val="0F172A"/>
-                          </a:solidFill>
-                        </a:defRPr>
-                      </a:pPr>
-                      <a:r>
-                        <a:t>版本</a:t>
-                      </a:r>
-                    </a:p>
-                  </a:txBody>
-                  <a:tcPr>
-                    <a:solidFill>
-                      <a:srgbClr val="F8FAFC"/>
-                    </a:solidFill>
-                  </a:tcPr>
-                </a:tc>
-                <a:tc>
-                  <a:txBody>
-                    <a:bodyPr/>
-                    <a:lstStyle/>
-                    <a:p>
-                      <a:pPr>
-                        <a:defRPr sz="1100" b="1">
-                          <a:solidFill>
-                            <a:srgbClr val="0F172A"/>
-                          </a:solidFill>
-                        </a:defRPr>
-                      </a:pPr>
-                      <a:r>
-                        <a:t>Node.js</a:t>
-                      </a:r>
-                    </a:p>
-                  </a:txBody>
-                  <a:tcPr>
-                    <a:solidFill>
-                      <a:srgbClr val="F8FAFC"/>
-                    </a:solidFill>
-                  </a:tcPr>
-                </a:tc>
-                <a:tc>
-                  <a:txBody>
-                    <a:bodyPr/>
-                    <a:lstStyle/>
-                    <a:p>
-                      <a:pPr>
-                        <a:defRPr sz="1100" b="1">
-                          <a:solidFill>
-                            <a:srgbClr val="0F172A"/>
-                          </a:solidFill>
-                        </a:defRPr>
-                      </a:pPr>
-                      <a:r>
-                        <a:t>版本</a:t>
-                      </a:r>
-                    </a:p>
-                  </a:txBody>
-                  <a:tcPr>
-                    <a:solidFill>
-                      <a:srgbClr val="F8FAFC"/>
-                    </a:solidFill>
-                  </a:tcPr>
-                </a:tc>
-              </a:tr>
-              <a:tr h="320039">
-                <a:tc>
-                  <a:txBody>
-                    <a:bodyPr/>
-                    <a:lstStyle/>
-                    <a:p>
-                      <a:pPr>
-                        <a:defRPr sz="1100">
-                          <a:solidFill>
-                            <a:srgbClr val="334155"/>
-                          </a:solidFill>
-                        </a:defRPr>
-                      </a:pPr>
-                      <a:r>
-                        <a:t>numpy</a:t>
-                      </a:r>
-                    </a:p>
-                  </a:txBody>
-                  <a:tcPr/>
-                </a:tc>
-                <a:tc>
-                  <a:txBody>
-                    <a:bodyPr/>
-                    <a:lstStyle/>
-                    <a:p>
-                      <a:pPr>
-                        <a:defRPr sz="1100">
-                          <a:solidFill>
-                            <a:srgbClr val="334155"/>
-                          </a:solidFill>
-                        </a:defRPr>
-                      </a:pPr>
-                      <a:r>
-                        <a:t>≥2.0</a:t>
-                      </a:r>
-                    </a:p>
-                  </a:txBody>
-                  <a:tcPr/>
-                </a:tc>
-                <a:tc>
-                  <a:txBody>
-                    <a:bodyPr/>
-                    <a:lstStyle/>
-                    <a:p>
-                      <a:pPr>
-                        <a:defRPr sz="1100">
-                          <a:solidFill>
-                            <a:srgbClr val="334155"/>
-                          </a:solidFill>
-                        </a:defRPr>
-                      </a:pPr>
-                      <a:r>
-                        <a:t>vue</a:t>
-                      </a:r>
-                    </a:p>
-                  </a:txBody>
-                  <a:tcPr/>
-                </a:tc>
-                <a:tc>
-                  <a:txBody>
-                    <a:bodyPr/>
-                    <a:lstStyle/>
-                    <a:p>
-                      <a:pPr>
-                        <a:defRPr sz="1100">
-                          <a:solidFill>
-                            <a:srgbClr val="334155"/>
-                          </a:solidFill>
-                        </a:defRPr>
-                      </a:pPr>
-                      <a:r>
-                        <a:t>3.x</a:t>
-                      </a:r>
-                    </a:p>
-                  </a:txBody>
-                  <a:tcPr/>
-                </a:tc>
-              </a:tr>
-              <a:tr h="320039">
-                <a:tc>
-                  <a:txBody>
-                    <a:bodyPr/>
-                    <a:lstStyle/>
-                    <a:p>
-                      <a:pPr>
-                        <a:defRPr sz="1100">
-                          <a:solidFill>
-                            <a:srgbClr val="334155"/>
-                          </a:solidFill>
-                        </a:defRPr>
-                      </a:pPr>
-                      <a:r>
-                        <a:t>pandas</a:t>
-                      </a:r>
-                    </a:p>
-                  </a:txBody>
-                  <a:tcPr/>
-                </a:tc>
-                <a:tc>
-                  <a:txBody>
-                    <a:bodyPr/>
-                    <a:lstStyle/>
-                    <a:p>
-                      <a:pPr>
-                        <a:defRPr sz="1100">
-                          <a:solidFill>
-                            <a:srgbClr val="334155"/>
-                          </a:solidFill>
-                        </a:defRPr>
-                      </a:pPr>
-                      <a:r>
-                        <a:t>≥2.2</a:t>
-                      </a:r>
-                    </a:p>
-                  </a:txBody>
-                  <a:tcPr/>
-                </a:tc>
-                <a:tc>
-                  <a:txBody>
-                    <a:bodyPr/>
-                    <a:lstStyle/>
-                    <a:p>
-                      <a:pPr>
-                        <a:defRPr sz="1100">
-                          <a:solidFill>
-                            <a:srgbClr val="334155"/>
-                          </a:solidFill>
-                        </a:defRPr>
-                      </a:pPr>
-                      <a:r>
-                        <a:t>vue-router</a:t>
-                      </a:r>
-                    </a:p>
-                  </a:txBody>
-                  <a:tcPr/>
-                </a:tc>
-                <a:tc>
-                  <a:txBody>
-                    <a:bodyPr/>
-                    <a:lstStyle/>
-                    <a:p>
-                      <a:pPr>
-                        <a:defRPr sz="1100">
-                          <a:solidFill>
-                            <a:srgbClr val="334155"/>
-                          </a:solidFill>
-                        </a:defRPr>
-                      </a:pPr>
-                      <a:r>
-                        <a:t>4.x</a:t>
-                      </a:r>
-                    </a:p>
-                  </a:txBody>
-                  <a:tcPr/>
-                </a:tc>
-              </a:tr>
-              <a:tr h="320039">
-                <a:tc>
-                  <a:txBody>
-                    <a:bodyPr/>
-                    <a:lstStyle/>
-                    <a:p>
-                      <a:pPr>
-                        <a:defRPr sz="1100">
-                          <a:solidFill>
-                            <a:srgbClr val="334155"/>
-                          </a:solidFill>
-                        </a:defRPr>
-                      </a:pPr>
-                      <a:r>
-                        <a:t>scikit-learn</a:t>
-                      </a:r>
-                    </a:p>
-                  </a:txBody>
-                  <a:tcPr/>
-                </a:tc>
-                <a:tc>
-                  <a:txBody>
-                    <a:bodyPr/>
-                    <a:lstStyle/>
-                    <a:p>
-                      <a:pPr>
-                        <a:defRPr sz="1100">
-                          <a:solidFill>
-                            <a:srgbClr val="334155"/>
-                          </a:solidFill>
-                        </a:defRPr>
-                      </a:pPr>
-                      <a:r>
-                        <a:t>≥1.5</a:t>
-                      </a:r>
-                    </a:p>
-                  </a:txBody>
-                  <a:tcPr/>
-                </a:tc>
-                <a:tc>
-                  <a:txBody>
-                    <a:bodyPr/>
-                    <a:lstStyle/>
-                    <a:p>
-                      <a:pPr>
-                        <a:defRPr sz="1100">
-                          <a:solidFill>
-                            <a:srgbClr val="334155"/>
-                          </a:solidFill>
-                        </a:defRPr>
-                      </a:pPr>
-                      <a:r>
-                        <a:t>vite</a:t>
-                      </a:r>
-                    </a:p>
-                  </a:txBody>
-                  <a:tcPr/>
-                </a:tc>
-                <a:tc>
-                  <a:txBody>
-                    <a:bodyPr/>
-                    <a:lstStyle/>
-                    <a:p>
-                      <a:pPr>
-                        <a:defRPr sz="1100">
-                          <a:solidFill>
-                            <a:srgbClr val="334155"/>
-                          </a:solidFill>
-                        </a:defRPr>
-                      </a:pPr>
-                      <a:r>
-                        <a:t>5.x</a:t>
-                      </a:r>
-                    </a:p>
-                  </a:txBody>
-                  <a:tcPr/>
-                </a:tc>
-              </a:tr>
-              <a:tr h="320039">
-                <a:tc>
-                  <a:txBody>
-                    <a:bodyPr/>
-                    <a:lstStyle/>
-                    <a:p>
-                      <a:pPr>
-                        <a:defRPr sz="1100">
-                          <a:solidFill>
-                            <a:srgbClr val="334155"/>
-                          </a:solidFill>
-                        </a:defRPr>
-                      </a:pPr>
-                      <a:r>
-                        <a:t>flask</a:t>
-                      </a:r>
-                    </a:p>
-                  </a:txBody>
-                  <a:tcPr/>
-                </a:tc>
-                <a:tc>
-                  <a:txBody>
-                    <a:bodyPr/>
-                    <a:lstStyle/>
-                    <a:p>
-                      <a:pPr>
-                        <a:defRPr sz="1100">
-                          <a:solidFill>
-                            <a:srgbClr val="334155"/>
-                          </a:solidFill>
-                        </a:defRPr>
-                      </a:pPr>
-                      <a:r>
-                        <a:t>≥3.0</a:t>
-                      </a:r>
-                    </a:p>
-                  </a:txBody>
-                  <a:tcPr/>
-                </a:tc>
-                <a:tc>
-                  <a:txBody>
-                    <a:bodyPr/>
-                    <a:lstStyle/>
-                    <a:p>
-                      <a:pPr>
-                        <a:defRPr sz="1100">
-                          <a:solidFill>
-                            <a:srgbClr val="334155"/>
-                          </a:solidFill>
-                        </a:defRPr>
-                      </a:pPr>
-                    </a:p>
-                  </a:txBody>
-                  <a:tcPr/>
-                </a:tc>
-                <a:tc>
-                  <a:txBody>
-                    <a:bodyPr/>
-                    <a:lstStyle/>
-                    <a:p>
-                      <a:pPr>
-                        <a:defRPr sz="1100">
-                          <a:solidFill>
-                            <a:srgbClr val="334155"/>
-                          </a:solidFill>
-                        </a:defRPr>
-                      </a:pPr>
-                    </a:p>
-                  </a:txBody>
-                  <a:tcPr/>
-                </a:tc>
-              </a:tr>
-              <a:tr h="320044">
-                <a:tc>
-                  <a:txBody>
-                    <a:bodyPr/>
-                    <a:lstStyle/>
-                    <a:p>
-                      <a:pPr>
-                        <a:defRPr sz="1100">
-                          <a:solidFill>
-                            <a:srgbClr val="334155"/>
-                          </a:solidFill>
-                        </a:defRPr>
-                      </a:pPr>
-                      <a:r>
-                        <a:t>paho-mqtt</a:t>
-                      </a:r>
-                    </a:p>
-                  </a:txBody>
-                  <a:tcPr/>
-                </a:tc>
-                <a:tc>
-                  <a:txBody>
-                    <a:bodyPr/>
-                    <a:lstStyle/>
-                    <a:p>
-                      <a:pPr>
-                        <a:defRPr sz="1100">
-                          <a:solidFill>
-                            <a:srgbClr val="334155"/>
-                          </a:solidFill>
-                        </a:defRPr>
-                      </a:pPr>
-                      <a:r>
-                        <a:t>≥2.1</a:t>
-                      </a:r>
-                    </a:p>
-                  </a:txBody>
-                  <a:tcPr/>
-                </a:tc>
-                <a:tc>
-                  <a:txBody>
-                    <a:bodyPr/>
-                    <a:lstStyle/>
-                    <a:p>
-                      <a:pPr>
-                        <a:defRPr sz="1100">
-                          <a:solidFill>
-                            <a:srgbClr val="334155"/>
-                          </a:solidFill>
-                        </a:defRPr>
-                      </a:pPr>
-                    </a:p>
-                  </a:txBody>
-                  <a:tcPr/>
-                </a:tc>
-                <a:tc>
-                  <a:txBody>
-                    <a:bodyPr/>
-                    <a:lstStyle/>
-                    <a:p>
-                      <a:pPr>
-                        <a:defRPr sz="1100">
-                          <a:solidFill>
-                            <a:srgbClr val="334155"/>
-                          </a:solidFill>
-                        </a:defRPr>
-                      </a:pPr>
-                    </a:p>
-                  </a:txBody>
-                  <a:tcPr/>
-                </a:tc>
-              </a:tr>
-            </a:tbl>
-          </a:graphicData>
-        </a:graphic>
-      </p:graphicFrame>
-      <p:sp>
-        <p:nvSpPr>
-          <p:cNvPr id="14" name="TextBox 13"/>
-          <p:cNvSpPr txBox="1"/>
-          <p:nvPr/>
-        </p:nvSpPr>
-        <p:spPr>
-          <a:xfrm>
-            <a:off x="10515600" y="6492240"/>
-            <a:ext cx="1371600" cy="274320"/>
-          </a:xfrm>
-          <a:prstGeom prst="rect">
-            <a:avLst/>
-          </a:prstGeom>
-          <a:noFill/>
-        </p:spPr>
-        <p:txBody>
-          <a:bodyPr wrap="square">
-            <a:spAutoFit/>
-          </a:bodyPr>
-          <a:lstStyle/>
-          <a:p>
             <a:pPr algn="r">
               <a:defRPr sz="1000" b="0">
                 <a:solidFill>
@@ -7781,7 +10027,7 @@
               </a:defRPr>
             </a:pPr>
             <a:r>
-              <a:t>16 / 17</a:t>
+              <a:t>18 / 19</a:t>
             </a:r>
           </a:p>
         </p:txBody>
@@ -7794,7 +10040,7 @@
 </p:sld>
 </file>
 
-<file path=ppt/slides/slide17.xml><?xml version="1.0" encoding="utf-8"?>
+<file path=ppt/slides/slide19.xml><?xml version="1.0" encoding="utf-8"?>
 <p:sld xmlns:a="http://schemas.openxmlformats.org/drawingml/2006/main" xmlns:p="http://schemas.openxmlformats.org/presentationml/2006/main" xmlns:r="http://schemas.openxmlformats.org/officeDocument/2006/relationships">
   <p:cSld>
     <p:bg>
@@ -7978,7 +10224,7 @@
             </a:r>
             <a:br/>
             <a:r>
-              <a:t>从仿真到实时看板的完整链路</a:t>
+              <a:t>多模型 · 报警引擎 · 趋势图表 · 完整链路</a:t>
             </a:r>
           </a:p>
         </p:txBody>
@@ -8048,7 +10294,7 @@
               </a:defRPr>
             </a:pPr>
             <a:r>
-              <a:t>17 / 17</a:t>
+              <a:t>19 / 19</a:t>
             </a:r>
           </a:p>
         </p:txBody>
@@ -8144,11 +10390,7 @@
               </a:defRPr>
             </a:pPr>
             <a:r>
-              <a:t>基于仿真设备 + MQTT + 决策树 + Vue 前端的</a:t>
-            </a:r>
-            <a:br/>
-            <a:r>
-              <a:t>工业设备健康评估原型系统</a:t>
+              <a:t>多模型 + 报警引擎 + ECharts 趋势 + 完整数据链路</a:t>
             </a:r>
           </a:p>
         </p:txBody>
@@ -8183,7 +10425,7 @@
               </a:defRPr>
             </a:pPr>
             <a:r>
-              <a:t>2 / 17</a:t>
+              <a:t>2 / 19</a:t>
             </a:r>
           </a:p>
         </p:txBody>
@@ -8258,7 +10500,7 @@
         <p:spPr>
           <a:xfrm>
             <a:off x="731520" y="822960"/>
-            <a:ext cx="10058400" cy="365760"/>
+            <a:ext cx="10058400" cy="274320"/>
           </a:xfrm>
           <a:prstGeom prst="rect">
             <a:avLst/>
@@ -8272,7 +10514,7 @@
           <a:lstStyle/>
           <a:p>
             <a:pPr algn="l">
-              <a:defRPr sz="1300" b="0">
+              <a:defRPr sz="1200" b="0">
                 <a:solidFill>
                   <a:srgbClr val="64748B"/>
                 </a:solidFill>
@@ -8747,7 +10989,7 @@
               </a:defRPr>
             </a:pPr>
             <a:r>
-              <a:t>模型热替换，即插即用</a:t>
+              <a:t>模型热替换 (Tree/XGB/LGB)</a:t>
             </a:r>
           </a:p>
         </p:txBody>
@@ -8934,7 +11176,67 @@
       </p:sp>
       <p:sp>
         <p:nvSpPr>
-          <p:cNvPr id="11" name="TextBox 10"/>
+          <p:cNvPr id="11" name="Rounded Rectangle 10"/>
+          <p:cNvSpPr/>
+          <p:nvPr/>
+        </p:nvSpPr>
+        <p:spPr>
+          <a:xfrm>
+            <a:off x="8412480" y="5943600"/>
+            <a:ext cx="2377440" cy="320040"/>
+          </a:xfrm>
+          <a:prstGeom prst="roundRect">
+            <a:avLst/>
+          </a:prstGeom>
+          <a:solidFill>
+            <a:srgbClr val="EDE9FE"/>
+          </a:solidFill>
+          <a:ln w="12700">
+            <a:solidFill>
+              <a:srgbClr val="C4B5FD"/>
+            </a:solidFill>
+          </a:ln>
+        </p:spPr>
+        <p:style>
+          <a:lnRef idx="1">
+            <a:schemeClr val="accent1"/>
+          </a:lnRef>
+          <a:fillRef idx="3">
+            <a:schemeClr val="accent1"/>
+          </a:fillRef>
+          <a:effectRef idx="2">
+            <a:schemeClr val="accent1"/>
+          </a:effectRef>
+          <a:fontRef idx="minor">
+            <a:schemeClr val="lt1"/>
+          </a:fontRef>
+        </p:style>
+        <p:txBody>
+          <a:bodyPr rtlCol="0" anchor="ctr" wrap="square"/>
+          <a:lstStyle/>
+          <a:p>
+            <a:pPr algn="ctr">
+              <a:spcBef>
+                <a:spcPts val="0"/>
+              </a:spcBef>
+              <a:spcAft>
+                <a:spcPts val="0"/>
+              </a:spcAft>
+              <a:defRPr sz="1000" b="1">
+                <a:solidFill>
+                  <a:srgbClr val="5B21B6"/>
+                </a:solidFill>
+              </a:defRPr>
+            </a:pPr>
+            <a:r>
+              <a:t>工业大数据/ML教学</a:t>
+            </a:r>
+          </a:p>
+        </p:txBody>
+      </p:sp>
+      <p:sp>
+        <p:nvSpPr>
+          <p:cNvPr id="12" name="TextBox 11"/>
           <p:cNvSpPr txBox="1"/>
           <p:nvPr/>
         </p:nvSpPr>
@@ -8962,7 +11264,7 @@
               </a:defRPr>
             </a:pPr>
             <a:r>
-              <a:t>3 / 17</a:t>
+              <a:t>3 / 19</a:t>
             </a:r>
           </a:p>
         </p:txBody>
@@ -9093,7 +11395,7 @@
               </a:defRPr>
             </a:pPr>
             <a:r>
-              <a:t>4 / 17</a:t>
+              <a:t>4 / 19</a:t>
             </a:r>
           </a:p>
         </p:txBody>
@@ -10043,7 +12345,7 @@
         <p:spPr>
           <a:xfrm>
             <a:off x="731520" y="5029200"/>
-            <a:ext cx="73152" cy="1097280"/>
+            <a:ext cx="54864" cy="1097280"/>
           </a:xfrm>
           <a:prstGeom prst="roundRect">
             <a:avLst/>
@@ -10085,8 +12387,8 @@
         </p:nvSpPr>
         <p:spPr>
           <a:xfrm>
-            <a:off x="1005840" y="5074920"/>
-            <a:ext cx="10241280" cy="1005840"/>
+            <a:off x="914400" y="5074920"/>
+            <a:ext cx="10378440" cy="1005839"/>
           </a:xfrm>
           <a:prstGeom prst="rect">
             <a:avLst/>
@@ -10146,7 +12448,7 @@
               </a:defRPr>
             </a:pPr>
             <a:r>
-              <a:t>5 / 17</a:t>
+              <a:t>5 / 19</a:t>
             </a:r>
           </a:p>
         </p:txBody>
@@ -10559,7 +12861,7 @@
               </a:defRPr>
             </a:pPr>
             <a:r>
-              <a:t>• 以 temp_c 点位作为窗口触发器，每窗口只打分一次</a:t>
+              <a:t>• 以 temp_c 点位作为窗口触发器</a:t>
             </a:r>
           </a:p>
           <a:p>
@@ -10574,7 +12876,7 @@
               </a:defRPr>
             </a:pPr>
             <a:r>
-              <a:t>• 去抖逻辑：恶化连续 3 次确认，恢复连续 5 次确认</a:t>
+              <a:t>• 去抖逻辑：恶化 3 次确认，恢复 5 次确认</a:t>
             </a:r>
           </a:p>
           <a:p>
@@ -10589,7 +12891,7 @@
               </a:defRPr>
             </a:pPr>
             <a:r>
-              <a:t>• SSE 基于 HTTP，浏览器原生支持断线重连</a:t>
+              <a:t>• SSE 基于 HTTP，浏览器原生断线重连</a:t>
             </a:r>
           </a:p>
           <a:p>
@@ -10604,7 +12906,22 @@
               </a:defRPr>
             </a:pPr>
             <a:r>
-              <a:t>• Thread-safe：ScorerWorker 使用锁保护模型推理</a:t>
+              <a:t>• Thread-safe：ScorerWorker 锁保护模型推理</a:t>
+            </a:r>
+          </a:p>
+          <a:p>
+            <a:pPr>
+              <a:spcAft>
+                <a:spcPts val="200"/>
+              </a:spcAft>
+              <a:defRPr sz="1100">
+                <a:solidFill>
+                  <a:srgbClr val="64748B"/>
+                </a:solidFill>
+              </a:defRPr>
+            </a:pPr>
+            <a:r>
+              <a:t>• 窗口级打分，每窗口只触发一次推理</a:t>
             </a:r>
           </a:p>
         </p:txBody>
@@ -10723,7 +13040,7 @@
               </a:defRPr>
             </a:pPr>
             <a:r>
-              <a:t>6 / 17</a:t>
+              <a:t>6 / 19</a:t>
             </a:r>
           </a:p>
         </p:txBody>
@@ -10854,7 +13171,7 @@
               </a:defRPr>
             </a:pPr>
             <a:r>
-              <a:t>7 / 17</a:t>
+              <a:t>7 / 19</a:t>
             </a:r>
           </a:p>
         </p:txBody>
@@ -10964,7 +13281,7 @@
         <p:spPr>
           <a:xfrm>
             <a:off x="731520" y="1280160"/>
-            <a:ext cx="5303520" cy="2103120"/>
+            <a:ext cx="5303520" cy="2377440"/>
           </a:xfrm>
           <a:prstGeom prst="roundRect">
             <a:avLst/>
@@ -11141,7 +13458,7 @@
         <p:spPr>
           <a:xfrm>
             <a:off x="6400800" y="1280160"/>
-            <a:ext cx="5303520" cy="2103120"/>
+            <a:ext cx="5303520" cy="2377440"/>
           </a:xfrm>
           <a:prstGeom prst="roundRect">
             <a:avLst/>
@@ -11199,7 +13516,7 @@
               </a:defRPr>
             </a:pPr>
             <a:r>
-              <a:t>① long → wide pivot</a:t>
+              <a:t>① long → wide pivot 透视为宽表</a:t>
             </a:r>
           </a:p>
           <a:p>
@@ -11304,7 +13621,7 @@
               </a:defRPr>
             </a:pPr>
             <a:r>
-              <a:t>输出: data/features.csv (~30 列特征 + y)</a:t>
+              <a:t>→ 输出: data/features.csv (~30 列特征)</a:t>
             </a:r>
           </a:p>
         </p:txBody>
@@ -11317,7 +13634,7 @@
         </p:nvSpPr>
         <p:spPr>
           <a:xfrm>
-            <a:off x="731520" y="3566160"/>
+            <a:off x="731520" y="3840480"/>
             <a:ext cx="4572000" cy="274320"/>
           </a:xfrm>
           <a:prstGeom prst="rect">
@@ -11353,7 +13670,7 @@
           <p:nvPr/>
         </p:nvGraphicFramePr>
         <p:xfrm>
-          <a:off x="731520" y="3840480"/>
+          <a:off x="731520" y="4114800"/>
           <a:ext cx="6949440" cy="2240279"/>
         </p:xfrm>
         <a:graphic>
@@ -11942,8 +14259,8 @@
         </p:nvSpPr>
         <p:spPr>
           <a:xfrm>
-            <a:off x="6400800" y="3566160"/>
-            <a:ext cx="4572000" cy="274320"/>
+            <a:off x="10515600" y="6492240"/>
+            <a:ext cx="1371600" cy="274320"/>
           </a:xfrm>
           <a:prstGeom prst="rect">
             <a:avLst/>
@@ -11956,375 +14273,6 @@
           </a:bodyPr>
           <a:lstStyle/>
           <a:p>
-            <a:pPr algn="l">
-              <a:defRPr sz="1400" b="1">
-                <a:solidFill>
-                  <a:srgbClr val="0F172A"/>
-                </a:solidFill>
-              </a:defRPr>
-            </a:pPr>
-            <a:r>
-              <a:t>健康等级定义</a:t>
-            </a:r>
-          </a:p>
-        </p:txBody>
-      </p:sp>
-      <p:graphicFrame>
-        <p:nvGraphicFramePr>
-          <p:cNvPr id="9" name="Table 8"/>
-          <p:cNvGraphicFramePr>
-            <a:graphicFrameLocks noGrp="1"/>
-          </p:cNvGraphicFramePr>
-          <p:nvPr/>
-        </p:nvGraphicFramePr>
-        <p:xfrm>
-          <a:off x="6400800" y="3840480"/>
-          <a:ext cx="4572000" cy="1600200"/>
-        </p:xfrm>
-        <a:graphic>
-          <a:graphicData uri="http://schemas.openxmlformats.org/drawingml/2006/table">
-            <a:tbl>
-              <a:tblPr firstRow="1" bandRow="1">
-                <a:tableStyleId>{5C22544A-7EE6-4342-B048-85BDC9FD1C3A}</a:tableStyleId>
-              </a:tblPr>
-              <a:tblGrid>
-                <a:gridCol w="1280160"/>
-                <a:gridCol w="1645920"/>
-                <a:gridCol w="1645920"/>
-              </a:tblGrid>
-              <a:tr h="320040">
-                <a:tc>
-                  <a:txBody>
-                    <a:bodyPr/>
-                    <a:lstStyle/>
-                    <a:p>
-                      <a:pPr>
-                        <a:defRPr sz="1100" b="1">
-                          <a:solidFill>
-                            <a:srgbClr val="0F172A"/>
-                          </a:solidFill>
-                        </a:defRPr>
-                      </a:pPr>
-                      <a:r>
-                        <a:t>等级</a:t>
-                      </a:r>
-                    </a:p>
-                  </a:txBody>
-                  <a:tcPr>
-                    <a:solidFill>
-                      <a:srgbClr val="F8FAFC"/>
-                    </a:solidFill>
-                  </a:tcPr>
-                </a:tc>
-                <a:tc>
-                  <a:txBody>
-                    <a:bodyPr/>
-                    <a:lstStyle/>
-                    <a:p>
-                      <a:pPr>
-                        <a:defRPr sz="1100" b="1">
-                          <a:solidFill>
-                            <a:srgbClr val="0F172A"/>
-                          </a:solidFill>
-                        </a:defRPr>
-                      </a:pPr>
-                      <a:r>
-                        <a:t>latent_health</a:t>
-                      </a:r>
-                    </a:p>
-                  </a:txBody>
-                  <a:tcPr>
-                    <a:solidFill>
-                      <a:srgbClr val="F8FAFC"/>
-                    </a:solidFill>
-                  </a:tcPr>
-                </a:tc>
-                <a:tc>
-                  <a:txBody>
-                    <a:bodyPr/>
-                    <a:lstStyle/>
-                    <a:p>
-                      <a:pPr>
-                        <a:defRPr sz="1100" b="1">
-                          <a:solidFill>
-                            <a:srgbClr val="0F172A"/>
-                          </a:solidFill>
-                        </a:defRPr>
-                      </a:pPr>
-                      <a:r>
-                        <a:t>状态</a:t>
-                      </a:r>
-                    </a:p>
-                  </a:txBody>
-                  <a:tcPr>
-                    <a:solidFill>
-                      <a:srgbClr val="F8FAFC"/>
-                    </a:solidFill>
-                  </a:tcPr>
-                </a:tc>
-              </a:tr>
-              <a:tr h="320040">
-                <a:tc>
-                  <a:txBody>
-                    <a:bodyPr/>
-                    <a:lstStyle/>
-                    <a:p>
-                      <a:pPr>
-                        <a:defRPr sz="1100">
-                          <a:solidFill>
-                            <a:srgbClr val="334155"/>
-                          </a:solidFill>
-                        </a:defRPr>
-                      </a:pPr>
-                      <a:r>
-                        <a:t>Lv0 健康</a:t>
-                      </a:r>
-                    </a:p>
-                  </a:txBody>
-                  <a:tcPr/>
-                </a:tc>
-                <a:tc>
-                  <a:txBody>
-                    <a:bodyPr/>
-                    <a:lstStyle/>
-                    <a:p>
-                      <a:pPr>
-                        <a:defRPr sz="1100">
-                          <a:solidFill>
-                            <a:srgbClr val="334155"/>
-                          </a:solidFill>
-                        </a:defRPr>
-                      </a:pPr>
-                      <a:r>
-                        <a:t>≥ 0.80</a:t>
-                      </a:r>
-                    </a:p>
-                  </a:txBody>
-                  <a:tcPr/>
-                </a:tc>
-                <a:tc>
-                  <a:txBody>
-                    <a:bodyPr/>
-                    <a:lstStyle/>
-                    <a:p>
-                      <a:pPr>
-                        <a:defRPr sz="1100">
-                          <a:solidFill>
-                            <a:srgbClr val="334155"/>
-                          </a:solidFill>
-                        </a:defRPr>
-                      </a:pPr>
-                      <a:r>
-                        <a:t>🟢 正常运转</a:t>
-                      </a:r>
-                    </a:p>
-                  </a:txBody>
-                  <a:tcPr/>
-                </a:tc>
-              </a:tr>
-              <a:tr h="320040">
-                <a:tc>
-                  <a:txBody>
-                    <a:bodyPr/>
-                    <a:lstStyle/>
-                    <a:p>
-                      <a:pPr>
-                        <a:defRPr sz="1100">
-                          <a:solidFill>
-                            <a:srgbClr val="334155"/>
-                          </a:solidFill>
-                        </a:defRPr>
-                      </a:pPr>
-                      <a:r>
-                        <a:t>Lv1 注意</a:t>
-                      </a:r>
-                    </a:p>
-                  </a:txBody>
-                  <a:tcPr/>
-                </a:tc>
-                <a:tc>
-                  <a:txBody>
-                    <a:bodyPr/>
-                    <a:lstStyle/>
-                    <a:p>
-                      <a:pPr>
-                        <a:defRPr sz="1100">
-                          <a:solidFill>
-                            <a:srgbClr val="334155"/>
-                          </a:solidFill>
-                        </a:defRPr>
-                      </a:pPr>
-                      <a:r>
-                        <a:t>0.60~0.80</a:t>
-                      </a:r>
-                    </a:p>
-                  </a:txBody>
-                  <a:tcPr/>
-                </a:tc>
-                <a:tc>
-                  <a:txBody>
-                    <a:bodyPr/>
-                    <a:lstStyle/>
-                    <a:p>
-                      <a:pPr>
-                        <a:defRPr sz="1100">
-                          <a:solidFill>
-                            <a:srgbClr val="334155"/>
-                          </a:solidFill>
-                        </a:defRPr>
-                      </a:pPr>
-                      <a:r>
-                        <a:t>🟡 关注趋势</a:t>
-                      </a:r>
-                    </a:p>
-                  </a:txBody>
-                  <a:tcPr/>
-                </a:tc>
-              </a:tr>
-              <a:tr h="320040">
-                <a:tc>
-                  <a:txBody>
-                    <a:bodyPr/>
-                    <a:lstStyle/>
-                    <a:p>
-                      <a:pPr>
-                        <a:defRPr sz="1100">
-                          <a:solidFill>
-                            <a:srgbClr val="334155"/>
-                          </a:solidFill>
-                        </a:defRPr>
-                      </a:pPr>
-                      <a:r>
-                        <a:t>Lv2 警告</a:t>
-                      </a:r>
-                    </a:p>
-                  </a:txBody>
-                  <a:tcPr/>
-                </a:tc>
-                <a:tc>
-                  <a:txBody>
-                    <a:bodyPr/>
-                    <a:lstStyle/>
-                    <a:p>
-                      <a:pPr>
-                        <a:defRPr sz="1100">
-                          <a:solidFill>
-                            <a:srgbClr val="334155"/>
-                          </a:solidFill>
-                        </a:defRPr>
-                      </a:pPr>
-                      <a:r>
-                        <a:t>0.40~0.60</a:t>
-                      </a:r>
-                    </a:p>
-                  </a:txBody>
-                  <a:tcPr/>
-                </a:tc>
-                <a:tc>
-                  <a:txBody>
-                    <a:bodyPr/>
-                    <a:lstStyle/>
-                    <a:p>
-                      <a:pPr>
-                        <a:defRPr sz="1100">
-                          <a:solidFill>
-                            <a:srgbClr val="334155"/>
-                          </a:solidFill>
-                        </a:defRPr>
-                      </a:pPr>
-                      <a:r>
-                        <a:t>🔴 明显异常</a:t>
-                      </a:r>
-                    </a:p>
-                  </a:txBody>
-                  <a:tcPr/>
-                </a:tc>
-              </a:tr>
-              <a:tr h="320040">
-                <a:tc>
-                  <a:txBody>
-                    <a:bodyPr/>
-                    <a:lstStyle/>
-                    <a:p>
-                      <a:pPr>
-                        <a:defRPr sz="1100">
-                          <a:solidFill>
-                            <a:srgbClr val="334155"/>
-                          </a:solidFill>
-                        </a:defRPr>
-                      </a:pPr>
-                      <a:r>
-                        <a:t>Lv3 危险</a:t>
-                      </a:r>
-                    </a:p>
-                  </a:txBody>
-                  <a:tcPr/>
-                </a:tc>
-                <a:tc>
-                  <a:txBody>
-                    <a:bodyPr/>
-                    <a:lstStyle/>
-                    <a:p>
-                      <a:pPr>
-                        <a:defRPr sz="1100">
-                          <a:solidFill>
-                            <a:srgbClr val="334155"/>
-                          </a:solidFill>
-                        </a:defRPr>
-                      </a:pPr>
-                      <a:r>
-                        <a:t>&lt; 0.40</a:t>
-                      </a:r>
-                    </a:p>
-                  </a:txBody>
-                  <a:tcPr/>
-                </a:tc>
-                <a:tc>
-                  <a:txBody>
-                    <a:bodyPr/>
-                    <a:lstStyle/>
-                    <a:p>
-                      <a:pPr>
-                        <a:defRPr sz="1100">
-                          <a:solidFill>
-                            <a:srgbClr val="334155"/>
-                          </a:solidFill>
-                        </a:defRPr>
-                      </a:pPr>
-                      <a:r>
-                        <a:t>🟣 停机检查</a:t>
-                      </a:r>
-                    </a:p>
-                  </a:txBody>
-                  <a:tcPr/>
-                </a:tc>
-              </a:tr>
-            </a:tbl>
-          </a:graphicData>
-        </a:graphic>
-      </p:graphicFrame>
-      <p:sp>
-        <p:nvSpPr>
-          <p:cNvPr id="10" name="TextBox 9"/>
-          <p:cNvSpPr txBox="1"/>
-          <p:nvPr/>
-        </p:nvSpPr>
-        <p:spPr>
-          <a:xfrm>
-            <a:off x="10515600" y="6492240"/>
-            <a:ext cx="1371600" cy="274320"/>
-          </a:xfrm>
-          <a:prstGeom prst="rect">
-            <a:avLst/>
-          </a:prstGeom>
-          <a:noFill/>
-        </p:spPr>
-        <p:txBody>
-          <a:bodyPr wrap="square">
-            <a:spAutoFit/>
-          </a:bodyPr>
-          <a:lstStyle/>
-          <a:p>
             <a:pPr algn="r">
               <a:defRPr sz="1000" b="0">
                 <a:solidFill>
@@ -12333,7 +14281,7 @@
               </a:defRPr>
             </a:pPr>
             <a:r>
-              <a:t>8 / 17</a:t>
+              <a:t>8 / 19</a:t>
             </a:r>
           </a:p>
         </p:txBody>
@@ -12429,7 +14377,7 @@
               </a:defRPr>
             </a:pPr>
             <a:r>
-              <a:t>scikit-learn Pipeline + 去抖迟滞逻辑</a:t>
+              <a:t>scikit-learn Pipeline + 去抖迟滞逻辑 · 多模型可选</a:t>
             </a:r>
           </a:p>
         </p:txBody>
@@ -12443,7 +14391,7 @@
         <p:spPr>
           <a:xfrm>
             <a:off x="731520" y="1280160"/>
-            <a:ext cx="5303520" cy="1371600"/>
+            <a:ext cx="5303520" cy="1828800"/>
           </a:xfrm>
           <a:prstGeom prst="roundRect">
             <a:avLst/>
@@ -12486,7 +14434,7 @@
               </a:defRPr>
             </a:pPr>
             <a:r>
-              <a:t>训练 Pipeline</a:t>
+              <a:t>训练 Pipeline（3 种模型可选）</a:t>
             </a:r>
           </a:p>
           <a:p>
@@ -12494,7 +14442,7 @@
               <a:spcAft>
                 <a:spcPts val="200"/>
               </a:spcAft>
-              <a:defRPr sz="1100">
+              <a:defRPr sz="1000">
                 <a:solidFill>
                   <a:srgbClr val="64748B"/>
                 </a:solidFill>
@@ -12509,7 +14457,7 @@
               <a:spcAft>
                 <a:spcPts val="200"/>
               </a:spcAft>
-              <a:defRPr sz="1100">
+              <a:defRPr sz="1000">
                 <a:solidFill>
                   <a:srgbClr val="64748B"/>
                 </a:solidFill>
@@ -12524,14 +14472,14 @@
               <a:spcAft>
                 <a:spcPts val="200"/>
               </a:spcAft>
-              <a:defRPr sz="1100">
-                <a:solidFill>
-                  <a:srgbClr val="64748B"/>
-                </a:solidFill>
-              </a:defRPr>
-            </a:pPr>
-            <a:r>
-              <a:t>DecisionTreeClassifier(max_depth=5, min_leaf=50, balanced)</a:t>
+              <a:defRPr sz="1000">
+                <a:solidFill>
+                  <a:srgbClr val="64748B"/>
+                </a:solidFill>
+              </a:defRPr>
+            </a:pPr>
+            <a:r>
+              <a:t>--model tree → DecisionTreeClassifier(max_depth=5, balanced)</a:t>
             </a:r>
           </a:p>
           <a:p>
@@ -12539,14 +14487,14 @@
               <a:spcAft>
                 <a:spcPts val="200"/>
               </a:spcAft>
-              <a:defRPr sz="1100">
-                <a:solidFill>
-                  <a:srgbClr val="64748B"/>
-                </a:solidFill>
-              </a:defRPr>
-            </a:pPr>
-            <a:r>
-              <a:t>时间序列分割: 按窗口时间顺序切分，避免数据泄露</a:t>
+              <a:defRPr sz="1000">
+                <a:solidFill>
+                  <a:srgbClr val="64748B"/>
+                </a:solidFill>
+              </a:defRPr>
+            </a:pPr>
+            <a:r>
+              <a:t>--model xgb  → XGBClassifier</a:t>
             </a:r>
           </a:p>
           <a:p>
@@ -12554,14 +14502,44 @@
               <a:spcAft>
                 <a:spcPts val="200"/>
               </a:spcAft>
-              <a:defRPr sz="1100">
-                <a:solidFill>
-                  <a:srgbClr val="64748B"/>
-                </a:solidFill>
-              </a:defRPr>
-            </a:pPr>
-            <a:r>
-              <a:t>feature_set=online: 只用 OnlineScorer 可实时计算的特征</a:t>
+              <a:defRPr sz="1000">
+                <a:solidFill>
+                  <a:srgbClr val="64748B"/>
+                </a:solidFill>
+              </a:defRPr>
+            </a:pPr>
+            <a:r>
+              <a:t>--model lgb  → LGBMClassifier</a:t>
+            </a:r>
+          </a:p>
+          <a:p>
+            <a:pPr>
+              <a:spcAft>
+                <a:spcPts val="200"/>
+              </a:spcAft>
+              <a:defRPr sz="1000">
+                <a:solidFill>
+                  <a:srgbClr val="64748B"/>
+                </a:solidFill>
+              </a:defRPr>
+            </a:pPr>
+            <a:r>
+              <a:t>时间序列分割: 按窗口时间顺序切分，避免数据泄露</a:t>
+            </a:r>
+          </a:p>
+          <a:p>
+            <a:pPr>
+              <a:spcAft>
+                <a:spcPts val="200"/>
+              </a:spcAft>
+              <a:defRPr sz="1000">
+                <a:solidFill>
+                  <a:srgbClr val="64748B"/>
+                </a:solidFill>
+              </a:defRPr>
+            </a:pPr>
+            <a:r>
+              <a:t>feature_stats: 训练后按健康等级计算均值/std 存入模型</a:t>
             </a:r>
           </a:p>
         </p:txBody>
@@ -12574,8 +14552,8 @@
         </p:nvSpPr>
         <p:spPr>
           <a:xfrm>
-            <a:off x="731520" y="2834640"/>
-            <a:ext cx="5303520" cy="1097280"/>
+            <a:off x="731520" y="3291840"/>
+            <a:ext cx="5303520" cy="1188720"/>
           </a:xfrm>
           <a:prstGeom prst="roundRect">
             <a:avLst/>
@@ -12618,7 +14596,7 @@
               </a:defRPr>
             </a:pPr>
             <a:r>
-              <a:t>8 个在线特征</a:t>
+              <a:t>8 个在线特征 (feature_set=online)</a:t>
             </a:r>
           </a:p>
           <a:p>
@@ -12626,7 +14604,7 @@
               <a:spcAft>
                 <a:spcPts val="200"/>
               </a:spcAft>
-              <a:defRPr sz="1100">
+              <a:defRPr sz="1000">
                 <a:solidFill>
                   <a:srgbClr val="64748B"/>
                 </a:solidFill>
@@ -12641,7 +14619,7 @@
               <a:spcAft>
                 <a:spcPts val="200"/>
               </a:spcAft>
-              <a:defRPr sz="1100">
+              <a:defRPr sz="1000">
                 <a:solidFill>
                   <a:srgbClr val="64748B"/>
                 </a:solidFill>
@@ -12656,7 +14634,7 @@
               <a:spcAft>
                 <a:spcPts val="200"/>
               </a:spcAft>
-              <a:defRPr sz="1100">
+              <a:defRPr sz="1000">
                 <a:solidFill>
                   <a:srgbClr val="64748B"/>
                 </a:solidFill>
@@ -12728,7 +14706,7 @@
               <a:spcAft>
                 <a:spcPts val="200"/>
               </a:spcAft>
-              <a:defRPr sz="1100">
+              <a:defRPr sz="1000">
                 <a:solidFill>
                   <a:srgbClr val="64748B"/>
                 </a:solidFill>
@@ -12743,7 +14721,7 @@
               <a:spcAft>
                 <a:spcPts val="200"/>
               </a:spcAft>
-              <a:defRPr sz="1100">
+              <a:defRPr sz="1000">
                 <a:solidFill>
                   <a:srgbClr val="64748B"/>
                 </a:solidFill>
@@ -12758,7 +14736,7 @@
               <a:spcAft>
                 <a:spcPts val="200"/>
               </a:spcAft>
-              <a:defRPr sz="1100">
+              <a:defRPr sz="1000">
                 <a:solidFill>
                   <a:srgbClr val="64748B"/>
                 </a:solidFill>
@@ -12773,7 +14751,7 @@
               <a:spcAft>
                 <a:spcPts val="200"/>
               </a:spcAft>
-              <a:defRPr sz="1100">
+              <a:defRPr sz="1000">
                 <a:solidFill>
                   <a:srgbClr val="64748B"/>
                 </a:solidFill>
@@ -12788,7 +14766,7 @@
               <a:spcAft>
                 <a:spcPts val="200"/>
               </a:spcAft>
-              <a:defRPr sz="1100">
+              <a:defRPr sz="1000">
                 <a:solidFill>
                   <a:srgbClr val="64748B"/>
                 </a:solidFill>
@@ -12803,14 +14781,14 @@
               <a:spcAft>
                 <a:spcPts val="200"/>
               </a:spcAft>
-              <a:defRPr sz="1100">
-                <a:solidFill>
-                  <a:srgbClr val="64748B"/>
-                </a:solidFill>
-              </a:defRPr>
-            </a:pPr>
-            <a:r>
-              <a:t>⑥ 遍历决策树生成可读解释路径</a:t>
+              <a:defRPr sz="1000">
+                <a:solidFill>
+                  <a:srgbClr val="64748B"/>
+                </a:solidFill>
+              </a:defRPr>
+            </a:pPr>
+            <a:r>
+              <a:t>⑥ Tree: 遍历决策路径 / XGB/LGB: z-score 偏差诊断</a:t>
             </a:r>
           </a:p>
         </p:txBody>
@@ -13178,8 +15156,8 @@
         </p:nvSpPr>
         <p:spPr>
           <a:xfrm>
-            <a:off x="6583680" y="4754880"/>
-            <a:ext cx="4937760" cy="640080"/>
+            <a:off x="6583680" y="4800600"/>
+            <a:ext cx="4937760" cy="594360"/>
           </a:xfrm>
           <a:prstGeom prst="roundRect">
             <a:avLst/>
@@ -13222,7 +15200,7 @@
         <p:spPr>
           <a:xfrm>
             <a:off x="6766560" y="4846320"/>
-            <a:ext cx="4572000" cy="457200"/>
+            <a:ext cx="4572000" cy="502920"/>
           </a:xfrm>
           <a:prstGeom prst="rect">
             <a:avLst/>
@@ -13243,7 +15221,11 @@
               </a:defRPr>
             </a:pPr>
             <a:r>
-              <a:t>工业语义：报警需快速响应，解除需谨慎验证 —— 宁可多等，不误解除</a:t>
+              <a:t>工业语义：报警需快速响应，解除需谨慎验证</a:t>
+            </a:r>
+            <a:br/>
+            <a:r>
+              <a:t>宁可多等，不误解除</a:t>
             </a:r>
           </a:p>
         </p:txBody>
@@ -13278,7 +15260,7 @@
               </a:defRPr>
             </a:pPr>
             <a:r>
-              <a:t>9 / 17</a:t>
+              <a:t>9 / 19</a:t>
             </a:r>
           </a:p>
         </p:txBody>
